--- a/poster/poster.pptx
+++ b/poster/poster.pptx
@@ -3726,7 +3726,7 @@
         <p:spPr>
           <a:xfrm>
             <a:off x="792000" y="7920000"/>
-            <a:ext cx="9927000" cy="1080000"/>
+            <a:ext cx="9927000" cy="792000"/>
           </a:xfrm>
           <a:prstGeom prst="rect">
             <a:avLst/>
@@ -3750,15 +3750,39 @@
           </a:p>
         </p:txBody>
       </p:sp>
-      <p:sp>
-        <p:nvSpPr>
-          <p:cNvPr id="18" name="Rectangle 17"/>
+      <p:pic>
+        <p:nvPicPr>
+          <p:cNvPr id="18" name="Picture 17" descr="colpali_architecture.png"/>
+          <p:cNvPicPr>
+            <a:picLocks noChangeAspect="1"/>
+          </p:cNvPicPr>
+          <p:nvPr/>
+        </p:nvPicPr>
+        <p:blipFill>
+          <a:blip r:embed="rId2"/>
+          <a:stretch>
+            <a:fillRect/>
+          </a:stretch>
+        </p:blipFill>
+        <p:spPr>
+          <a:xfrm>
+            <a:off x="792000" y="8748000"/>
+            <a:ext cx="9927000" cy="3655372"/>
+          </a:xfrm>
+          <a:prstGeom prst="rect">
+            <a:avLst/>
+          </a:prstGeom>
+        </p:spPr>
+      </p:pic>
+      <p:sp>
+        <p:nvSpPr>
+          <p:cNvPr id="19" name="Rectangle 18"/>
           <p:cNvSpPr/>
           <p:nvPr/>
         </p:nvSpPr>
         <p:spPr>
           <a:xfrm>
-            <a:off x="792000" y="9072000"/>
+            <a:off x="792000" y="12547372"/>
             <a:ext cx="54000" cy="252000"/>
           </a:xfrm>
           <a:prstGeom prst="rect">
@@ -3793,13 +3817,13 @@
       </p:sp>
       <p:sp>
         <p:nvSpPr>
-          <p:cNvPr id="19" name="TextBox 18"/>
+          <p:cNvPr id="20" name="TextBox 19"/>
           <p:cNvSpPr txBox="1"/>
           <p:nvPr/>
         </p:nvSpPr>
         <p:spPr>
           <a:xfrm>
-            <a:off x="936000" y="9036000"/>
+            <a:off x="936000" y="12511372"/>
             <a:ext cx="9783000" cy="324000"/>
           </a:xfrm>
           <a:prstGeom prst="rect">
@@ -3826,13 +3850,13 @@
       </p:sp>
       <p:sp>
         <p:nvSpPr>
-          <p:cNvPr id="20" name="TextBox 19"/>
+          <p:cNvPr id="21" name="TextBox 20"/>
           <p:cNvSpPr txBox="1"/>
           <p:nvPr/>
         </p:nvSpPr>
         <p:spPr>
           <a:xfrm>
-            <a:off x="792000" y="9396000"/>
+            <a:off x="792000" y="12871372"/>
             <a:ext cx="9927000" cy="720000"/>
           </a:xfrm>
           <a:prstGeom prst="rect">
@@ -3859,13 +3883,13 @@
       </p:sp>
       <p:sp>
         <p:nvSpPr>
-          <p:cNvPr id="21" name="Rectangle 20"/>
+          <p:cNvPr id="22" name="Rectangle 21"/>
           <p:cNvSpPr/>
           <p:nvPr/>
         </p:nvSpPr>
         <p:spPr>
           <a:xfrm>
-            <a:off x="792000" y="10152000"/>
+            <a:off x="792000" y="13627372"/>
             <a:ext cx="9927000" cy="396000"/>
           </a:xfrm>
           <a:prstGeom prst="rect">
@@ -3900,13 +3924,13 @@
       </p:sp>
       <p:sp>
         <p:nvSpPr>
-          <p:cNvPr id="22" name="TextBox 21"/>
+          <p:cNvPr id="23" name="TextBox 22"/>
           <p:cNvSpPr txBox="1"/>
           <p:nvPr/>
         </p:nvSpPr>
         <p:spPr>
           <a:xfrm>
-            <a:off x="900000" y="10188000"/>
+            <a:off x="900000" y="13663372"/>
             <a:ext cx="9783000" cy="396000"/>
           </a:xfrm>
           <a:prstGeom prst="rect">
@@ -3933,13 +3957,13 @@
       </p:sp>
       <p:sp>
         <p:nvSpPr>
-          <p:cNvPr id="23" name="TextBox 22"/>
+          <p:cNvPr id="24" name="TextBox 23"/>
           <p:cNvSpPr txBox="1"/>
           <p:nvPr/>
         </p:nvSpPr>
         <p:spPr>
           <a:xfrm>
-            <a:off x="792000" y="10656000"/>
+            <a:off x="792000" y="14131372"/>
             <a:ext cx="9927000" cy="720000"/>
           </a:xfrm>
           <a:prstGeom prst="rect">
@@ -3966,13 +3990,13 @@
       </p:sp>
       <p:sp>
         <p:nvSpPr>
-          <p:cNvPr id="24" name="Rectangle 23"/>
+          <p:cNvPr id="25" name="Rectangle 24"/>
           <p:cNvSpPr/>
           <p:nvPr/>
         </p:nvSpPr>
         <p:spPr>
           <a:xfrm>
-            <a:off x="792000" y="11448000"/>
+            <a:off x="792000" y="14923372"/>
             <a:ext cx="54000" cy="252000"/>
           </a:xfrm>
           <a:prstGeom prst="rect">
@@ -4007,13 +4031,13 @@
       </p:sp>
       <p:sp>
         <p:nvSpPr>
-          <p:cNvPr id="25" name="TextBox 24"/>
+          <p:cNvPr id="26" name="TextBox 25"/>
           <p:cNvSpPr txBox="1"/>
           <p:nvPr/>
         </p:nvSpPr>
         <p:spPr>
           <a:xfrm>
-            <a:off x="936000" y="11412000"/>
+            <a:off x="936000" y="14887372"/>
             <a:ext cx="9783000" cy="324000"/>
           </a:xfrm>
           <a:prstGeom prst="rect">
@@ -4040,13 +4064,13 @@
       </p:sp>
       <p:sp>
         <p:nvSpPr>
-          <p:cNvPr id="26" name="TextBox 25"/>
+          <p:cNvPr id="27" name="TextBox 26"/>
           <p:cNvSpPr txBox="1"/>
           <p:nvPr/>
         </p:nvSpPr>
         <p:spPr>
           <a:xfrm>
-            <a:off x="864000" y="11772000"/>
+            <a:off x="864000" y="15247372"/>
             <a:ext cx="9855000" cy="342000"/>
           </a:xfrm>
           <a:prstGeom prst="rect">
@@ -4089,13 +4113,13 @@
       </p:sp>
       <p:sp>
         <p:nvSpPr>
-          <p:cNvPr id="27" name="TextBox 26"/>
+          <p:cNvPr id="28" name="TextBox 27"/>
           <p:cNvSpPr txBox="1"/>
           <p:nvPr/>
         </p:nvSpPr>
         <p:spPr>
           <a:xfrm>
-            <a:off x="864000" y="12042000"/>
+            <a:off x="864000" y="15517372"/>
             <a:ext cx="9855000" cy="342000"/>
           </a:xfrm>
           <a:prstGeom prst="rect">
@@ -4138,13 +4162,13 @@
       </p:sp>
       <p:sp>
         <p:nvSpPr>
-          <p:cNvPr id="28" name="TextBox 27"/>
+          <p:cNvPr id="29" name="TextBox 28"/>
           <p:cNvSpPr txBox="1"/>
           <p:nvPr/>
         </p:nvSpPr>
         <p:spPr>
           <a:xfrm>
-            <a:off x="864000" y="12312000"/>
+            <a:off x="864000" y="15787372"/>
             <a:ext cx="9855000" cy="342000"/>
           </a:xfrm>
           <a:prstGeom prst="rect">
@@ -4187,13 +4211,13 @@
       </p:sp>
       <p:sp>
         <p:nvSpPr>
-          <p:cNvPr id="29" name="TextBox 28"/>
+          <p:cNvPr id="30" name="TextBox 29"/>
           <p:cNvSpPr txBox="1"/>
           <p:nvPr/>
         </p:nvSpPr>
         <p:spPr>
           <a:xfrm>
-            <a:off x="864000" y="12582000"/>
+            <a:off x="864000" y="16057372"/>
             <a:ext cx="9855000" cy="342000"/>
           </a:xfrm>
           <a:prstGeom prst="rect">
@@ -4236,7 +4260,7 @@
       </p:sp>
       <p:sp>
         <p:nvSpPr>
-          <p:cNvPr id="30" name="Rectangle 29"/>
+          <p:cNvPr id="31" name="Rectangle 30"/>
           <p:cNvSpPr/>
           <p:nvPr/>
         </p:nvSpPr>
@@ -4277,7 +4301,7 @@
       </p:sp>
       <p:sp>
         <p:nvSpPr>
-          <p:cNvPr id="31" name="TextBox 30"/>
+          <p:cNvPr id="32" name="TextBox 31"/>
           <p:cNvSpPr txBox="1"/>
           <p:nvPr/>
         </p:nvSpPr>
@@ -4310,7 +4334,7 @@
       </p:sp>
       <p:sp>
         <p:nvSpPr>
-          <p:cNvPr id="32" name="Rectangle 31"/>
+          <p:cNvPr id="33" name="Rectangle 32"/>
           <p:cNvSpPr/>
           <p:nvPr/>
         </p:nvSpPr>
@@ -4351,7 +4375,7 @@
       </p:sp>
       <p:sp>
         <p:nvSpPr>
-          <p:cNvPr id="33" name="Rectangle 32"/>
+          <p:cNvPr id="34" name="Rectangle 33"/>
           <p:cNvSpPr/>
           <p:nvPr/>
         </p:nvSpPr>
@@ -4392,7 +4416,7 @@
       </p:sp>
       <p:sp>
         <p:nvSpPr>
-          <p:cNvPr id="34" name="TextBox 33"/>
+          <p:cNvPr id="35" name="TextBox 34"/>
           <p:cNvSpPr txBox="1"/>
           <p:nvPr/>
         </p:nvSpPr>
@@ -4425,7 +4449,7 @@
       </p:sp>
       <p:sp>
         <p:nvSpPr>
-          <p:cNvPr id="35" name="Rectangle 34"/>
+          <p:cNvPr id="36" name="Rectangle 35"/>
           <p:cNvSpPr/>
           <p:nvPr/>
         </p:nvSpPr>
@@ -4466,7 +4490,7 @@
       </p:sp>
       <p:sp>
         <p:nvSpPr>
-          <p:cNvPr id="36" name="TextBox 35"/>
+          <p:cNvPr id="37" name="TextBox 36"/>
           <p:cNvSpPr txBox="1"/>
           <p:nvPr/>
         </p:nvSpPr>
@@ -4499,7 +4523,7 @@
       </p:sp>
       <p:sp>
         <p:nvSpPr>
-          <p:cNvPr id="37" name="TextBox 36"/>
+          <p:cNvPr id="38" name="TextBox 37"/>
           <p:cNvSpPr txBox="1"/>
           <p:nvPr/>
         </p:nvSpPr>
@@ -4548,7 +4572,7 @@
       </p:sp>
       <p:sp>
         <p:nvSpPr>
-          <p:cNvPr id="38" name="TextBox 37"/>
+          <p:cNvPr id="39" name="TextBox 38"/>
           <p:cNvSpPr txBox="1"/>
           <p:nvPr/>
         </p:nvSpPr>
@@ -4597,7 +4621,7 @@
       </p:sp>
       <p:sp>
         <p:nvSpPr>
-          <p:cNvPr id="39" name="TextBox 38"/>
+          <p:cNvPr id="40" name="TextBox 39"/>
           <p:cNvSpPr txBox="1"/>
           <p:nvPr/>
         </p:nvSpPr>
@@ -4646,7 +4670,7 @@
       </p:sp>
       <p:sp>
         <p:nvSpPr>
-          <p:cNvPr id="40" name="Rectangle 39"/>
+          <p:cNvPr id="41" name="Rectangle 40"/>
           <p:cNvSpPr/>
           <p:nvPr/>
         </p:nvSpPr>
@@ -4687,7 +4711,7 @@
       </p:sp>
       <p:sp>
         <p:nvSpPr>
-          <p:cNvPr id="41" name="TextBox 40"/>
+          <p:cNvPr id="42" name="TextBox 41"/>
           <p:cNvSpPr txBox="1"/>
           <p:nvPr/>
         </p:nvSpPr>
@@ -4720,7 +4744,7 @@
       </p:sp>
       <p:sp>
         <p:nvSpPr>
-          <p:cNvPr id="42" name="TextBox 41"/>
+          <p:cNvPr id="43" name="TextBox 42"/>
           <p:cNvSpPr txBox="1"/>
           <p:nvPr/>
         </p:nvSpPr>
@@ -4769,7 +4793,7 @@
       </p:sp>
       <p:sp>
         <p:nvSpPr>
-          <p:cNvPr id="43" name="TextBox 42"/>
+          <p:cNvPr id="44" name="TextBox 43"/>
           <p:cNvSpPr txBox="1"/>
           <p:nvPr/>
         </p:nvSpPr>
@@ -4818,7 +4842,7 @@
       </p:sp>
       <p:sp>
         <p:nvSpPr>
-          <p:cNvPr id="44" name="TextBox 43"/>
+          <p:cNvPr id="45" name="TextBox 44"/>
           <p:cNvSpPr txBox="1"/>
           <p:nvPr/>
         </p:nvSpPr>
@@ -4867,7 +4891,7 @@
       </p:sp>
       <p:sp>
         <p:nvSpPr>
-          <p:cNvPr id="45" name="TextBox 44"/>
+          <p:cNvPr id="46" name="TextBox 45"/>
           <p:cNvSpPr txBox="1"/>
           <p:nvPr/>
         </p:nvSpPr>
@@ -4900,7 +4924,7 @@
       </p:sp>
       <p:sp>
         <p:nvSpPr>
-          <p:cNvPr id="46" name="Rectangle 45"/>
+          <p:cNvPr id="47" name="Rectangle 46"/>
           <p:cNvSpPr/>
           <p:nvPr/>
         </p:nvSpPr>
@@ -4941,7 +4965,7 @@
       </p:sp>
       <p:sp>
         <p:nvSpPr>
-          <p:cNvPr id="47" name="TextBox 46"/>
+          <p:cNvPr id="48" name="TextBox 47"/>
           <p:cNvSpPr txBox="1"/>
           <p:nvPr/>
         </p:nvSpPr>
@@ -4974,14 +4998,14 @@
       </p:sp>
       <p:sp>
         <p:nvSpPr>
-          <p:cNvPr id="48" name="TextBox 47"/>
+          <p:cNvPr id="49" name="TextBox 48"/>
           <p:cNvSpPr txBox="1"/>
           <p:nvPr/>
         </p:nvSpPr>
         <p:spPr>
           <a:xfrm>
             <a:off x="11223000" y="7956000"/>
-            <a:ext cx="9927000" cy="720000"/>
+            <a:ext cx="9927000" cy="576000"/>
           </a:xfrm>
           <a:prstGeom prst="rect">
             <a:avLst/>
@@ -5005,15 +5029,39 @@
           </a:p>
         </p:txBody>
       </p:sp>
-      <p:sp>
-        <p:nvSpPr>
-          <p:cNvPr id="49" name="Rectangle 48"/>
+      <p:pic>
+        <p:nvPicPr>
+          <p:cNvPr id="50" name="Picture 49" descr="deepseek_ocr2_fig3.jpg"/>
+          <p:cNvPicPr>
+            <a:picLocks noChangeAspect="1"/>
+          </p:cNvPicPr>
+          <p:nvPr/>
+        </p:nvPicPr>
+        <p:blipFill>
+          <a:blip r:embed="rId3"/>
+          <a:stretch>
+            <a:fillRect/>
+          </a:stretch>
+        </p:blipFill>
+        <p:spPr>
+          <a:xfrm>
+            <a:off x="11223000" y="8568000"/>
+            <a:ext cx="9927000" cy="3209730"/>
+          </a:xfrm>
+          <a:prstGeom prst="rect">
+            <a:avLst/>
+          </a:prstGeom>
+        </p:spPr>
+      </p:pic>
+      <p:sp>
+        <p:nvSpPr>
+          <p:cNvPr id="51" name="Rectangle 50"/>
           <p:cNvSpPr/>
           <p:nvPr/>
         </p:nvSpPr>
         <p:spPr>
           <a:xfrm>
-            <a:off x="11223000" y="8748000"/>
+            <a:off x="11223000" y="11921730"/>
             <a:ext cx="54000" cy="252000"/>
           </a:xfrm>
           <a:prstGeom prst="rect">
@@ -5048,13 +5096,13 @@
       </p:sp>
       <p:sp>
         <p:nvSpPr>
-          <p:cNvPr id="50" name="TextBox 49"/>
+          <p:cNvPr id="52" name="TextBox 51"/>
           <p:cNvSpPr txBox="1"/>
           <p:nvPr/>
         </p:nvSpPr>
         <p:spPr>
           <a:xfrm>
-            <a:off x="11367000" y="8712000"/>
+            <a:off x="11367000" y="11885730"/>
             <a:ext cx="9783000" cy="324000"/>
           </a:xfrm>
           <a:prstGeom prst="rect">
@@ -5081,13 +5129,13 @@
       </p:sp>
       <p:sp>
         <p:nvSpPr>
-          <p:cNvPr id="51" name="TextBox 50"/>
+          <p:cNvPr id="53" name="TextBox 52"/>
           <p:cNvSpPr txBox="1"/>
           <p:nvPr/>
         </p:nvSpPr>
         <p:spPr>
           <a:xfrm>
-            <a:off x="11295000" y="9072000"/>
+            <a:off x="11295000" y="12245730"/>
             <a:ext cx="9855000" cy="342000"/>
           </a:xfrm>
           <a:prstGeom prst="rect">
@@ -5130,13 +5178,13 @@
       </p:sp>
       <p:sp>
         <p:nvSpPr>
-          <p:cNvPr id="52" name="TextBox 51"/>
+          <p:cNvPr id="54" name="TextBox 53"/>
           <p:cNvSpPr txBox="1"/>
           <p:nvPr/>
         </p:nvSpPr>
         <p:spPr>
           <a:xfrm>
-            <a:off x="11295000" y="9342000"/>
+            <a:off x="11295000" y="12515730"/>
             <a:ext cx="9855000" cy="342000"/>
           </a:xfrm>
           <a:prstGeom prst="rect">
@@ -5179,13 +5227,13 @@
       </p:sp>
       <p:sp>
         <p:nvSpPr>
-          <p:cNvPr id="53" name="TextBox 52"/>
+          <p:cNvPr id="55" name="TextBox 54"/>
           <p:cNvSpPr txBox="1"/>
           <p:nvPr/>
         </p:nvSpPr>
         <p:spPr>
           <a:xfrm>
-            <a:off x="11295000" y="9612000"/>
+            <a:off x="11295000" y="12785730"/>
             <a:ext cx="9855000" cy="342000"/>
           </a:xfrm>
           <a:prstGeom prst="rect">
@@ -5228,13 +5276,13 @@
       </p:sp>
       <p:sp>
         <p:nvSpPr>
-          <p:cNvPr id="54" name="TextBox 53"/>
+          <p:cNvPr id="56" name="TextBox 55"/>
           <p:cNvSpPr txBox="1"/>
           <p:nvPr/>
         </p:nvSpPr>
         <p:spPr>
           <a:xfrm>
-            <a:off x="11295000" y="9882000"/>
+            <a:off x="11295000" y="13055730"/>
             <a:ext cx="9855000" cy="342000"/>
           </a:xfrm>
           <a:prstGeom prst="rect">
@@ -5277,7 +5325,7 @@
       </p:sp>
       <p:sp>
         <p:nvSpPr>
-          <p:cNvPr id="55" name="Rectangle 54"/>
+          <p:cNvPr id="57" name="Rectangle 56"/>
           <p:cNvSpPr/>
           <p:nvPr/>
         </p:nvSpPr>
@@ -5318,7 +5366,7 @@
       </p:sp>
       <p:sp>
         <p:nvSpPr>
-          <p:cNvPr id="56" name="TextBox 55"/>
+          <p:cNvPr id="58" name="TextBox 57"/>
           <p:cNvSpPr txBox="1"/>
           <p:nvPr/>
         </p:nvSpPr>
@@ -5351,7 +5399,7 @@
       </p:sp>
       <p:sp>
         <p:nvSpPr>
-          <p:cNvPr id="57" name="Rectangle 56"/>
+          <p:cNvPr id="59" name="Rectangle 58"/>
           <p:cNvSpPr/>
           <p:nvPr/>
         </p:nvSpPr>
@@ -5392,7 +5440,7 @@
       </p:sp>
       <p:sp>
         <p:nvSpPr>
-          <p:cNvPr id="58" name="TextBox 57"/>
+          <p:cNvPr id="60" name="TextBox 59"/>
           <p:cNvSpPr txBox="1"/>
           <p:nvPr/>
         </p:nvSpPr>
@@ -5425,7 +5473,7 @@
       </p:sp>
       <p:graphicFrame>
         <p:nvGraphicFramePr>
-          <p:cNvPr id="59" name="Table 58"/>
+          <p:cNvPr id="61" name="Table 60"/>
           <p:cNvGraphicFramePr>
             <a:graphicFrameLocks noGrp="1"/>
           </p:cNvGraphicFramePr>
@@ -5845,7 +5893,7 @@
       </p:graphicFrame>
       <p:sp>
         <p:nvSpPr>
-          <p:cNvPr id="60" name="Rectangle 59"/>
+          <p:cNvPr id="62" name="Rectangle 61"/>
           <p:cNvSpPr/>
           <p:nvPr/>
         </p:nvSpPr>
@@ -5886,7 +5934,7 @@
       </p:sp>
       <p:sp>
         <p:nvSpPr>
-          <p:cNvPr id="61" name="TextBox 60"/>
+          <p:cNvPr id="63" name="TextBox 62"/>
           <p:cNvSpPr txBox="1"/>
           <p:nvPr/>
         </p:nvSpPr>
@@ -5919,7 +5967,7 @@
       </p:sp>
       <p:graphicFrame>
         <p:nvGraphicFramePr>
-          <p:cNvPr id="62" name="Table 61"/>
+          <p:cNvPr id="64" name="Table 63"/>
           <p:cNvGraphicFramePr>
             <a:graphicFrameLocks noGrp="1"/>
           </p:cNvGraphicFramePr>
@@ -6583,7 +6631,7 @@
       </p:graphicFrame>
       <p:sp>
         <p:nvSpPr>
-          <p:cNvPr id="63" name="Rectangle 62"/>
+          <p:cNvPr id="65" name="Rectangle 64"/>
           <p:cNvSpPr/>
           <p:nvPr/>
         </p:nvSpPr>
@@ -6624,7 +6672,7 @@
       </p:sp>
       <p:sp>
         <p:nvSpPr>
-          <p:cNvPr id="64" name="TextBox 63"/>
+          <p:cNvPr id="66" name="TextBox 65"/>
           <p:cNvSpPr txBox="1"/>
           <p:nvPr/>
         </p:nvSpPr>
@@ -6657,7 +6705,7 @@
       </p:sp>
       <p:graphicFrame>
         <p:nvGraphicFramePr>
-          <p:cNvPr id="65" name="Table 64"/>
+          <p:cNvPr id="67" name="Table 66"/>
           <p:cNvGraphicFramePr>
             <a:graphicFrameLocks noGrp="1"/>
           </p:cNvGraphicFramePr>
@@ -7406,7 +7454,7 @@
       </p:graphicFrame>
       <p:sp>
         <p:nvSpPr>
-          <p:cNvPr id="66" name="Rectangle 65"/>
+          <p:cNvPr id="68" name="Rectangle 67"/>
           <p:cNvSpPr/>
           <p:nvPr/>
         </p:nvSpPr>
@@ -7447,7 +7495,7 @@
       </p:sp>
       <p:sp>
         <p:nvSpPr>
-          <p:cNvPr id="67" name="TextBox 66"/>
+          <p:cNvPr id="69" name="TextBox 68"/>
           <p:cNvSpPr txBox="1"/>
           <p:nvPr/>
         </p:nvSpPr>
@@ -7480,7 +7528,7 @@
       </p:sp>
       <p:sp>
         <p:nvSpPr>
-          <p:cNvPr id="68" name="Rectangle 67"/>
+          <p:cNvPr id="70" name="Rectangle 69"/>
           <p:cNvSpPr/>
           <p:nvPr/>
         </p:nvSpPr>
@@ -7521,7 +7569,7 @@
       </p:sp>
       <p:sp>
         <p:nvSpPr>
-          <p:cNvPr id="69" name="Rectangle 68"/>
+          <p:cNvPr id="71" name="Rectangle 70"/>
           <p:cNvSpPr/>
           <p:nvPr/>
         </p:nvSpPr>
@@ -7562,7 +7610,7 @@
       </p:sp>
       <p:sp>
         <p:nvSpPr>
-          <p:cNvPr id="70" name="TextBox 69"/>
+          <p:cNvPr id="72" name="TextBox 71"/>
           <p:cNvSpPr txBox="1"/>
           <p:nvPr/>
         </p:nvSpPr>
@@ -7595,7 +7643,7 @@
       </p:sp>
       <p:sp>
         <p:nvSpPr>
-          <p:cNvPr id="71" name="Rectangle 70"/>
+          <p:cNvPr id="73" name="Rectangle 72"/>
           <p:cNvSpPr/>
           <p:nvPr/>
         </p:nvSpPr>
@@ -7636,7 +7684,7 @@
       </p:sp>
       <p:sp>
         <p:nvSpPr>
-          <p:cNvPr id="72" name="TextBox 71"/>
+          <p:cNvPr id="74" name="TextBox 73"/>
           <p:cNvSpPr txBox="1"/>
           <p:nvPr/>
         </p:nvSpPr>
@@ -7669,7 +7717,7 @@
       </p:sp>
       <p:sp>
         <p:nvSpPr>
-          <p:cNvPr id="73" name="TextBox 72"/>
+          <p:cNvPr id="75" name="TextBox 74"/>
           <p:cNvSpPr txBox="1"/>
           <p:nvPr/>
         </p:nvSpPr>
@@ -7718,7 +7766,7 @@
       </p:sp>
       <p:sp>
         <p:nvSpPr>
-          <p:cNvPr id="74" name="TextBox 73"/>
+          <p:cNvPr id="76" name="TextBox 75"/>
           <p:cNvSpPr txBox="1"/>
           <p:nvPr/>
         </p:nvSpPr>
@@ -7767,7 +7815,7 @@
       </p:sp>
       <p:sp>
         <p:nvSpPr>
-          <p:cNvPr id="75" name="Rectangle 74"/>
+          <p:cNvPr id="77" name="Rectangle 76"/>
           <p:cNvSpPr/>
           <p:nvPr/>
         </p:nvSpPr>
@@ -7808,7 +7856,7 @@
       </p:sp>
       <p:sp>
         <p:nvSpPr>
-          <p:cNvPr id="76" name="TextBox 75"/>
+          <p:cNvPr id="78" name="TextBox 77"/>
           <p:cNvSpPr txBox="1"/>
           <p:nvPr/>
         </p:nvSpPr>
@@ -7841,7 +7889,7 @@
       </p:sp>
       <p:sp>
         <p:nvSpPr>
-          <p:cNvPr id="77" name="TextBox 76"/>
+          <p:cNvPr id="79" name="TextBox 78"/>
           <p:cNvSpPr txBox="1"/>
           <p:nvPr/>
         </p:nvSpPr>
@@ -7890,7 +7938,7 @@
       </p:sp>
       <p:sp>
         <p:nvSpPr>
-          <p:cNvPr id="78" name="TextBox 77"/>
+          <p:cNvPr id="80" name="TextBox 79"/>
           <p:cNvSpPr txBox="1"/>
           <p:nvPr/>
         </p:nvSpPr>
@@ -7939,7 +7987,7 @@
       </p:sp>
       <p:sp>
         <p:nvSpPr>
-          <p:cNvPr id="79" name="Rectangle 78"/>
+          <p:cNvPr id="81" name="Rectangle 80"/>
           <p:cNvSpPr/>
           <p:nvPr/>
         </p:nvSpPr>
@@ -7980,7 +8028,7 @@
       </p:sp>
       <p:sp>
         <p:nvSpPr>
-          <p:cNvPr id="80" name="TextBox 79"/>
+          <p:cNvPr id="82" name="TextBox 81"/>
           <p:cNvSpPr txBox="1"/>
           <p:nvPr/>
         </p:nvSpPr>
@@ -8013,7 +8061,7 @@
       </p:sp>
       <p:sp>
         <p:nvSpPr>
-          <p:cNvPr id="81" name="TextBox 80"/>
+          <p:cNvPr id="83" name="TextBox 82"/>
           <p:cNvSpPr txBox="1"/>
           <p:nvPr/>
         </p:nvSpPr>
@@ -8062,7 +8110,7 @@
       </p:sp>
       <p:sp>
         <p:nvSpPr>
-          <p:cNvPr id="82" name="TextBox 81"/>
+          <p:cNvPr id="84" name="TextBox 83"/>
           <p:cNvSpPr txBox="1"/>
           <p:nvPr/>
         </p:nvSpPr>
@@ -8111,7 +8159,7 @@
       </p:sp>
       <p:sp>
         <p:nvSpPr>
-          <p:cNvPr id="83" name="TextBox 82"/>
+          <p:cNvPr id="85" name="TextBox 84"/>
           <p:cNvSpPr txBox="1"/>
           <p:nvPr/>
         </p:nvSpPr>
@@ -8160,7 +8208,7 @@
       </p:sp>
       <p:sp>
         <p:nvSpPr>
-          <p:cNvPr id="84" name="TextBox 83"/>
+          <p:cNvPr id="86" name="TextBox 85"/>
           <p:cNvSpPr txBox="1"/>
           <p:nvPr/>
         </p:nvSpPr>
@@ -8209,7 +8257,7 @@
       </p:sp>
       <p:sp>
         <p:nvSpPr>
-          <p:cNvPr id="85" name="Rectangle 84"/>
+          <p:cNvPr id="87" name="Rectangle 86"/>
           <p:cNvSpPr/>
           <p:nvPr/>
         </p:nvSpPr>
@@ -8250,7 +8298,7 @@
       </p:sp>
       <p:sp>
         <p:nvSpPr>
-          <p:cNvPr id="86" name="TextBox 85"/>
+          <p:cNvPr id="88" name="TextBox 87"/>
           <p:cNvSpPr txBox="1"/>
           <p:nvPr/>
         </p:nvSpPr>
@@ -8283,7 +8331,7 @@
       </p:sp>
       <p:sp>
         <p:nvSpPr>
-          <p:cNvPr id="87" name="Rectangle 86"/>
+          <p:cNvPr id="89" name="Rectangle 88"/>
           <p:cNvSpPr/>
           <p:nvPr/>
         </p:nvSpPr>
@@ -8324,7 +8372,7 @@
       </p:sp>
       <p:sp>
         <p:nvSpPr>
-          <p:cNvPr id="88" name="TextBox 87"/>
+          <p:cNvPr id="90" name="TextBox 89"/>
           <p:cNvSpPr txBox="1"/>
           <p:nvPr/>
         </p:nvSpPr>
@@ -8357,7 +8405,7 @@
       </p:sp>
       <p:sp>
         <p:nvSpPr>
-          <p:cNvPr id="89" name="TextBox 88"/>
+          <p:cNvPr id="91" name="TextBox 90"/>
           <p:cNvSpPr txBox="1"/>
           <p:nvPr/>
         </p:nvSpPr>
@@ -8406,7 +8454,7 @@
       </p:sp>
       <p:sp>
         <p:nvSpPr>
-          <p:cNvPr id="90" name="TextBox 89"/>
+          <p:cNvPr id="92" name="TextBox 91"/>
           <p:cNvSpPr txBox="1"/>
           <p:nvPr/>
         </p:nvSpPr>
@@ -8455,7 +8503,7 @@
       </p:sp>
       <p:sp>
         <p:nvSpPr>
-          <p:cNvPr id="91" name="Rectangle 90"/>
+          <p:cNvPr id="93" name="Rectangle 92"/>
           <p:cNvSpPr/>
           <p:nvPr/>
         </p:nvSpPr>
@@ -8496,7 +8544,7 @@
       </p:sp>
       <p:sp>
         <p:nvSpPr>
-          <p:cNvPr id="92" name="TextBox 91"/>
+          <p:cNvPr id="94" name="TextBox 93"/>
           <p:cNvSpPr txBox="1"/>
           <p:nvPr/>
         </p:nvSpPr>
@@ -8529,7 +8577,7 @@
       </p:sp>
       <p:sp>
         <p:nvSpPr>
-          <p:cNvPr id="93" name="TextBox 92"/>
+          <p:cNvPr id="95" name="TextBox 94"/>
           <p:cNvSpPr txBox="1"/>
           <p:nvPr/>
         </p:nvSpPr>
@@ -8578,7 +8626,7 @@
       </p:sp>
       <p:sp>
         <p:nvSpPr>
-          <p:cNvPr id="94" name="TextBox 93"/>
+          <p:cNvPr id="96" name="TextBox 95"/>
           <p:cNvSpPr txBox="1"/>
           <p:nvPr/>
         </p:nvSpPr>
@@ -8627,7 +8675,7 @@
       </p:sp>
       <p:sp>
         <p:nvSpPr>
-          <p:cNvPr id="95" name="TextBox 94"/>
+          <p:cNvPr id="97" name="TextBox 96"/>
           <p:cNvSpPr txBox="1"/>
           <p:nvPr/>
         </p:nvSpPr>
@@ -8676,7 +8724,7 @@
       </p:sp>
       <p:sp>
         <p:nvSpPr>
-          <p:cNvPr id="96" name="TextBox 95"/>
+          <p:cNvPr id="98" name="TextBox 97"/>
           <p:cNvSpPr txBox="1"/>
           <p:nvPr/>
         </p:nvSpPr>
@@ -8725,7 +8773,7 @@
       </p:sp>
       <p:sp>
         <p:nvSpPr>
-          <p:cNvPr id="97" name="Rectangle 96"/>
+          <p:cNvPr id="99" name="Rectangle 98"/>
           <p:cNvSpPr/>
           <p:nvPr/>
         </p:nvSpPr>
@@ -8766,7 +8814,7 @@
       </p:sp>
       <p:sp>
         <p:nvSpPr>
-          <p:cNvPr id="98" name="TextBox 97"/>
+          <p:cNvPr id="100" name="TextBox 99"/>
           <p:cNvSpPr txBox="1"/>
           <p:nvPr/>
         </p:nvSpPr>
@@ -8799,7 +8847,7 @@
       </p:sp>
       <p:sp>
         <p:nvSpPr>
-          <p:cNvPr id="99" name="TextBox 98"/>
+          <p:cNvPr id="101" name="TextBox 100"/>
           <p:cNvSpPr txBox="1"/>
           <p:nvPr/>
         </p:nvSpPr>
@@ -8848,7 +8896,7 @@
       </p:sp>
       <p:sp>
         <p:nvSpPr>
-          <p:cNvPr id="100" name="TextBox 99"/>
+          <p:cNvPr id="102" name="TextBox 101"/>
           <p:cNvSpPr txBox="1"/>
           <p:nvPr/>
         </p:nvSpPr>
@@ -8897,7 +8945,7 @@
       </p:sp>
       <p:sp>
         <p:nvSpPr>
-          <p:cNvPr id="101" name="TextBox 100"/>
+          <p:cNvPr id="103" name="TextBox 102"/>
           <p:cNvSpPr txBox="1"/>
           <p:nvPr/>
         </p:nvSpPr>
@@ -8946,7 +8994,7 @@
       </p:sp>
       <p:sp>
         <p:nvSpPr>
-          <p:cNvPr id="102" name="TextBox 101"/>
+          <p:cNvPr id="104" name="TextBox 103"/>
           <p:cNvSpPr txBox="1"/>
           <p:nvPr/>
         </p:nvSpPr>
@@ -8995,7 +9043,7 @@
       </p:sp>
       <p:sp>
         <p:nvSpPr>
-          <p:cNvPr id="103" name="Rectangle 102"/>
+          <p:cNvPr id="105" name="Rectangle 104"/>
           <p:cNvSpPr/>
           <p:nvPr/>
         </p:nvSpPr>
@@ -9036,7 +9084,7 @@
       </p:sp>
       <p:sp>
         <p:nvSpPr>
-          <p:cNvPr id="104" name="TextBox 103"/>
+          <p:cNvPr id="106" name="TextBox 105"/>
           <p:cNvSpPr txBox="1"/>
           <p:nvPr/>
         </p:nvSpPr>

--- a/poster/poster.pptx
+++ b/poster/poster.pptx
@@ -3118,16 +3118,28 @@
           </a:bodyPr>
           <a:lstStyle/>
           <a:p>
-            <a:r>
-              <a:rPr sz="3400" b="1" i="0">
+            <a:pPr algn="ctr"/>
+            <a:r>
+              <a:rPr sz="4200" b="1" i="0">
                 <a:solidFill>
                   <a:srgbClr val="1B3A6B"/>
                 </a:solidFill>
               </a:rPr>
+              <a:t>Does adding image retrieval help a strong text-based RAG?</a:t>
+            </a:r>
+          </a:p>
+          <a:p>
+            <a:pPr algn="ctr"/>
+            <a:r>
+              <a:rPr sz="2200" b="0" i="0">
+                <a:solidFill>
+                  <a:srgbClr val="666666"/>
+                </a:solidFill>
+              </a:rPr>
               <a:t>Reproducing </a:t>
             </a:r>
             <a:r>
-              <a:rPr sz="3400" b="1" i="0">
+              <a:rPr sz="2200" b="0" i="0">
                 <a:solidFill>
                   <a:srgbClr val="C97B2C"/>
                 </a:solidFill>
@@ -3135,25 +3147,16 @@
               <a:t>ViDoRe v3</a:t>
             </a:r>
             <a:r>
-              <a:rPr sz="3400" b="1" i="0">
-                <a:solidFill>
-                  <a:srgbClr val="1B3A6B"/>
+              <a:rPr sz="2200" b="0" i="0">
+                <a:solidFill>
+                  <a:srgbClr val="666666"/>
                 </a:solidFill>
               </a:rPr>
               <a:t> with open-weights models</a:t>
             </a:r>
           </a:p>
           <a:p>
-            <a:r>
-              <a:rPr sz="2000" b="0" i="0">
-                <a:solidFill>
-                  <a:srgbClr val="C97B2C"/>
-                </a:solidFill>
-              </a:rPr>
-              <a:t>Does adding image retrieval help a strong text-based RAG?</a:t>
-            </a:r>
-          </a:p>
-          <a:p>
+            <a:pPr algn="ctr"/>
             <a:r>
               <a:rPr sz="1300" b="0" i="0">
                 <a:solidFill>
@@ -3164,6 +3167,7 @@
             </a:r>
           </a:p>
           <a:p>
+            <a:pPr algn="ctr"/>
             <a:r>
               <a:rPr sz="1100" b="0" i="1">
                 <a:solidFill>

--- a/poster/poster.pptx
+++ b/poster/poster.pptx
@@ -3105,7 +3105,7 @@
         <p:spPr>
           <a:xfrm>
             <a:off x="792000" y="792000"/>
-            <a:ext cx="41220000" cy="1872000"/>
+            <a:ext cx="41220000" cy="1980000"/>
           </a:xfrm>
           <a:prstGeom prst="rect">
             <a:avLst/>
@@ -3120,7 +3120,7 @@
           <a:p>
             <a:pPr algn="ctr"/>
             <a:r>
-              <a:rPr sz="4200" b="1" i="0">
+              <a:rPr sz="4400" b="1" i="0">
                 <a:solidFill>
                   <a:srgbClr val="1B3A6B"/>
                 </a:solidFill>
@@ -3131,7 +3131,7 @@
           <a:p>
             <a:pPr algn="ctr"/>
             <a:r>
-              <a:rPr sz="2200" b="0" i="0">
+              <a:rPr sz="2300" b="0" i="0">
                 <a:solidFill>
                   <a:srgbClr val="666666"/>
                 </a:solidFill>
@@ -3139,7 +3139,7 @@
               <a:t>Reproducing </a:t>
             </a:r>
             <a:r>
-              <a:rPr sz="2200" b="0" i="0">
+              <a:rPr sz="2300" b="0" i="0">
                 <a:solidFill>
                   <a:srgbClr val="C97B2C"/>
                 </a:solidFill>
@@ -3147,7 +3147,7 @@
               <a:t>ViDoRe v3</a:t>
             </a:r>
             <a:r>
-              <a:rPr sz="2200" b="0" i="0">
+              <a:rPr sz="2300" b="0" i="0">
                 <a:solidFill>
                   <a:srgbClr val="666666"/>
                 </a:solidFill>
@@ -3158,7 +3158,7 @@
           <a:p>
             <a:pPr algn="ctr"/>
             <a:r>
-              <a:rPr sz="1300" b="0" i="0">
+              <a:rPr sz="1400" b="0" i="0">
                 <a:solidFill>
                   <a:srgbClr val="1D1D1D"/>
                 </a:solidFill>
@@ -3169,7 +3169,7 @@
           <a:p>
             <a:pPr algn="ctr"/>
             <a:r>
-              <a:rPr sz="1100" b="0" i="1">
+              <a:rPr sz="1200" b="0" i="1">
                 <a:solidFill>
                   <a:srgbClr val="666666"/>
                 </a:solidFill>
@@ -3187,7 +3187,7 @@
         </p:nvSpPr>
         <p:spPr>
           <a:xfrm>
-            <a:off x="792000" y="2664000"/>
+            <a:off x="792000" y="2772000"/>
             <a:ext cx="41220000" cy="18000"/>
           </a:xfrm>
           <a:prstGeom prst="rect">
@@ -3228,8 +3228,8 @@
         </p:nvSpPr>
         <p:spPr>
           <a:xfrm>
-            <a:off x="792000" y="3168000"/>
-            <a:ext cx="9927000" cy="396000"/>
+            <a:off x="792000" y="3276000"/>
+            <a:ext cx="9927000" cy="504000"/>
           </a:xfrm>
           <a:prstGeom prst="rect">
             <a:avLst/>
@@ -3269,8 +3269,8 @@
         </p:nvSpPr>
         <p:spPr>
           <a:xfrm>
-            <a:off x="900000" y="3204000"/>
-            <a:ext cx="9783000" cy="396000"/>
+            <a:off x="900000" y="3330000"/>
+            <a:ext cx="9783000" cy="504000"/>
           </a:xfrm>
           <a:prstGeom prst="rect">
             <a:avLst/>
@@ -3284,7 +3284,7 @@
           <a:lstStyle/>
           <a:p>
             <a:r>
-              <a:rPr sz="1500" b="1" i="0">
+              <a:rPr sz="1900" b="1" i="0">
                 <a:solidFill>
                   <a:srgbClr val="FFFFFF"/>
                 </a:solidFill>
@@ -3302,8 +3302,8 @@
         </p:nvSpPr>
         <p:spPr>
           <a:xfrm>
-            <a:off x="792000" y="3672000"/>
-            <a:ext cx="9927000" cy="792000"/>
+            <a:off x="792000" y="3924000"/>
+            <a:ext cx="9927000" cy="1080000"/>
           </a:xfrm>
           <a:prstGeom prst="rect">
             <a:avLst/>
@@ -3317,7 +3317,7 @@
           <a:lstStyle/>
           <a:p>
             <a:r>
-              <a:rPr sz="1000" b="0" i="0">
+              <a:rPr sz="1300" b="0" i="0">
                 <a:solidFill>
                   <a:srgbClr val="1D1D1D"/>
                 </a:solidFill>
@@ -3335,8 +3335,8 @@
         </p:nvSpPr>
         <p:spPr>
           <a:xfrm>
-            <a:off x="864000" y="4500000"/>
-            <a:ext cx="9855000" cy="342000"/>
+            <a:off x="864000" y="5076000"/>
+            <a:ext cx="9855000" cy="491040"/>
           </a:xfrm>
           <a:prstGeom prst="rect">
             <a:avLst/>
@@ -3350,7 +3350,7 @@
           <a:lstStyle/>
           <a:p>
             <a:r>
-              <a:rPr sz="1000" b="0" i="0">
+              <a:rPr sz="1200" b="0" i="0">
                 <a:solidFill>
                   <a:srgbClr val="C97B2C"/>
                 </a:solidFill>
@@ -3358,7 +3358,7 @@
               <a:t>• </a:t>
             </a:r>
             <a:r>
-              <a:rPr sz="1000" b="1" i="0">
+              <a:rPr sz="1200" b="1" i="0">
                 <a:solidFill>
                   <a:srgbClr val="1D1D1D"/>
                 </a:solidFill>
@@ -3366,7 +3366,7 @@
               <a:t>Textual retrieval: </a:t>
             </a:r>
             <a:r>
-              <a:rPr sz="1000" b="0" i="0">
+              <a:rPr sz="1200" b="0" i="0">
                 <a:solidFill>
                   <a:srgbClr val="1D1D1D"/>
                 </a:solidFill>
@@ -3384,8 +3384,8 @@
         </p:nvSpPr>
         <p:spPr>
           <a:xfrm>
-            <a:off x="864000" y="4770000"/>
-            <a:ext cx="9855000" cy="342000"/>
+            <a:off x="864000" y="5495040"/>
+            <a:ext cx="9855000" cy="491040"/>
           </a:xfrm>
           <a:prstGeom prst="rect">
             <a:avLst/>
@@ -3399,7 +3399,7 @@
           <a:lstStyle/>
           <a:p>
             <a:r>
-              <a:rPr sz="1000" b="0" i="0">
+              <a:rPr sz="1200" b="0" i="0">
                 <a:solidFill>
                   <a:srgbClr val="C97B2C"/>
                 </a:solidFill>
@@ -3407,7 +3407,7 @@
               <a:t>• </a:t>
             </a:r>
             <a:r>
-              <a:rPr sz="1000" b="1" i="0">
+              <a:rPr sz="1200" b="1" i="0">
                 <a:solidFill>
                   <a:srgbClr val="1D1D1D"/>
                 </a:solidFill>
@@ -3415,7 +3415,7 @@
               <a:t>Visual retrieval: </a:t>
             </a:r>
             <a:r>
-              <a:rPr sz="1000" b="0" i="0">
+              <a:rPr sz="1200" b="0" i="0">
                 <a:solidFill>
                   <a:srgbClr val="1D1D1D"/>
                 </a:solidFill>
@@ -3433,8 +3433,8 @@
         </p:nvSpPr>
         <p:spPr>
           <a:xfrm>
-            <a:off x="792000" y="5076000"/>
-            <a:ext cx="9927000" cy="1260000"/>
+            <a:off x="792000" y="5986080"/>
+            <a:ext cx="9927000" cy="1584000"/>
           </a:xfrm>
           <a:prstGeom prst="rect">
             <a:avLst/>
@@ -3474,8 +3474,8 @@
         </p:nvSpPr>
         <p:spPr>
           <a:xfrm>
-            <a:off x="792000" y="5076000"/>
-            <a:ext cx="72000" cy="1260000"/>
+            <a:off x="792000" y="5986080"/>
+            <a:ext cx="90000" cy="1584000"/>
           </a:xfrm>
           <a:prstGeom prst="rect">
             <a:avLst/>
@@ -3515,8 +3515,8 @@
         </p:nvSpPr>
         <p:spPr>
           <a:xfrm>
-            <a:off x="936000" y="5148000"/>
-            <a:ext cx="9711000" cy="1116000"/>
+            <a:off x="972000" y="6094080"/>
+            <a:ext cx="9675000" cy="1404000"/>
           </a:xfrm>
           <a:prstGeom prst="rect">
             <a:avLst/>
@@ -3530,7 +3530,7 @@
           <a:lstStyle/>
           <a:p>
             <a:r>
-              <a:rPr sz="1000" b="0" i="0">
+              <a:rPr sz="1200" b="0" i="0">
                 <a:solidFill>
                   <a:srgbClr val="1D1D1D"/>
                 </a:solidFill>
@@ -3548,8 +3548,8 @@
         </p:nvSpPr>
         <p:spPr>
           <a:xfrm>
-            <a:off x="792000" y="6444000"/>
-            <a:ext cx="9927000" cy="396000"/>
+            <a:off x="792000" y="7714080"/>
+            <a:ext cx="9927000" cy="504000"/>
           </a:xfrm>
           <a:prstGeom prst="rect">
             <a:avLst/>
@@ -3589,8 +3589,8 @@
         </p:nvSpPr>
         <p:spPr>
           <a:xfrm>
-            <a:off x="900000" y="6480000"/>
-            <a:ext cx="9783000" cy="396000"/>
+            <a:off x="900000" y="7768080"/>
+            <a:ext cx="9783000" cy="504000"/>
           </a:xfrm>
           <a:prstGeom prst="rect">
             <a:avLst/>
@@ -3604,7 +3604,7 @@
           <a:lstStyle/>
           <a:p>
             <a:r>
-              <a:rPr sz="1500" b="1" i="0">
+              <a:rPr sz="1900" b="1" i="0">
                 <a:solidFill>
                   <a:srgbClr val="FFFFFF"/>
                 </a:solidFill>
@@ -3622,8 +3622,8 @@
         </p:nvSpPr>
         <p:spPr>
           <a:xfrm>
-            <a:off x="792000" y="6948000"/>
-            <a:ext cx="9927000" cy="576000"/>
+            <a:off x="792000" y="8362080"/>
+            <a:ext cx="9927000" cy="792000"/>
           </a:xfrm>
           <a:prstGeom prst="rect">
             <a:avLst/>
@@ -3637,7 +3637,7 @@
           <a:lstStyle/>
           <a:p>
             <a:r>
-              <a:rPr sz="1000" b="0" i="0">
+              <a:rPr sz="1300" b="0" i="0">
                 <a:solidFill>
                   <a:srgbClr val="1D1D1D"/>
                 </a:solidFill>
@@ -3655,8 +3655,8 @@
         </p:nvSpPr>
         <p:spPr>
           <a:xfrm>
-            <a:off x="792000" y="7596000"/>
-            <a:ext cx="54000" cy="252000"/>
+            <a:off x="792000" y="9280080"/>
+            <a:ext cx="72000" cy="324000"/>
           </a:xfrm>
           <a:prstGeom prst="rect">
             <a:avLst/>
@@ -3696,8 +3696,8 @@
         </p:nvSpPr>
         <p:spPr>
           <a:xfrm>
-            <a:off x="936000" y="7560000"/>
-            <a:ext cx="9783000" cy="324000"/>
+            <a:off x="972000" y="9226080"/>
+            <a:ext cx="9747000" cy="432000"/>
           </a:xfrm>
           <a:prstGeom prst="rect">
             <a:avLst/>
@@ -3711,7 +3711,7 @@
           <a:lstStyle/>
           <a:p>
             <a:r>
-              <a:rPr sz="1200" b="1" i="0">
+              <a:rPr sz="1500" b="1" i="0">
                 <a:solidFill>
                   <a:srgbClr val="1B3A6B"/>
                 </a:solidFill>
@@ -3729,8 +3729,8 @@
         </p:nvSpPr>
         <p:spPr>
           <a:xfrm>
-            <a:off x="792000" y="7920000"/>
-            <a:ext cx="9927000" cy="792000"/>
+            <a:off x="792000" y="9694080"/>
+            <a:ext cx="9927000" cy="1368000"/>
           </a:xfrm>
           <a:prstGeom prst="rect">
             <a:avLst/>
@@ -3744,50 +3744,26 @@
           <a:lstStyle/>
           <a:p>
             <a:r>
-              <a:rPr sz="1000" b="0" i="0">
+              <a:rPr sz="1300" b="0" i="0">
                 <a:solidFill>
                   <a:srgbClr val="1D1D1D"/>
                 </a:solidFill>
               </a:rPr>
-              <a:t>Late interaction: encodes each page into one embedding per image patch, each query into one per token. Scoring uses MaxSim: for every query token, find its closest page patch; sum those best-match scores. A query "what is the Q3 revenue?" can match "Q3" to the table column and "revenue" to the row.</a:t>
-            </a:r>
-          </a:p>
-        </p:txBody>
-      </p:sp>
-      <p:pic>
-        <p:nvPicPr>
-          <p:cNvPr id="18" name="Picture 17" descr="colpali_architecture.png"/>
-          <p:cNvPicPr>
-            <a:picLocks noChangeAspect="1"/>
-          </p:cNvPicPr>
-          <p:nvPr/>
-        </p:nvPicPr>
-        <p:blipFill>
-          <a:blip r:embed="rId2"/>
-          <a:stretch>
-            <a:fillRect/>
-          </a:stretch>
-        </p:blipFill>
-        <p:spPr>
-          <a:xfrm>
-            <a:off x="792000" y="8748000"/>
-            <a:ext cx="9927000" cy="3655372"/>
-          </a:xfrm>
-          <a:prstGeom prst="rect">
-            <a:avLst/>
-          </a:prstGeom>
-        </p:spPr>
-      </p:pic>
-      <p:sp>
-        <p:nvSpPr>
-          <p:cNvPr id="19" name="Rectangle 18"/>
+              <a:t>Late interaction: each page is encoded into one embedding per image patch, each query into one per token. Scoring uses MaxSim: for every query token, find its closest page patch and sum those best-match scores. A query "what is the Q3 revenue?" can match "Q3" to the right table column and "revenue" to the right row.</a:t>
+            </a:r>
+          </a:p>
+        </p:txBody>
+      </p:sp>
+      <p:sp>
+        <p:nvSpPr>
+          <p:cNvPr id="18" name="Rectangle 17"/>
           <p:cNvSpPr/>
           <p:nvPr/>
         </p:nvSpPr>
         <p:spPr>
           <a:xfrm>
-            <a:off x="792000" y="12547372"/>
-            <a:ext cx="54000" cy="252000"/>
+            <a:off x="792000" y="11188080"/>
+            <a:ext cx="72000" cy="324000"/>
           </a:xfrm>
           <a:prstGeom prst="rect">
             <a:avLst/>
@@ -3821,14 +3797,14 @@
       </p:sp>
       <p:sp>
         <p:nvSpPr>
-          <p:cNvPr id="20" name="TextBox 19"/>
+          <p:cNvPr id="19" name="TextBox 18"/>
           <p:cNvSpPr txBox="1"/>
           <p:nvPr/>
         </p:nvSpPr>
         <p:spPr>
           <a:xfrm>
-            <a:off x="936000" y="12511372"/>
-            <a:ext cx="9783000" cy="324000"/>
+            <a:off x="972000" y="11134080"/>
+            <a:ext cx="9747000" cy="432000"/>
           </a:xfrm>
           <a:prstGeom prst="rect">
             <a:avLst/>
@@ -3842,7 +3818,7 @@
           <a:lstStyle/>
           <a:p>
             <a:r>
-              <a:rPr sz="1200" b="1" i="0">
+              <a:rPr sz="1500" b="1" i="0">
                 <a:solidFill>
                   <a:srgbClr val="1B3A6B"/>
                 </a:solidFill>
@@ -3854,14 +3830,14 @@
       </p:sp>
       <p:sp>
         <p:nvSpPr>
-          <p:cNvPr id="21" name="TextBox 20"/>
+          <p:cNvPr id="20" name="TextBox 19"/>
           <p:cNvSpPr txBox="1"/>
           <p:nvPr/>
         </p:nvSpPr>
         <p:spPr>
           <a:xfrm>
-            <a:off x="792000" y="12871372"/>
-            <a:ext cx="9927000" cy="720000"/>
+            <a:off x="792000" y="11602080"/>
+            <a:ext cx="9927000" cy="1008000"/>
           </a:xfrm>
           <a:prstGeom prst="rect">
             <a:avLst/>
@@ -3875,26 +3851,26 @@
           <a:lstStyle/>
           <a:p>
             <a:r>
-              <a:rPr sz="1000" b="0" i="0">
+              <a:rPr sz="1300" b="0" i="0">
                 <a:solidFill>
                   <a:srgbClr val="1D1D1D"/>
                 </a:solidFill>
               </a:rPr>
-              <a:t>Same late-interaction architecture with two upgrades: (i) stronger backbone Llama-Nemotron (NVIDIA's document-focused VLM); (ii) broader synthetic query-page training with hard-negative mining.</a:t>
-            </a:r>
-          </a:p>
-        </p:txBody>
-      </p:sp>
-      <p:sp>
-        <p:nvSpPr>
-          <p:cNvPr id="22" name="Rectangle 21"/>
+              <a:t>Same late-interaction architecture, two upgrades: stronger backbone Llama-Nemotron (NVIDIA's document-focused VLM) and broader synthetic query-page training with hard-negative mining.</a:t>
+            </a:r>
+          </a:p>
+        </p:txBody>
+      </p:sp>
+      <p:sp>
+        <p:nvSpPr>
+          <p:cNvPr id="21" name="Rectangle 20"/>
           <p:cNvSpPr/>
           <p:nvPr/>
         </p:nvSpPr>
         <p:spPr>
           <a:xfrm>
-            <a:off x="792000" y="13627372"/>
-            <a:ext cx="9927000" cy="396000"/>
+            <a:off x="792000" y="12682080"/>
+            <a:ext cx="9927000" cy="504000"/>
           </a:xfrm>
           <a:prstGeom prst="rect">
             <a:avLst/>
@@ -3928,14 +3904,14 @@
       </p:sp>
       <p:sp>
         <p:nvSpPr>
-          <p:cNvPr id="23" name="TextBox 22"/>
+          <p:cNvPr id="22" name="TextBox 21"/>
           <p:cNvSpPr txBox="1"/>
           <p:nvPr/>
         </p:nvSpPr>
         <p:spPr>
           <a:xfrm>
-            <a:off x="900000" y="13663372"/>
-            <a:ext cx="9783000" cy="396000"/>
+            <a:off x="900000" y="12736080"/>
+            <a:ext cx="9783000" cy="504000"/>
           </a:xfrm>
           <a:prstGeom prst="rect">
             <a:avLst/>
@@ -3949,7 +3925,7 @@
           <a:lstStyle/>
           <a:p>
             <a:r>
-              <a:rPr sz="1500" b="1" i="0">
+              <a:rPr sz="1900" b="1" i="0">
                 <a:solidFill>
                   <a:srgbClr val="FFFFFF"/>
                 </a:solidFill>
@@ -3961,14 +3937,14 @@
       </p:sp>
       <p:sp>
         <p:nvSpPr>
-          <p:cNvPr id="24" name="TextBox 23"/>
+          <p:cNvPr id="23" name="TextBox 22"/>
           <p:cNvSpPr txBox="1"/>
           <p:nvPr/>
         </p:nvSpPr>
         <p:spPr>
           <a:xfrm>
-            <a:off x="792000" y="14131372"/>
-            <a:ext cx="9927000" cy="720000"/>
+            <a:off x="792000" y="13330080"/>
+            <a:ext cx="9927000" cy="1008000"/>
           </a:xfrm>
           <a:prstGeom prst="rect">
             <a:avLst/>
@@ -3982,26 +3958,26 @@
           <a:lstStyle/>
           <a:p>
             <a:r>
-              <a:rPr sz="1000" b="0" i="0">
+              <a:rPr sz="1300" b="0" i="0">
                 <a:solidFill>
                   <a:srgbClr val="1D1D1D"/>
                 </a:solidFill>
               </a:rPr>
-              <a:t>Loison et al. (2026): 10 corpora, 26 000 pages, 3 099 human-verified queries in 6 languages. We evaluate on 5 public subsets (3 EN + 2 FR): 10 673 pages, 2 132 queries.</a:t>
-            </a:r>
-          </a:p>
-        </p:txBody>
-      </p:sp>
-      <p:sp>
-        <p:nvSpPr>
-          <p:cNvPr id="25" name="Rectangle 24"/>
+              <a:t>Loison et al. (2026): 10 corpora, 26 000 pages, 3 099 human-verified queries in 6 languages. We evaluate on 5 public subsets (3 EN + 2 FR): 10 673 pages and 2 132 queries.</a:t>
+            </a:r>
+          </a:p>
+        </p:txBody>
+      </p:sp>
+      <p:sp>
+        <p:nvSpPr>
+          <p:cNvPr id="24" name="Rectangle 23"/>
           <p:cNvSpPr/>
           <p:nvPr/>
         </p:nvSpPr>
         <p:spPr>
           <a:xfrm>
-            <a:off x="792000" y="14923372"/>
-            <a:ext cx="54000" cy="252000"/>
+            <a:off x="792000" y="14464080"/>
+            <a:ext cx="72000" cy="324000"/>
           </a:xfrm>
           <a:prstGeom prst="rect">
             <a:avLst/>
@@ -4035,14 +4011,14 @@
       </p:sp>
       <p:sp>
         <p:nvSpPr>
-          <p:cNvPr id="26" name="TextBox 25"/>
+          <p:cNvPr id="25" name="TextBox 24"/>
           <p:cNvSpPr txBox="1"/>
           <p:nvPr/>
         </p:nvSpPr>
         <p:spPr>
           <a:xfrm>
-            <a:off x="936000" y="14887372"/>
-            <a:ext cx="9783000" cy="324000"/>
+            <a:off x="972000" y="14410080"/>
+            <a:ext cx="9747000" cy="432000"/>
           </a:xfrm>
           <a:prstGeom prst="rect">
             <a:avLst/>
@@ -4056,7 +4032,7 @@
           <a:lstStyle/>
           <a:p>
             <a:r>
-              <a:rPr sz="1200" b="1" i="0">
+              <a:rPr sz="1500" b="1" i="0">
                 <a:solidFill>
                   <a:srgbClr val="1B3A6B"/>
                 </a:solidFill>
@@ -4068,14 +4044,14 @@
       </p:sp>
       <p:sp>
         <p:nvSpPr>
-          <p:cNvPr id="27" name="TextBox 26"/>
+          <p:cNvPr id="26" name="TextBox 25"/>
           <p:cNvSpPr txBox="1"/>
           <p:nvPr/>
         </p:nvSpPr>
         <p:spPr>
           <a:xfrm>
-            <a:off x="864000" y="15247372"/>
-            <a:ext cx="9855000" cy="342000"/>
+            <a:off x="864000" y="14878080"/>
+            <a:ext cx="9855000" cy="491040"/>
           </a:xfrm>
           <a:prstGeom prst="rect">
             <a:avLst/>
@@ -4089,7 +4065,7 @@
           <a:lstStyle/>
           <a:p>
             <a:r>
-              <a:rPr sz="1000" b="0" i="0">
+              <a:rPr sz="1200" b="0" i="0">
                 <a:solidFill>
                   <a:srgbClr val="C97B2C"/>
                 </a:solidFill>
@@ -4097,7 +4073,7 @@
               <a:t>• </a:t>
             </a:r>
             <a:r>
-              <a:rPr sz="1000" b="1" i="0">
+              <a:rPr sz="1200" b="1" i="0">
                 <a:solidFill>
                   <a:srgbClr val="1D1D1D"/>
                 </a:solidFill>
@@ -4105,26 +4081,26 @@
               <a:t>Visually rich documents: </a:t>
             </a:r>
             <a:r>
-              <a:rPr sz="1000" b="0" i="0">
+              <a:rPr sz="1200" b="0" i="0">
                 <a:solidFill>
                   <a:srgbClr val="1D1D1D"/>
                 </a:solidFill>
               </a:rPr>
-              <a:t>annual reports, scientific books, pharma regulations.</a:t>
-            </a:r>
-          </a:p>
-        </p:txBody>
-      </p:sp>
-      <p:sp>
-        <p:nvSpPr>
-          <p:cNvPr id="28" name="TextBox 27"/>
+              <a:t>annual reports, scientific books, pharma regulations. Tables, charts, figures carry real evidence.</a:t>
+            </a:r>
+          </a:p>
+        </p:txBody>
+      </p:sp>
+      <p:sp>
+        <p:nvSpPr>
+          <p:cNvPr id="27" name="TextBox 26"/>
           <p:cNvSpPr txBox="1"/>
           <p:nvPr/>
         </p:nvSpPr>
         <p:spPr>
           <a:xfrm>
-            <a:off x="864000" y="15517372"/>
-            <a:ext cx="9855000" cy="342000"/>
+            <a:off x="864000" y="15297120"/>
+            <a:ext cx="9855000" cy="491040"/>
           </a:xfrm>
           <a:prstGeom prst="rect">
             <a:avLst/>
@@ -4138,7 +4114,7 @@
           <a:lstStyle/>
           <a:p>
             <a:r>
-              <a:rPr sz="1000" b="0" i="0">
+              <a:rPr sz="1200" b="0" i="0">
                 <a:solidFill>
                   <a:srgbClr val="C97B2C"/>
                 </a:solidFill>
@@ -4146,7 +4122,7 @@
               <a:t>• </a:t>
             </a:r>
             <a:r>
-              <a:rPr sz="1000" b="1" i="0">
+              <a:rPr sz="1200" b="1" i="0">
                 <a:solidFill>
                   <a:srgbClr val="1D1D1D"/>
                 </a:solidFill>
@@ -4154,7 +4130,7 @@
               <a:t>7 query types: </a:t>
             </a:r>
             <a:r>
-              <a:rPr sz="1000" b="0" i="0">
+              <a:rPr sz="1200" b="0" i="0">
                 <a:solidFill>
                   <a:srgbClr val="1D1D1D"/>
                 </a:solidFill>
@@ -4166,14 +4142,14 @@
       </p:sp>
       <p:sp>
         <p:nvSpPr>
-          <p:cNvPr id="29" name="TextBox 28"/>
+          <p:cNvPr id="28" name="TextBox 27"/>
           <p:cNvSpPr txBox="1"/>
           <p:nvPr/>
         </p:nvSpPr>
         <p:spPr>
           <a:xfrm>
-            <a:off x="864000" y="15787372"/>
-            <a:ext cx="9855000" cy="342000"/>
+            <a:off x="864000" y="15716160"/>
+            <a:ext cx="9855000" cy="491040"/>
           </a:xfrm>
           <a:prstGeom prst="rect">
             <a:avLst/>
@@ -4187,7 +4163,7 @@
           <a:lstStyle/>
           <a:p>
             <a:r>
-              <a:rPr sz="1000" b="0" i="0">
+              <a:rPr sz="1200" b="0" i="0">
                 <a:solidFill>
                   <a:srgbClr val="C97B2C"/>
                 </a:solidFill>
@@ -4195,7 +4171,7 @@
               <a:t>• </a:t>
             </a:r>
             <a:r>
-              <a:rPr sz="1000" b="1" i="0">
+              <a:rPr sz="1200" b="1" i="0">
                 <a:solidFill>
                   <a:srgbClr val="1D1D1D"/>
                 </a:solidFill>
@@ -4203,7 +4179,7 @@
               <a:t>Cross-lingual: </a:t>
             </a:r>
             <a:r>
-              <a:rPr sz="1000" b="0" i="0">
+              <a:rPr sz="1200" b="0" i="0">
                 <a:solidFill>
                   <a:srgbClr val="1D1D1D"/>
                 </a:solidFill>
@@ -4215,14 +4191,14 @@
       </p:sp>
       <p:sp>
         <p:nvSpPr>
-          <p:cNvPr id="30" name="TextBox 29"/>
+          <p:cNvPr id="29" name="TextBox 28"/>
           <p:cNvSpPr txBox="1"/>
           <p:nvPr/>
         </p:nvSpPr>
         <p:spPr>
           <a:xfrm>
-            <a:off x="864000" y="16057372"/>
-            <a:ext cx="9855000" cy="342000"/>
+            <a:off x="864000" y="16135200"/>
+            <a:ext cx="9855000" cy="491040"/>
           </a:xfrm>
           <a:prstGeom prst="rect">
             <a:avLst/>
@@ -4236,7 +4212,7 @@
           <a:lstStyle/>
           <a:p>
             <a:r>
-              <a:rPr sz="1000" b="0" i="0">
+              <a:rPr sz="1200" b="0" i="0">
                 <a:solidFill>
                   <a:srgbClr val="C97B2C"/>
                 </a:solidFill>
@@ -4244,7 +4220,7 @@
               <a:t>• </a:t>
             </a:r>
             <a:r>
-              <a:rPr sz="1000" b="1" i="0">
+              <a:rPr sz="1200" b="1" i="0">
                 <a:solidFill>
                   <a:srgbClr val="1D1D1D"/>
                 </a:solidFill>
@@ -4252,26 +4228,26 @@
               <a:t>Decoupled evaluation: </a:t>
             </a:r>
             <a:r>
-              <a:rPr sz="1000" b="0" i="0">
+              <a:rPr sz="1200" b="0" i="0">
                 <a:solidFill>
                   <a:srgbClr val="1D1D1D"/>
                 </a:solidFill>
               </a:rPr>
-              <a:t>best retriever is not always best generator (NDCG@10 vs pass@1).</a:t>
-            </a:r>
-          </a:p>
-        </p:txBody>
-      </p:sp>
-      <p:sp>
-        <p:nvSpPr>
-          <p:cNvPr id="31" name="Rectangle 30"/>
+              <a:t>best retriever is not always the best generator (NDCG@10 vs pass@1).</a:t>
+            </a:r>
+          </a:p>
+        </p:txBody>
+      </p:sp>
+      <p:sp>
+        <p:nvSpPr>
+          <p:cNvPr id="30" name="Rectangle 29"/>
           <p:cNvSpPr/>
           <p:nvPr/>
         </p:nvSpPr>
         <p:spPr>
           <a:xfrm>
-            <a:off x="11223000" y="3168000"/>
-            <a:ext cx="9927000" cy="396000"/>
+            <a:off x="11223000" y="3276000"/>
+            <a:ext cx="9927000" cy="504000"/>
           </a:xfrm>
           <a:prstGeom prst="rect">
             <a:avLst/>
@@ -4305,14 +4281,14 @@
       </p:sp>
       <p:sp>
         <p:nvSpPr>
-          <p:cNvPr id="32" name="TextBox 31"/>
+          <p:cNvPr id="31" name="TextBox 30"/>
           <p:cNvSpPr txBox="1"/>
           <p:nvPr/>
         </p:nvSpPr>
         <p:spPr>
           <a:xfrm>
-            <a:off x="11331000" y="3204000"/>
-            <a:ext cx="9783000" cy="396000"/>
+            <a:off x="11331000" y="3330000"/>
+            <a:ext cx="9783000" cy="504000"/>
           </a:xfrm>
           <a:prstGeom prst="rect">
             <a:avLst/>
@@ -4326,7 +4302,7 @@
           <a:lstStyle/>
           <a:p>
             <a:r>
-              <a:rPr sz="1500" b="1" i="0">
+              <a:rPr sz="1900" b="1" i="0">
                 <a:solidFill>
                   <a:srgbClr val="FFFFFF"/>
                 </a:solidFill>
@@ -4338,14 +4314,14 @@
       </p:sp>
       <p:sp>
         <p:nvSpPr>
-          <p:cNvPr id="33" name="Rectangle 32"/>
+          <p:cNvPr id="32" name="Rectangle 31"/>
           <p:cNvSpPr/>
           <p:nvPr/>
         </p:nvSpPr>
         <p:spPr>
           <a:xfrm>
-            <a:off x="11223000" y="3672000"/>
-            <a:ext cx="9927000" cy="1080000"/>
+            <a:off x="11223000" y="3924000"/>
+            <a:ext cx="9927000" cy="1440000"/>
           </a:xfrm>
           <a:prstGeom prst="rect">
             <a:avLst/>
@@ -4379,14 +4355,14 @@
       </p:sp>
       <p:sp>
         <p:nvSpPr>
-          <p:cNvPr id="34" name="Rectangle 33"/>
+          <p:cNvPr id="33" name="Rectangle 32"/>
           <p:cNvSpPr/>
           <p:nvPr/>
         </p:nvSpPr>
         <p:spPr>
           <a:xfrm>
-            <a:off x="11223000" y="3672000"/>
-            <a:ext cx="72000" cy="1080000"/>
+            <a:off x="11223000" y="3924000"/>
+            <a:ext cx="90000" cy="1440000"/>
           </a:xfrm>
           <a:prstGeom prst="rect">
             <a:avLst/>
@@ -4420,14 +4396,14 @@
       </p:sp>
       <p:sp>
         <p:nvSpPr>
-          <p:cNvPr id="35" name="TextBox 34"/>
+          <p:cNvPr id="34" name="TextBox 33"/>
           <p:cNvSpPr txBox="1"/>
           <p:nvPr/>
         </p:nvSpPr>
         <p:spPr>
           <a:xfrm>
-            <a:off x="11367000" y="3744000"/>
-            <a:ext cx="9711000" cy="936000"/>
+            <a:off x="11403000" y="4032000"/>
+            <a:ext cx="9675000" cy="1260000"/>
           </a:xfrm>
           <a:prstGeom prst="rect">
             <a:avLst/>
@@ -4441,26 +4417,26 @@
           <a:lstStyle/>
           <a:p>
             <a:r>
-              <a:rPr sz="1000" b="0" i="0">
+              <a:rPr sz="1200" b="0" i="0">
                 <a:solidFill>
                   <a:srgbClr val="1D1D1D"/>
                 </a:solidFill>
               </a:rPr>
-              <a:t>Question: with the text stream fixed at DeepSeek-OCR-2 + Jina v4 + zerank-2, does adding a visual stream (ColEmbed) improve end-to-end answer accuracy?</a:t>
-            </a:r>
-          </a:p>
-        </p:txBody>
-      </p:sp>
-      <p:sp>
-        <p:nvSpPr>
-          <p:cNvPr id="36" name="Rectangle 35"/>
+              <a:t>Question: with the text stream fixed at DeepSeek-OCR-2 + Jina v4 + zerank-2, does adding a visual retrieval stream (ColEmbed) improve end-to-end answer accuracy?</a:t>
+            </a:r>
+          </a:p>
+        </p:txBody>
+      </p:sp>
+      <p:sp>
+        <p:nvSpPr>
+          <p:cNvPr id="35" name="Rectangle 34"/>
           <p:cNvSpPr/>
           <p:nvPr/>
         </p:nvSpPr>
         <p:spPr>
           <a:xfrm>
-            <a:off x="11223000" y="4896000"/>
-            <a:ext cx="54000" cy="252000"/>
+            <a:off x="11223000" y="5562000"/>
+            <a:ext cx="72000" cy="324000"/>
           </a:xfrm>
           <a:prstGeom prst="rect">
             <a:avLst/>
@@ -4494,14 +4470,14 @@
       </p:sp>
       <p:sp>
         <p:nvSpPr>
-          <p:cNvPr id="37" name="TextBox 36"/>
+          <p:cNvPr id="36" name="TextBox 35"/>
           <p:cNvSpPr txBox="1"/>
           <p:nvPr/>
         </p:nvSpPr>
         <p:spPr>
           <a:xfrm>
-            <a:off x="11367000" y="4860000"/>
-            <a:ext cx="9783000" cy="324000"/>
+            <a:off x="11403000" y="5508000"/>
+            <a:ext cx="9747000" cy="432000"/>
           </a:xfrm>
           <a:prstGeom prst="rect">
             <a:avLst/>
@@ -4515,7 +4491,7 @@
           <a:lstStyle/>
           <a:p>
             <a:r>
-              <a:rPr sz="1200" b="1" i="0">
+              <a:rPr sz="1500" b="1" i="0">
                 <a:solidFill>
                   <a:srgbClr val="1B3A6B"/>
                 </a:solidFill>
@@ -4527,14 +4503,14 @@
       </p:sp>
       <p:sp>
         <p:nvSpPr>
-          <p:cNvPr id="38" name="TextBox 37"/>
+          <p:cNvPr id="37" name="TextBox 36"/>
           <p:cNvSpPr txBox="1"/>
           <p:nvPr/>
         </p:nvSpPr>
         <p:spPr>
           <a:xfrm>
-            <a:off x="11295000" y="5220000"/>
-            <a:ext cx="9855000" cy="342000"/>
+            <a:off x="11295000" y="5976000"/>
+            <a:ext cx="9855000" cy="491040"/>
           </a:xfrm>
           <a:prstGeom prst="rect">
             <a:avLst/>
@@ -4548,7 +4524,7 @@
           <a:lstStyle/>
           <a:p>
             <a:r>
-              <a:rPr sz="1000" b="0" i="0">
+              <a:rPr sz="1200" b="0" i="0">
                 <a:solidFill>
                   <a:srgbClr val="C97B2C"/>
                 </a:solidFill>
@@ -4556,7 +4532,7 @@
               <a:t>• </a:t>
             </a:r>
             <a:r>
-              <a:rPr sz="1000" b="1" i="0">
+              <a:rPr sz="1200" b="1" i="0">
                 <a:solidFill>
                   <a:srgbClr val="1D1D1D"/>
                 </a:solidFill>
@@ -4564,7 +4540,7 @@
               <a:t>Text stream: </a:t>
             </a:r>
             <a:r>
-              <a:rPr sz="1000" b="0" i="0">
+              <a:rPr sz="1200" b="0" i="0">
                 <a:solidFill>
                   <a:srgbClr val="1D1D1D"/>
                 </a:solidFill>
@@ -4576,14 +4552,14 @@
       </p:sp>
       <p:sp>
         <p:nvSpPr>
-          <p:cNvPr id="39" name="TextBox 38"/>
+          <p:cNvPr id="38" name="TextBox 37"/>
           <p:cNvSpPr txBox="1"/>
           <p:nvPr/>
         </p:nvSpPr>
         <p:spPr>
           <a:xfrm>
-            <a:off x="11295000" y="5490000"/>
-            <a:ext cx="9855000" cy="342000"/>
+            <a:off x="11295000" y="6395040"/>
+            <a:ext cx="9855000" cy="491040"/>
           </a:xfrm>
           <a:prstGeom prst="rect">
             <a:avLst/>
@@ -4597,7 +4573,7 @@
           <a:lstStyle/>
           <a:p>
             <a:r>
-              <a:rPr sz="1000" b="0" i="0">
+              <a:rPr sz="1200" b="0" i="0">
                 <a:solidFill>
                   <a:srgbClr val="C97B2C"/>
                 </a:solidFill>
@@ -4605,7 +4581,7 @@
               <a:t>• </a:t>
             </a:r>
             <a:r>
-              <a:rPr sz="1000" b="1" i="0">
+              <a:rPr sz="1200" b="1" i="0">
                 <a:solidFill>
                   <a:srgbClr val="1D1D1D"/>
                 </a:solidFill>
@@ -4613,7 +4589,7 @@
               <a:t>Image stream: </a:t>
             </a:r>
             <a:r>
-              <a:rPr sz="1000" b="0" i="0">
+              <a:rPr sz="1200" b="0" i="0">
                 <a:solidFill>
                   <a:srgbClr val="1D1D1D"/>
                 </a:solidFill>
@@ -4625,14 +4601,14 @@
       </p:sp>
       <p:sp>
         <p:nvSpPr>
-          <p:cNvPr id="40" name="TextBox 39"/>
+          <p:cNvPr id="39" name="TextBox 38"/>
           <p:cNvSpPr txBox="1"/>
           <p:nvPr/>
         </p:nvSpPr>
         <p:spPr>
           <a:xfrm>
-            <a:off x="11295000" y="5760000"/>
-            <a:ext cx="9855000" cy="342000"/>
+            <a:off x="11295000" y="6814080"/>
+            <a:ext cx="9855000" cy="491040"/>
           </a:xfrm>
           <a:prstGeom prst="rect">
             <a:avLst/>
@@ -4646,7 +4622,7 @@
           <a:lstStyle/>
           <a:p>
             <a:r>
-              <a:rPr sz="1000" b="0" i="0">
+              <a:rPr sz="1200" b="0" i="0">
                 <a:solidFill>
                   <a:srgbClr val="C97B2C"/>
                 </a:solidFill>
@@ -4654,7 +4630,7 @@
               <a:t>• </a:t>
             </a:r>
             <a:r>
-              <a:rPr sz="1000" b="1" i="0">
+              <a:rPr sz="1200" b="1" i="0">
                 <a:solidFill>
                   <a:srgbClr val="1D1D1D"/>
                 </a:solidFill>
@@ -4662,7 +4638,7 @@
               <a:t>Fusion + eval: </a:t>
             </a:r>
             <a:r>
-              <a:rPr sz="1000" b="0" i="0">
+              <a:rPr sz="1200" b="0" i="0">
                 <a:solidFill>
                   <a:srgbClr val="1D1D1D"/>
                 </a:solidFill>
@@ -4674,14 +4650,14 @@
       </p:sp>
       <p:sp>
         <p:nvSpPr>
-          <p:cNvPr id="41" name="Rectangle 40"/>
+          <p:cNvPr id="40" name="Rectangle 39"/>
           <p:cNvSpPr/>
           <p:nvPr/>
         </p:nvSpPr>
         <p:spPr>
           <a:xfrm>
-            <a:off x="11223000" y="6102000"/>
-            <a:ext cx="54000" cy="252000"/>
+            <a:off x="11223000" y="7359120"/>
+            <a:ext cx="72000" cy="324000"/>
           </a:xfrm>
           <a:prstGeom prst="rect">
             <a:avLst/>
@@ -4715,14 +4691,14 @@
       </p:sp>
       <p:sp>
         <p:nvSpPr>
-          <p:cNvPr id="42" name="TextBox 41"/>
+          <p:cNvPr id="41" name="TextBox 40"/>
           <p:cNvSpPr txBox="1"/>
           <p:nvPr/>
         </p:nvSpPr>
         <p:spPr>
           <a:xfrm>
-            <a:off x="11367000" y="6066000"/>
-            <a:ext cx="9783000" cy="324000"/>
+            <a:off x="11403000" y="7305120"/>
+            <a:ext cx="9747000" cy="432000"/>
           </a:xfrm>
           <a:prstGeom prst="rect">
             <a:avLst/>
@@ -4736,7 +4712,7 @@
           <a:lstStyle/>
           <a:p>
             <a:r>
-              <a:rPr sz="1200" b="1" i="0">
+              <a:rPr sz="1500" b="1" i="0">
                 <a:solidFill>
                   <a:srgbClr val="1B3A6B"/>
                 </a:solidFill>
@@ -4748,14 +4724,14 @@
       </p:sp>
       <p:sp>
         <p:nvSpPr>
-          <p:cNvPr id="43" name="TextBox 42"/>
+          <p:cNvPr id="42" name="TextBox 41"/>
           <p:cNvSpPr txBox="1"/>
           <p:nvPr/>
         </p:nvSpPr>
         <p:spPr>
           <a:xfrm>
-            <a:off x="11295000" y="6426000"/>
-            <a:ext cx="9855000" cy="342000"/>
+            <a:off x="11295000" y="7773120"/>
+            <a:ext cx="9855000" cy="491040"/>
           </a:xfrm>
           <a:prstGeom prst="rect">
             <a:avLst/>
@@ -4769,7 +4745,7 @@
           <a:lstStyle/>
           <a:p>
             <a:r>
-              <a:rPr sz="1000" b="0" i="0">
+              <a:rPr sz="1200" b="0" i="0">
                 <a:solidFill>
                   <a:srgbClr val="C97B2C"/>
                 </a:solidFill>
@@ -4777,7 +4753,7 @@
               <a:t>• </a:t>
             </a:r>
             <a:r>
-              <a:rPr sz="1000" b="1" i="0">
+              <a:rPr sz="1200" b="1" i="0">
                 <a:solidFill>
                   <a:srgbClr val="1D1D1D"/>
                 </a:solidFill>
@@ -4785,7 +4761,7 @@
               <a:t>DeepSeek-OCR-2: </a:t>
             </a:r>
             <a:r>
-              <a:rPr sz="1000" b="0" i="0">
+              <a:rPr sz="1200" b="0" i="0">
                 <a:solidFill>
                   <a:srgbClr val="1D1D1D"/>
                 </a:solidFill>
@@ -4797,14 +4773,14 @@
       </p:sp>
       <p:sp>
         <p:nvSpPr>
-          <p:cNvPr id="44" name="TextBox 43"/>
+          <p:cNvPr id="43" name="TextBox 42"/>
           <p:cNvSpPr txBox="1"/>
           <p:nvPr/>
         </p:nvSpPr>
         <p:spPr>
           <a:xfrm>
-            <a:off x="11295000" y="6696000"/>
-            <a:ext cx="9855000" cy="342000"/>
+            <a:off x="11295000" y="8192160"/>
+            <a:ext cx="9855000" cy="491040"/>
           </a:xfrm>
           <a:prstGeom prst="rect">
             <a:avLst/>
@@ -4818,7 +4794,7 @@
           <a:lstStyle/>
           <a:p>
             <a:r>
-              <a:rPr sz="1000" b="0" i="0">
+              <a:rPr sz="1200" b="0" i="0">
                 <a:solidFill>
                   <a:srgbClr val="C97B2C"/>
                 </a:solidFill>
@@ -4826,7 +4802,7 @@
               <a:t>• </a:t>
             </a:r>
             <a:r>
-              <a:rPr sz="1000" b="1" i="0">
+              <a:rPr sz="1200" b="1" i="0">
                 <a:solidFill>
                   <a:srgbClr val="1D1D1D"/>
                 </a:solidFill>
@@ -4834,7 +4810,7 @@
               <a:t>qwen3.5:35b: </a:t>
             </a:r>
             <a:r>
-              <a:rPr sz="1000" b="0" i="0">
+              <a:rPr sz="1200" b="0" i="0">
                 <a:solidFill>
                   <a:srgbClr val="1D1D1D"/>
                 </a:solidFill>
@@ -4846,14 +4822,14 @@
       </p:sp>
       <p:sp>
         <p:nvSpPr>
-          <p:cNvPr id="45" name="TextBox 44"/>
+          <p:cNvPr id="44" name="TextBox 43"/>
           <p:cNvSpPr txBox="1"/>
           <p:nvPr/>
         </p:nvSpPr>
         <p:spPr>
           <a:xfrm>
-            <a:off x="11295000" y="6966000"/>
-            <a:ext cx="9855000" cy="342000"/>
+            <a:off x="11295000" y="8611200"/>
+            <a:ext cx="9855000" cy="491040"/>
           </a:xfrm>
           <a:prstGeom prst="rect">
             <a:avLst/>
@@ -4867,7 +4843,7 @@
           <a:lstStyle/>
           <a:p>
             <a:r>
-              <a:rPr sz="1000" b="0" i="0">
+              <a:rPr sz="1200" b="0" i="0">
                 <a:solidFill>
                   <a:srgbClr val="C97B2C"/>
                 </a:solidFill>
@@ -4875,7 +4851,7 @@
               <a:t>• </a:t>
             </a:r>
             <a:r>
-              <a:rPr sz="1000" b="1" i="0">
+              <a:rPr sz="1200" b="1" i="0">
                 <a:solidFill>
                   <a:srgbClr val="1D1D1D"/>
                 </a:solidFill>
@@ -4883,26 +4859,26 @@
               <a:t>llama3.1:8b: </a:t>
             </a:r>
             <a:r>
-              <a:rPr sz="1000" b="0" i="0">
+              <a:rPr sz="1200" b="0" i="0">
                 <a:solidFill>
                   <a:srgbClr val="1D1D1D"/>
                 </a:solidFill>
               </a:rPr>
-              <a:t>judge from a different model family (Meta vs Alibaba) to reduce self-preference bias; EN + FR</a:t>
-            </a:r>
-          </a:p>
-        </p:txBody>
-      </p:sp>
-      <p:sp>
-        <p:nvSpPr>
-          <p:cNvPr id="46" name="TextBox 45"/>
+              <a:t>judge from a different model family (Meta vs Alibaba) to reduce self-preference bias</a:t>
+            </a:r>
+          </a:p>
+        </p:txBody>
+      </p:sp>
+      <p:sp>
+        <p:nvSpPr>
+          <p:cNvPr id="45" name="TextBox 44"/>
           <p:cNvSpPr txBox="1"/>
           <p:nvPr/>
         </p:nvSpPr>
         <p:spPr>
           <a:xfrm>
-            <a:off x="11223000" y="7272000"/>
-            <a:ext cx="9927000" cy="288000"/>
+            <a:off x="11223000" y="9102240"/>
+            <a:ext cx="9927000" cy="432000"/>
           </a:xfrm>
           <a:prstGeom prst="rect">
             <a:avLst/>
@@ -4916,7 +4892,7 @@
           <a:lstStyle/>
           <a:p>
             <a:r>
-              <a:rPr sz="900" b="0" i="0">
+              <a:rPr sz="1100" b="0" i="0">
                 <a:solidFill>
                   <a:srgbClr val="666666"/>
                 </a:solidFill>
@@ -4928,14 +4904,14 @@
       </p:sp>
       <p:sp>
         <p:nvSpPr>
-          <p:cNvPr id="47" name="Rectangle 46"/>
+          <p:cNvPr id="46" name="Rectangle 45"/>
           <p:cNvSpPr/>
           <p:nvPr/>
         </p:nvSpPr>
         <p:spPr>
           <a:xfrm>
-            <a:off x="11223000" y="7632000"/>
-            <a:ext cx="54000" cy="252000"/>
+            <a:off x="11223000" y="9660240"/>
+            <a:ext cx="72000" cy="324000"/>
           </a:xfrm>
           <a:prstGeom prst="rect">
             <a:avLst/>
@@ -4969,14 +4945,14 @@
       </p:sp>
       <p:sp>
         <p:nvSpPr>
-          <p:cNvPr id="48" name="TextBox 47"/>
+          <p:cNvPr id="47" name="TextBox 46"/>
           <p:cNvSpPr txBox="1"/>
           <p:nvPr/>
         </p:nvSpPr>
         <p:spPr>
           <a:xfrm>
-            <a:off x="11367000" y="7596000"/>
-            <a:ext cx="9783000" cy="324000"/>
+            <a:off x="11403000" y="9606240"/>
+            <a:ext cx="9747000" cy="432000"/>
           </a:xfrm>
           <a:prstGeom prst="rect">
             <a:avLst/>
@@ -4990,7 +4966,7 @@
           <a:lstStyle/>
           <a:p>
             <a:r>
-              <a:rPr sz="1200" b="1" i="0">
+              <a:rPr sz="1500" b="1" i="0">
                 <a:solidFill>
                   <a:srgbClr val="1B3A6B"/>
                 </a:solidFill>
@@ -5002,14 +4978,14 @@
       </p:sp>
       <p:sp>
         <p:nvSpPr>
-          <p:cNvPr id="49" name="TextBox 48"/>
+          <p:cNvPr id="48" name="TextBox 47"/>
           <p:cNvSpPr txBox="1"/>
           <p:nvPr/>
         </p:nvSpPr>
         <p:spPr>
           <a:xfrm>
-            <a:off x="11223000" y="7956000"/>
-            <a:ext cx="9927000" cy="576000"/>
+            <a:off x="11223000" y="10074240"/>
+            <a:ext cx="9927000" cy="936000"/>
           </a:xfrm>
           <a:prstGeom prst="rect">
             <a:avLst/>
@@ -5023,33 +4999,33 @@
           <a:lstStyle/>
           <a:p>
             <a:r>
-              <a:rPr sz="1000" b="0" i="0">
+              <a:rPr sz="1300" b="0" i="0">
                 <a:solidFill>
                   <a:srgbClr val="1D1D1D"/>
                 </a:solidFill>
               </a:rPr>
-              <a:t>Instead of consuming visual tokens top-left to bottom-right, learnable causal flow queries re-order them to a more logical reading path — preserving document structure in the output markdown.</a:t>
+              <a:t>Instead of consuming visual tokens top-left to bottom-right, learnable causal flow queries re-order them to a more logical reading path, preserving document structure in the output markdown.</a:t>
             </a:r>
           </a:p>
         </p:txBody>
       </p:sp>
       <p:pic>
         <p:nvPicPr>
-          <p:cNvPr id="50" name="Picture 49" descr="deepseek_ocr2_fig3.jpg"/>
+          <p:cNvPr id="49" name="Picture 48" descr="deepseek_ocr2_fig3.jpg"/>
           <p:cNvPicPr>
             <a:picLocks noChangeAspect="1"/>
           </p:cNvPicPr>
           <p:nvPr/>
         </p:nvPicPr>
         <p:blipFill>
-          <a:blip r:embed="rId3"/>
+          <a:blip r:embed="rId2"/>
           <a:stretch>
             <a:fillRect/>
           </a:stretch>
         </p:blipFill>
         <p:spPr>
           <a:xfrm>
-            <a:off x="11223000" y="8568000"/>
+            <a:off x="11223000" y="11082240"/>
             <a:ext cx="9927000" cy="3209730"/>
           </a:xfrm>
           <a:prstGeom prst="rect">
@@ -5059,14 +5035,14 @@
       </p:pic>
       <p:sp>
         <p:nvSpPr>
-          <p:cNvPr id="51" name="Rectangle 50"/>
+          <p:cNvPr id="50" name="Rectangle 49"/>
           <p:cNvSpPr/>
           <p:nvPr/>
         </p:nvSpPr>
         <p:spPr>
           <a:xfrm>
-            <a:off x="11223000" y="11921730"/>
-            <a:ext cx="54000" cy="252000"/>
+            <a:off x="11223000" y="14525970"/>
+            <a:ext cx="72000" cy="324000"/>
           </a:xfrm>
           <a:prstGeom prst="rect">
             <a:avLst/>
@@ -5100,14 +5076,14 @@
       </p:sp>
       <p:sp>
         <p:nvSpPr>
-          <p:cNvPr id="52" name="TextBox 51"/>
+          <p:cNvPr id="51" name="TextBox 50"/>
           <p:cNvSpPr txBox="1"/>
           <p:nvPr/>
         </p:nvSpPr>
         <p:spPr>
           <a:xfrm>
-            <a:off x="11367000" y="11885730"/>
-            <a:ext cx="9783000" cy="324000"/>
+            <a:off x="11403000" y="14471970"/>
+            <a:ext cx="9747000" cy="432000"/>
           </a:xfrm>
           <a:prstGeom prst="rect">
             <a:avLst/>
@@ -5121,26 +5097,26 @@
           <a:lstStyle/>
           <a:p>
             <a:r>
-              <a:rPr sz="1200" b="1" i="0">
+              <a:rPr sz="1500" b="1" i="0">
                 <a:solidFill>
                   <a:srgbClr val="1B3A6B"/>
                 </a:solidFill>
               </a:rPr>
-              <a:t>Experimental conditions</a:t>
-            </a:r>
-          </a:p>
-        </p:txBody>
-      </p:sp>
-      <p:sp>
-        <p:nvSpPr>
-          <p:cNvPr id="53" name="TextBox 52"/>
+              <a:t>Experimental conditions (7 total)</a:t>
+            </a:r>
+          </a:p>
+        </p:txBody>
+      </p:sp>
+      <p:sp>
+        <p:nvSpPr>
+          <p:cNvPr id="52" name="TextBox 51"/>
           <p:cNvSpPr txBox="1"/>
           <p:nvPr/>
         </p:nvSpPr>
         <p:spPr>
           <a:xfrm>
-            <a:off x="11295000" y="12245730"/>
-            <a:ext cx="9855000" cy="342000"/>
+            <a:off x="11295000" y="14939970"/>
+            <a:ext cx="9855000" cy="491040"/>
           </a:xfrm>
           <a:prstGeom prst="rect">
             <a:avLst/>
@@ -5154,7 +5130,7 @@
           <a:lstStyle/>
           <a:p>
             <a:r>
-              <a:rPr sz="1000" b="0" i="0">
+              <a:rPr sz="1200" b="0" i="0">
                 <a:solidFill>
                   <a:srgbClr val="C97B2C"/>
                 </a:solidFill>
@@ -5162,7 +5138,7 @@
               <a:t>• </a:t>
             </a:r>
             <a:r>
-              <a:rPr sz="1000" b="1" i="0">
+              <a:rPr sz="1200" b="1" i="0">
                 <a:solidFill>
                   <a:srgbClr val="1D1D1D"/>
                 </a:solidFill>
@@ -5170,7 +5146,7 @@
               <a:t>jina_nemo / jina_deepseek: </a:t>
             </a:r>
             <a:r>
-              <a:rPr sz="1000" b="0" i="0">
+              <a:rPr sz="1200" b="0" i="0">
                 <a:solidFill>
                   <a:srgbClr val="1D1D1D"/>
                 </a:solidFill>
@@ -5182,14 +5158,14 @@
       </p:sp>
       <p:sp>
         <p:nvSpPr>
-          <p:cNvPr id="54" name="TextBox 53"/>
+          <p:cNvPr id="53" name="TextBox 52"/>
           <p:cNvSpPr txBox="1"/>
           <p:nvPr/>
         </p:nvSpPr>
         <p:spPr>
           <a:xfrm>
-            <a:off x="11295000" y="12515730"/>
-            <a:ext cx="9855000" cy="342000"/>
+            <a:off x="11295000" y="15359010"/>
+            <a:ext cx="9855000" cy="491040"/>
           </a:xfrm>
           <a:prstGeom prst="rect">
             <a:avLst/>
@@ -5203,7 +5179,7 @@
           <a:lstStyle/>
           <a:p>
             <a:r>
-              <a:rPr sz="1000" b="0" i="0">
+              <a:rPr sz="1200" b="0" i="0">
                 <a:solidFill>
                   <a:srgbClr val="C97B2C"/>
                 </a:solidFill>
@@ -5211,7 +5187,7 @@
               <a:t>• </a:t>
             </a:r>
             <a:r>
-              <a:rPr sz="1000" b="1" i="0">
+              <a:rPr sz="1200" b="1" i="0">
                 <a:solidFill>
                   <a:srgbClr val="1D1D1D"/>
                 </a:solidFill>
@@ -5219,7 +5195,7 @@
               <a:t>jina_nemo_reranked / jina_deepseek_reranked: </a:t>
             </a:r>
             <a:r>
-              <a:rPr sz="1000" b="0" i="0">
+              <a:rPr sz="1200" b="0" i="0">
                 <a:solidFill>
                   <a:srgbClr val="1D1D1D"/>
                 </a:solidFill>
@@ -5231,14 +5207,14 @@
       </p:sp>
       <p:sp>
         <p:nvSpPr>
-          <p:cNvPr id="55" name="TextBox 54"/>
+          <p:cNvPr id="54" name="TextBox 53"/>
           <p:cNvSpPr txBox="1"/>
           <p:nvPr/>
         </p:nvSpPr>
         <p:spPr>
           <a:xfrm>
-            <a:off x="11295000" y="12785730"/>
-            <a:ext cx="9855000" cy="342000"/>
+            <a:off x="11295000" y="15778050"/>
+            <a:ext cx="9855000" cy="491040"/>
           </a:xfrm>
           <a:prstGeom prst="rect">
             <a:avLst/>
@@ -5252,7 +5228,7 @@
           <a:lstStyle/>
           <a:p>
             <a:r>
-              <a:rPr sz="1000" b="0" i="0">
+              <a:rPr sz="1200" b="0" i="0">
                 <a:solidFill>
                   <a:srgbClr val="C97B2C"/>
                 </a:solidFill>
@@ -5260,7 +5236,7 @@
               <a:t>• </a:t>
             </a:r>
             <a:r>
-              <a:rPr sz="1000" b="1" i="0">
+              <a:rPr sz="1200" b="1" i="0">
                 <a:solidFill>
                   <a:srgbClr val="1D1D1D"/>
                 </a:solidFill>
@@ -5268,7 +5244,7 @@
               <a:t>colembed: </a:t>
             </a:r>
             <a:r>
-              <a:rPr sz="1000" b="0" i="0">
+              <a:rPr sz="1200" b="0" i="0">
                 <a:solidFill>
                   <a:srgbClr val="1D1D1D"/>
                 </a:solidFill>
@@ -5280,14 +5256,14 @@
       </p:sp>
       <p:sp>
         <p:nvSpPr>
-          <p:cNvPr id="56" name="TextBox 55"/>
+          <p:cNvPr id="55" name="TextBox 54"/>
           <p:cNvSpPr txBox="1"/>
           <p:nvPr/>
         </p:nvSpPr>
         <p:spPr>
           <a:xfrm>
-            <a:off x="11295000" y="13055730"/>
-            <a:ext cx="9855000" cy="342000"/>
+            <a:off x="11295000" y="16197090"/>
+            <a:ext cx="9855000" cy="491040"/>
           </a:xfrm>
           <a:prstGeom prst="rect">
             <a:avLst/>
@@ -5301,7 +5277,7 @@
           <a:lstStyle/>
           <a:p>
             <a:r>
-              <a:rPr sz="1000" b="0" i="0">
+              <a:rPr sz="1200" b="0" i="0">
                 <a:solidFill>
                   <a:srgbClr val="C97B2C"/>
                 </a:solidFill>
@@ -5309,7 +5285,7 @@
               <a:t>• </a:t>
             </a:r>
             <a:r>
-              <a:rPr sz="1000" b="1" i="0">
+              <a:rPr sz="1200" b="1" i="0">
                 <a:solidFill>
                   <a:srgbClr val="1D1D1D"/>
                 </a:solidFill>
@@ -5317,7 +5293,7 @@
               <a:t>hybrid_nemo / hybrid_deepseek: </a:t>
             </a:r>
             <a:r>
-              <a:rPr sz="1000" b="0" i="0">
+              <a:rPr sz="1200" b="0" i="0">
                 <a:solidFill>
                   <a:srgbClr val="1D1D1D"/>
                 </a:solidFill>
@@ -5329,14 +5305,14 @@
       </p:sp>
       <p:sp>
         <p:nvSpPr>
-          <p:cNvPr id="57" name="Rectangle 56"/>
+          <p:cNvPr id="56" name="Rectangle 55"/>
           <p:cNvSpPr/>
           <p:nvPr/>
         </p:nvSpPr>
         <p:spPr>
           <a:xfrm>
-            <a:off x="21654000" y="3168000"/>
-            <a:ext cx="9927000" cy="396000"/>
+            <a:off x="21654000" y="3276000"/>
+            <a:ext cx="9927000" cy="504000"/>
           </a:xfrm>
           <a:prstGeom prst="rect">
             <a:avLst/>
@@ -5370,14 +5346,14 @@
       </p:sp>
       <p:sp>
         <p:nvSpPr>
-          <p:cNvPr id="58" name="TextBox 57"/>
+          <p:cNvPr id="57" name="TextBox 56"/>
           <p:cNvSpPr txBox="1"/>
           <p:nvPr/>
         </p:nvSpPr>
         <p:spPr>
           <a:xfrm>
-            <a:off x="21762000" y="3204000"/>
-            <a:ext cx="9783000" cy="396000"/>
+            <a:off x="21762000" y="3330000"/>
+            <a:ext cx="9783000" cy="504000"/>
           </a:xfrm>
           <a:prstGeom prst="rect">
             <a:avLst/>
@@ -5391,7 +5367,7 @@
           <a:lstStyle/>
           <a:p>
             <a:r>
-              <a:rPr sz="1500" b="1" i="0">
+              <a:rPr sz="1900" b="1" i="0">
                 <a:solidFill>
                   <a:srgbClr val="FFFFFF"/>
                 </a:solidFill>
@@ -5403,14 +5379,14 @@
       </p:sp>
       <p:sp>
         <p:nvSpPr>
-          <p:cNvPr id="59" name="Rectangle 58"/>
+          <p:cNvPr id="58" name="Rectangle 57"/>
           <p:cNvSpPr/>
           <p:nvPr/>
         </p:nvSpPr>
         <p:spPr>
           <a:xfrm>
-            <a:off x="21654000" y="3708000"/>
-            <a:ext cx="54000" cy="252000"/>
+            <a:off x="21654000" y="3978000"/>
+            <a:ext cx="72000" cy="324000"/>
           </a:xfrm>
           <a:prstGeom prst="rect">
             <a:avLst/>
@@ -5444,14 +5420,14 @@
       </p:sp>
       <p:sp>
         <p:nvSpPr>
-          <p:cNvPr id="60" name="TextBox 59"/>
+          <p:cNvPr id="59" name="TextBox 58"/>
           <p:cNvSpPr txBox="1"/>
           <p:nvPr/>
         </p:nvSpPr>
         <p:spPr>
           <a:xfrm>
-            <a:off x="21798000" y="3672000"/>
-            <a:ext cx="9783000" cy="324000"/>
+            <a:off x="21834000" y="3924000"/>
+            <a:ext cx="9747000" cy="432000"/>
           </a:xfrm>
           <a:prstGeom prst="rect">
             <a:avLst/>
@@ -5465,7 +5441,7 @@
           <a:lstStyle/>
           <a:p>
             <a:r>
-              <a:rPr sz="1200" b="1" i="0">
+              <a:rPr sz="1500" b="1" i="0">
                 <a:solidFill>
                   <a:srgbClr val="1B3A6B"/>
                 </a:solidFill>
@@ -5477,15 +5453,15 @@
       </p:sp>
       <p:graphicFrame>
         <p:nvGraphicFramePr>
-          <p:cNvPr id="61" name="Table 60"/>
+          <p:cNvPr id="60" name="Table 59"/>
           <p:cNvGraphicFramePr>
             <a:graphicFrameLocks noGrp="1"/>
           </p:cNvGraphicFramePr>
           <p:nvPr/>
         </p:nvGraphicFramePr>
         <p:xfrm>
-          <a:off x="21654000" y="4032000"/>
-          <a:ext cx="9927000" cy="1512000"/>
+          <a:off x="21654000" y="4392000"/>
+          <a:ext cx="9927000" cy="2520000"/>
         </p:xfrm>
         <a:graphic>
           <a:graphicData uri="http://schemas.openxmlformats.org/drawingml/2006/table">
@@ -5498,14 +5474,14 @@
                 <a:gridCol w="2481750"/>
                 <a:gridCol w="2481750"/>
               </a:tblGrid>
-              <a:tr h="216000">
-                <a:tc>
-                  <a:txBody>
-                    <a:bodyPr/>
-                    <a:lstStyle/>
-                    <a:p>
-                      <a:pPr>
-                        <a:defRPr sz="850" b="1">
+              <a:tr h="360000">
+                <a:tc>
+                  <a:txBody>
+                    <a:bodyPr/>
+                    <a:lstStyle/>
+                    <a:p>
+                      <a:pPr>
+                        <a:defRPr sz="1100" b="1">
                           <a:solidFill>
                             <a:srgbClr val="1B3A6B"/>
                           </a:solidFill>
@@ -5528,7 +5504,7 @@
                     <a:lstStyle/>
                     <a:p>
                       <a:pPr>
-                        <a:defRPr sz="850" b="1">
+                        <a:defRPr sz="1100" b="1">
                           <a:solidFill>
                             <a:srgbClr val="1B3A6B"/>
                           </a:solidFill>
@@ -5551,7 +5527,7 @@
                     <a:lstStyle/>
                     <a:p>
                       <a:pPr>
-                        <a:defRPr sz="850" b="1">
+                        <a:defRPr sz="1100" b="1">
                           <a:solidFill>
                             <a:srgbClr val="1B3A6B"/>
                           </a:solidFill>
@@ -5569,14 +5545,14 @@
                   </a:tcPr>
                 </a:tc>
               </a:tr>
-              <a:tr h="216000">
-                <a:tc>
-                  <a:txBody>
-                    <a:bodyPr/>
-                    <a:lstStyle/>
-                    <a:p>
-                      <a:pPr>
-                        <a:defRPr sz="850" b="0"/>
+              <a:tr h="360000">
+                <a:tc>
+                  <a:txBody>
+                    <a:bodyPr/>
+                    <a:lstStyle/>
+                    <a:p>
+                      <a:pPr>
+                        <a:defRPr sz="1100" b="0"/>
                       </a:pPr>
                       <a:r>
                         <a:t>computer_science (EN)</a:t>
@@ -5591,7 +5567,7 @@
                     <a:lstStyle/>
                     <a:p>
                       <a:pPr>
-                        <a:defRPr sz="850" b="0"/>
+                        <a:defRPr sz="1100" b="0"/>
                       </a:pPr>
                       <a:r>
                         <a:t>78.0</a:t>
@@ -5606,7 +5582,7 @@
                     <a:lstStyle/>
                     <a:p>
                       <a:pPr>
-                        <a:defRPr sz="850" b="1">
+                        <a:defRPr sz="1100" b="1">
                           <a:solidFill>
                             <a:srgbClr val="166534"/>
                           </a:solidFill>
@@ -5624,14 +5600,14 @@
                   </a:tcPr>
                 </a:tc>
               </a:tr>
-              <a:tr h="216000">
-                <a:tc>
-                  <a:txBody>
-                    <a:bodyPr/>
-                    <a:lstStyle/>
-                    <a:p>
-                      <a:pPr>
-                        <a:defRPr sz="850" b="0"/>
+              <a:tr h="360000">
+                <a:tc>
+                  <a:txBody>
+                    <a:bodyPr/>
+                    <a:lstStyle/>
+                    <a:p>
+                      <a:pPr>
+                        <a:defRPr sz="1100" b="0"/>
                       </a:pPr>
                       <a:r>
                         <a:t>finance_en (EN)</a:t>
@@ -5646,7 +5622,7 @@
                     <a:lstStyle/>
                     <a:p>
                       <a:pPr>
-                        <a:defRPr sz="850" b="1">
+                        <a:defRPr sz="1100" b="1">
                           <a:solidFill>
                             <a:srgbClr val="166534"/>
                           </a:solidFill>
@@ -5669,7 +5645,7 @@
                     <a:lstStyle/>
                     <a:p>
                       <a:pPr>
-                        <a:defRPr sz="850" b="0"/>
+                        <a:defRPr sz="1100" b="0"/>
                       </a:pPr>
                       <a:r>
                         <a:t>65.7</a:t>
@@ -5679,14 +5655,14 @@
                   <a:tcPr/>
                 </a:tc>
               </a:tr>
-              <a:tr h="216000">
-                <a:tc>
-                  <a:txBody>
-                    <a:bodyPr/>
-                    <a:lstStyle/>
-                    <a:p>
-                      <a:pPr>
-                        <a:defRPr sz="850" b="0"/>
+              <a:tr h="360000">
+                <a:tc>
+                  <a:txBody>
+                    <a:bodyPr/>
+                    <a:lstStyle/>
+                    <a:p>
+                      <a:pPr>
+                        <a:defRPr sz="1100" b="0"/>
                       </a:pPr>
                       <a:r>
                         <a:t>pharmaceuticals (EN)</a:t>
@@ -5701,7 +5677,7 @@
                     <a:lstStyle/>
                     <a:p>
                       <a:pPr>
-                        <a:defRPr sz="850" b="1">
+                        <a:defRPr sz="1100" b="1">
                           <a:solidFill>
                             <a:srgbClr val="166534"/>
                           </a:solidFill>
@@ -5724,7 +5700,7 @@
                     <a:lstStyle/>
                     <a:p>
                       <a:pPr>
-                        <a:defRPr sz="850" b="0"/>
+                        <a:defRPr sz="1100" b="0"/>
                       </a:pPr>
                       <a:r>
                         <a:t>65.1</a:t>
@@ -5734,14 +5710,14 @@
                   <a:tcPr/>
                 </a:tc>
               </a:tr>
-              <a:tr h="216000">
-                <a:tc>
-                  <a:txBody>
-                    <a:bodyPr/>
-                    <a:lstStyle/>
-                    <a:p>
-                      <a:pPr>
-                        <a:defRPr sz="850" b="0"/>
+              <a:tr h="360000">
+                <a:tc>
+                  <a:txBody>
+                    <a:bodyPr/>
+                    <a:lstStyle/>
+                    <a:p>
+                      <a:pPr>
+                        <a:defRPr sz="1100" b="0"/>
                       </a:pPr>
                       <a:r>
                         <a:t>physics (FR)</a:t>
@@ -5756,7 +5732,7 @@
                     <a:lstStyle/>
                     <a:p>
                       <a:pPr>
-                        <a:defRPr sz="850" b="1">
+                        <a:defRPr sz="1100" b="1">
                           <a:solidFill>
                             <a:srgbClr val="166534"/>
                           </a:solidFill>
@@ -5779,7 +5755,7 @@
                     <a:lstStyle/>
                     <a:p>
                       <a:pPr>
-                        <a:defRPr sz="850" b="0"/>
+                        <a:defRPr sz="1100" b="0"/>
                       </a:pPr>
                       <a:r>
                         <a:t>46.6</a:t>
@@ -5789,14 +5765,14 @@
                   <a:tcPr/>
                 </a:tc>
               </a:tr>
-              <a:tr h="216000">
-                <a:tc>
-                  <a:txBody>
-                    <a:bodyPr/>
-                    <a:lstStyle/>
-                    <a:p>
-                      <a:pPr>
-                        <a:defRPr sz="850" b="0"/>
+              <a:tr h="360000">
+                <a:tc>
+                  <a:txBody>
+                    <a:bodyPr/>
+                    <a:lstStyle/>
+                    <a:p>
+                      <a:pPr>
+                        <a:defRPr sz="1100" b="0"/>
                       </a:pPr>
                       <a:r>
                         <a:t>finance_fr (FR)</a:t>
@@ -5811,7 +5787,7 @@
                     <a:lstStyle/>
                     <a:p>
                       <a:pPr>
-                        <a:defRPr sz="850" b="0"/>
+                        <a:defRPr sz="1100" b="0"/>
                       </a:pPr>
                       <a:r>
                         <a:t>47.6</a:t>
@@ -5826,7 +5802,7 @@
                     <a:lstStyle/>
                     <a:p>
                       <a:pPr>
-                        <a:defRPr sz="850" b="1">
+                        <a:defRPr sz="1100" b="1">
                           <a:solidFill>
                             <a:srgbClr val="166534"/>
                           </a:solidFill>
@@ -5844,14 +5820,14 @@
                   </a:tcPr>
                 </a:tc>
               </a:tr>
-              <a:tr h="216000">
-                <a:tc>
-                  <a:txBody>
-                    <a:bodyPr/>
-                    <a:lstStyle/>
-                    <a:p>
-                      <a:pPr>
-                        <a:defRPr sz="850" b="1"/>
+              <a:tr h="360000">
+                <a:tc>
+                  <a:txBody>
+                    <a:bodyPr/>
+                    <a:lstStyle/>
+                    <a:p>
+                      <a:pPr>
+                        <a:defRPr sz="1100" b="1"/>
                       </a:pPr>
                       <a:r>
                         <a:t>avg</a:t>
@@ -5866,7 +5842,7 @@
                     <a:lstStyle/>
                     <a:p>
                       <a:pPr>
-                        <a:defRPr sz="850" b="0"/>
+                        <a:defRPr sz="1100" b="0"/>
                       </a:pPr>
                       <a:r>
                         <a:t>61.8</a:t>
@@ -5881,7 +5857,7 @@
                     <a:lstStyle/>
                     <a:p>
                       <a:pPr>
-                        <a:defRPr sz="850" b="0"/>
+                        <a:defRPr sz="1100" b="0"/>
                       </a:pPr>
                       <a:r>
                         <a:t>61.6</a:t>
@@ -5897,14 +5873,14 @@
       </p:graphicFrame>
       <p:sp>
         <p:nvSpPr>
-          <p:cNvPr id="62" name="Rectangle 61"/>
+          <p:cNvPr id="61" name="Rectangle 60"/>
           <p:cNvSpPr/>
           <p:nvPr/>
         </p:nvSpPr>
         <p:spPr>
           <a:xfrm>
-            <a:off x="21654000" y="5724000"/>
-            <a:ext cx="54000" cy="252000"/>
+            <a:off x="21654000" y="7146000"/>
+            <a:ext cx="72000" cy="324000"/>
           </a:xfrm>
           <a:prstGeom prst="rect">
             <a:avLst/>
@@ -5938,14 +5914,14 @@
       </p:sp>
       <p:sp>
         <p:nvSpPr>
-          <p:cNvPr id="63" name="TextBox 62"/>
+          <p:cNvPr id="62" name="TextBox 61"/>
           <p:cNvSpPr txBox="1"/>
           <p:nvPr/>
         </p:nvSpPr>
         <p:spPr>
           <a:xfrm>
-            <a:off x="21798000" y="5688000"/>
-            <a:ext cx="9783000" cy="324000"/>
+            <a:off x="21834000" y="7092000"/>
+            <a:ext cx="9747000" cy="432000"/>
           </a:xfrm>
           <a:prstGeom prst="rect">
             <a:avLst/>
@@ -5959,7 +5935,7 @@
           <a:lstStyle/>
           <a:p>
             <a:r>
-              <a:rPr sz="1200" b="1" i="0">
+              <a:rPr sz="1500" b="1" i="0">
                 <a:solidFill>
                   <a:srgbClr val="1B3A6B"/>
                 </a:solidFill>
@@ -5971,15 +5947,15 @@
       </p:sp>
       <p:graphicFrame>
         <p:nvGraphicFramePr>
-          <p:cNvPr id="64" name="Table 63"/>
+          <p:cNvPr id="63" name="Table 62"/>
           <p:cNvGraphicFramePr>
             <a:graphicFrameLocks noGrp="1"/>
           </p:cNvGraphicFramePr>
           <p:nvPr/>
         </p:nvGraphicFramePr>
         <p:xfrm>
-          <a:off x="21654000" y="6048000"/>
-          <a:ext cx="9927000" cy="1512000"/>
+          <a:off x="21654000" y="7560000"/>
+          <a:ext cx="9927000" cy="2520000"/>
         </p:xfrm>
         <a:graphic>
           <a:graphicData uri="http://schemas.openxmlformats.org/drawingml/2006/table">
@@ -5994,14 +5970,14 @@
                 <a:gridCol w="1687590"/>
                 <a:gridCol w="1687590"/>
               </a:tblGrid>
-              <a:tr h="216000">
-                <a:tc>
-                  <a:txBody>
-                    <a:bodyPr/>
-                    <a:lstStyle/>
-                    <a:p>
-                      <a:pPr>
-                        <a:defRPr sz="850" b="1">
+              <a:tr h="360000">
+                <a:tc>
+                  <a:txBody>
+                    <a:bodyPr/>
+                    <a:lstStyle/>
+                    <a:p>
+                      <a:pPr>
+                        <a:defRPr sz="1100" b="1">
                           <a:solidFill>
                             <a:srgbClr val="1B3A6B"/>
                           </a:solidFill>
@@ -6024,7 +6000,7 @@
                     <a:lstStyle/>
                     <a:p>
                       <a:pPr>
-                        <a:defRPr sz="850" b="1">
+                        <a:defRPr sz="1100" b="1">
                           <a:solidFill>
                             <a:srgbClr val="1B3A6B"/>
                           </a:solidFill>
@@ -6047,7 +6023,7 @@
                     <a:lstStyle/>
                     <a:p>
                       <a:pPr>
-                        <a:defRPr sz="850" b="1">
+                        <a:defRPr sz="1100" b="1">
                           <a:solidFill>
                             <a:srgbClr val="1B3A6B"/>
                           </a:solidFill>
@@ -6070,7 +6046,7 @@
                     <a:lstStyle/>
                     <a:p>
                       <a:pPr>
-                        <a:defRPr sz="850" b="1">
+                        <a:defRPr sz="1100" b="1">
                           <a:solidFill>
                             <a:srgbClr val="1B3A6B"/>
                           </a:solidFill>
@@ -6093,7 +6069,7 @@
                     <a:lstStyle/>
                     <a:p>
                       <a:pPr>
-                        <a:defRPr sz="850" b="1">
+                        <a:defRPr sz="1100" b="1">
                           <a:solidFill>
                             <a:srgbClr val="1B3A6B"/>
                           </a:solidFill>
@@ -6111,14 +6087,14 @@
                   </a:tcPr>
                 </a:tc>
               </a:tr>
-              <a:tr h="216000">
-                <a:tc>
-                  <a:txBody>
-                    <a:bodyPr/>
-                    <a:lstStyle/>
-                    <a:p>
-                      <a:pPr>
-                        <a:defRPr sz="850" b="0"/>
+              <a:tr h="360000">
+                <a:tc>
+                  <a:txBody>
+                    <a:bodyPr/>
+                    <a:lstStyle/>
+                    <a:p>
+                      <a:pPr>
+                        <a:defRPr sz="1100" b="0"/>
                       </a:pPr>
                       <a:r>
                         <a:t>computer_science</a:t>
@@ -6133,7 +6109,7 @@
                     <a:lstStyle/>
                     <a:p>
                       <a:pPr>
-                        <a:defRPr sz="850" b="0"/>
+                        <a:defRPr sz="1100" b="0"/>
                       </a:pPr>
                       <a:r>
                         <a:t>91.6</a:t>
@@ -6148,7 +6124,7 @@
                     <a:lstStyle/>
                     <a:p>
                       <a:pPr>
-                        <a:defRPr sz="850" b="0"/>
+                        <a:defRPr sz="1100" b="0"/>
                       </a:pPr>
                       <a:r>
                         <a:t>93.0</a:t>
@@ -6163,7 +6139,7 @@
                     <a:lstStyle/>
                     <a:p>
                       <a:pPr>
-                        <a:defRPr sz="850" b="1">
+                        <a:defRPr sz="1100" b="1">
                           <a:solidFill>
                             <a:srgbClr val="166534"/>
                           </a:solidFill>
@@ -6186,7 +6162,7 @@
                     <a:lstStyle/>
                     <a:p>
                       <a:pPr>
-                        <a:defRPr sz="850" b="1">
+                        <a:defRPr sz="1100" b="1">
                           <a:solidFill>
                             <a:srgbClr val="166534"/>
                           </a:solidFill>
@@ -6204,14 +6180,14 @@
                   </a:tcPr>
                 </a:tc>
               </a:tr>
-              <a:tr h="216000">
-                <a:tc>
-                  <a:txBody>
-                    <a:bodyPr/>
-                    <a:lstStyle/>
-                    <a:p>
-                      <a:pPr>
-                        <a:defRPr sz="850" b="0"/>
+              <a:tr h="360000">
+                <a:tc>
+                  <a:txBody>
+                    <a:bodyPr/>
+                    <a:lstStyle/>
+                    <a:p>
+                      <a:pPr>
+                        <a:defRPr sz="1100" b="0"/>
                       </a:pPr>
                       <a:r>
                         <a:t>finance_en</a:t>
@@ -6226,7 +6202,7 @@
                     <a:lstStyle/>
                     <a:p>
                       <a:pPr>
-                        <a:defRPr sz="850" b="0"/>
+                        <a:defRPr sz="1100" b="0"/>
                       </a:pPr>
                       <a:r>
                         <a:t>56.0</a:t>
@@ -6241,7 +6217,7 @@
                     <a:lstStyle/>
                     <a:p>
                       <a:pPr>
-                        <a:defRPr sz="850" b="0"/>
+                        <a:defRPr sz="1100" b="0"/>
                       </a:pPr>
                       <a:r>
                         <a:t>74.8</a:t>
@@ -6256,7 +6232,7 @@
                     <a:lstStyle/>
                     <a:p>
                       <a:pPr>
-                        <a:defRPr sz="850" b="0"/>
+                        <a:defRPr sz="1100" b="0"/>
                       </a:pPr>
                       <a:r>
                         <a:t>79.0</a:t>
@@ -6271,7 +6247,7 @@
                     <a:lstStyle/>
                     <a:p>
                       <a:pPr>
-                        <a:defRPr sz="850" b="1">
+                        <a:defRPr sz="1100" b="1">
                           <a:solidFill>
                             <a:srgbClr val="166534"/>
                           </a:solidFill>
@@ -6289,14 +6265,14 @@
                   </a:tcPr>
                 </a:tc>
               </a:tr>
-              <a:tr h="216000">
-                <a:tc>
-                  <a:txBody>
-                    <a:bodyPr/>
-                    <a:lstStyle/>
-                    <a:p>
-                      <a:pPr>
-                        <a:defRPr sz="850" b="0"/>
+              <a:tr h="360000">
+                <a:tc>
+                  <a:txBody>
+                    <a:bodyPr/>
+                    <a:lstStyle/>
+                    <a:p>
+                      <a:pPr>
+                        <a:defRPr sz="1100" b="0"/>
                       </a:pPr>
                       <a:r>
                         <a:t>pharmaceuticals</a:t>
@@ -6311,7 +6287,7 @@
                     <a:lstStyle/>
                     <a:p>
                       <a:pPr>
-                        <a:defRPr sz="850" b="0"/>
+                        <a:defRPr sz="1100" b="0"/>
                       </a:pPr>
                       <a:r>
                         <a:t>68.4</a:t>
@@ -6326,7 +6302,7 @@
                     <a:lstStyle/>
                     <a:p>
                       <a:pPr>
-                        <a:defRPr sz="850" b="0"/>
+                        <a:defRPr sz="1100" b="0"/>
                       </a:pPr>
                       <a:r>
                         <a:t>83.2</a:t>
@@ -6341,7 +6317,7 @@
                     <a:lstStyle/>
                     <a:p>
                       <a:pPr>
-                        <a:defRPr sz="850" b="0"/>
+                        <a:defRPr sz="1100" b="0"/>
                       </a:pPr>
                       <a:r>
                         <a:t>88.5</a:t>
@@ -6356,7 +6332,7 @@
                     <a:lstStyle/>
                     <a:p>
                       <a:pPr>
-                        <a:defRPr sz="850" b="1">
+                        <a:defRPr sz="1100" b="1">
                           <a:solidFill>
                             <a:srgbClr val="166534"/>
                           </a:solidFill>
@@ -6374,14 +6350,14 @@
                   </a:tcPr>
                 </a:tc>
               </a:tr>
-              <a:tr h="216000">
-                <a:tc>
-                  <a:txBody>
-                    <a:bodyPr/>
-                    <a:lstStyle/>
-                    <a:p>
-                      <a:pPr>
-                        <a:defRPr sz="850" b="0"/>
+              <a:tr h="360000">
+                <a:tc>
+                  <a:txBody>
+                    <a:bodyPr/>
+                    <a:lstStyle/>
+                    <a:p>
+                      <a:pPr>
+                        <a:defRPr sz="1100" b="0"/>
                       </a:pPr>
                       <a:r>
                         <a:t>physics</a:t>
@@ -6396,7 +6372,7 @@
                     <a:lstStyle/>
                     <a:p>
                       <a:pPr>
-                        <a:defRPr sz="850" b="0"/>
+                        <a:defRPr sz="1100" b="0"/>
                       </a:pPr>
                       <a:r>
                         <a:t>87.8</a:t>
@@ -6411,7 +6387,7 @@
                     <a:lstStyle/>
                     <a:p>
                       <a:pPr>
-                        <a:defRPr sz="850" b="0"/>
+                        <a:defRPr sz="1100" b="0"/>
                       </a:pPr>
                       <a:r>
                         <a:t>83.1</a:t>
@@ -6426,7 +6402,7 @@
                     <a:lstStyle/>
                     <a:p>
                       <a:pPr>
-                        <a:defRPr sz="850" b="1">
+                        <a:defRPr sz="1100" b="1">
                           <a:solidFill>
                             <a:srgbClr val="166534"/>
                           </a:solidFill>
@@ -6449,7 +6425,7 @@
                     <a:lstStyle/>
                     <a:p>
                       <a:pPr>
-                        <a:defRPr sz="850" b="0"/>
+                        <a:defRPr sz="1100" b="0"/>
                       </a:pPr>
                       <a:r>
                         <a:t>89.7</a:t>
@@ -6459,14 +6435,14 @@
                   <a:tcPr/>
                 </a:tc>
               </a:tr>
-              <a:tr h="216000">
-                <a:tc>
-                  <a:txBody>
-                    <a:bodyPr/>
-                    <a:lstStyle/>
-                    <a:p>
-                      <a:pPr>
-                        <a:defRPr sz="850" b="0"/>
+              <a:tr h="360000">
+                <a:tc>
+                  <a:txBody>
+                    <a:bodyPr/>
+                    <a:lstStyle/>
+                    <a:p>
+                      <a:pPr>
+                        <a:defRPr sz="1100" b="0"/>
                       </a:pPr>
                       <a:r>
                         <a:t>finance_fr</a:t>
@@ -6481,7 +6457,7 @@
                     <a:lstStyle/>
                     <a:p>
                       <a:pPr>
-                        <a:defRPr sz="850" b="0"/>
+                        <a:defRPr sz="1100" b="0"/>
                       </a:pPr>
                       <a:r>
                         <a:t>40.6</a:t>
@@ -6496,7 +6472,7 @@
                     <a:lstStyle/>
                     <a:p>
                       <a:pPr>
-                        <a:defRPr sz="850" b="0"/>
+                        <a:defRPr sz="1100" b="0"/>
                       </a:pPr>
                       <a:r>
                         <a:t>70.3</a:t>
@@ -6511,7 +6487,7 @@
                     <a:lstStyle/>
                     <a:p>
                       <a:pPr>
-                        <a:defRPr sz="850" b="1">
+                        <a:defRPr sz="1100" b="1">
                           <a:solidFill>
                             <a:srgbClr val="166534"/>
                           </a:solidFill>
@@ -6534,7 +6510,7 @@
                     <a:lstStyle/>
                     <a:p>
                       <a:pPr>
-                        <a:defRPr sz="850" b="0"/>
+                        <a:defRPr sz="1100" b="0"/>
                       </a:pPr>
                       <a:r>
                         <a:t>77.2</a:t>
@@ -6544,14 +6520,14 @@
                   <a:tcPr/>
                 </a:tc>
               </a:tr>
-              <a:tr h="216000">
-                <a:tc>
-                  <a:txBody>
-                    <a:bodyPr/>
-                    <a:lstStyle/>
-                    <a:p>
-                      <a:pPr>
-                        <a:defRPr sz="850" b="1"/>
+              <a:tr h="360000">
+                <a:tc>
+                  <a:txBody>
+                    <a:bodyPr/>
+                    <a:lstStyle/>
+                    <a:p>
+                      <a:pPr>
+                        <a:defRPr sz="1100" b="1"/>
                       </a:pPr>
                       <a:r>
                         <a:t>avg</a:t>
@@ -6566,7 +6542,7 @@
                     <a:lstStyle/>
                     <a:p>
                       <a:pPr>
-                        <a:defRPr sz="850" b="0"/>
+                        <a:defRPr sz="1100" b="0"/>
                       </a:pPr>
                       <a:r>
                         <a:t>68.9</a:t>
@@ -6581,7 +6557,7 @@
                     <a:lstStyle/>
                     <a:p>
                       <a:pPr>
-                        <a:defRPr sz="850" b="0"/>
+                        <a:defRPr sz="1100" b="0"/>
                       </a:pPr>
                       <a:r>
                         <a:t>80.9</a:t>
@@ -6596,7 +6572,7 @@
                     <a:lstStyle/>
                     <a:p>
                       <a:pPr>
-                        <a:defRPr sz="850" b="0"/>
+                        <a:defRPr sz="1100" b="0"/>
                       </a:pPr>
                       <a:r>
                         <a:t>86.6</a:t>
@@ -6611,7 +6587,7 @@
                     <a:lstStyle/>
                     <a:p>
                       <a:pPr>
-                        <a:defRPr sz="850" b="1">
+                        <a:defRPr sz="1100" b="1">
                           <a:solidFill>
                             <a:srgbClr val="166534"/>
                           </a:solidFill>
@@ -6635,14 +6611,14 @@
       </p:graphicFrame>
       <p:sp>
         <p:nvSpPr>
-          <p:cNvPr id="65" name="Rectangle 64"/>
+          <p:cNvPr id="64" name="Rectangle 63"/>
           <p:cNvSpPr/>
           <p:nvPr/>
         </p:nvSpPr>
         <p:spPr>
           <a:xfrm>
-            <a:off x="21654000" y="7740000"/>
-            <a:ext cx="54000" cy="252000"/>
+            <a:off x="21654000" y="10314000"/>
+            <a:ext cx="72000" cy="324000"/>
           </a:xfrm>
           <a:prstGeom prst="rect">
             <a:avLst/>
@@ -6676,14 +6652,14 @@
       </p:sp>
       <p:sp>
         <p:nvSpPr>
-          <p:cNvPr id="66" name="TextBox 65"/>
+          <p:cNvPr id="65" name="TextBox 64"/>
           <p:cNvSpPr txBox="1"/>
           <p:nvPr/>
         </p:nvSpPr>
         <p:spPr>
           <a:xfrm>
-            <a:off x="21798000" y="7704000"/>
-            <a:ext cx="9783000" cy="324000"/>
+            <a:off x="21834000" y="10260000"/>
+            <a:ext cx="9747000" cy="432000"/>
           </a:xfrm>
           <a:prstGeom prst="rect">
             <a:avLst/>
@@ -6697,7 +6673,7 @@
           <a:lstStyle/>
           <a:p>
             <a:r>
-              <a:rPr sz="1200" b="1" i="0">
+              <a:rPr sz="1500" b="1" i="0">
                 <a:solidFill>
                   <a:srgbClr val="1B3A6B"/>
                 </a:solidFill>
@@ -6709,15 +6685,15 @@
       </p:sp>
       <p:graphicFrame>
         <p:nvGraphicFramePr>
-          <p:cNvPr id="67" name="Table 66"/>
+          <p:cNvPr id="66" name="Table 65"/>
           <p:cNvGraphicFramePr>
             <a:graphicFrameLocks noGrp="1"/>
           </p:cNvGraphicFramePr>
           <p:nvPr/>
         </p:nvGraphicFramePr>
         <p:xfrm>
-          <a:off x="21654000" y="8064000"/>
-          <a:ext cx="9927000" cy="1728000"/>
+          <a:off x="21654000" y="10728000"/>
+          <a:ext cx="9927000" cy="2880000"/>
         </p:xfrm>
         <a:graphic>
           <a:graphicData uri="http://schemas.openxmlformats.org/drawingml/2006/table">
@@ -6732,14 +6708,14 @@
                 <a:gridCol w="1687590"/>
                 <a:gridCol w="1687590"/>
               </a:tblGrid>
-              <a:tr h="216000">
-                <a:tc>
-                  <a:txBody>
-                    <a:bodyPr/>
-                    <a:lstStyle/>
-                    <a:p>
-                      <a:pPr>
-                        <a:defRPr sz="850" b="1">
+              <a:tr h="360000">
+                <a:tc>
+                  <a:txBody>
+                    <a:bodyPr/>
+                    <a:lstStyle/>
+                    <a:p>
+                      <a:pPr>
+                        <a:defRPr sz="1100" b="1">
                           <a:solidFill>
                             <a:srgbClr val="1B3A6B"/>
                           </a:solidFill>
@@ -6762,7 +6738,7 @@
                     <a:lstStyle/>
                     <a:p>
                       <a:pPr>
-                        <a:defRPr sz="850" b="1">
+                        <a:defRPr sz="1100" b="1">
                           <a:solidFill>
                             <a:srgbClr val="1B3A6B"/>
                           </a:solidFill>
@@ -6785,7 +6761,7 @@
                     <a:lstStyle/>
                     <a:p>
                       <a:pPr>
-                        <a:defRPr sz="850" b="1">
+                        <a:defRPr sz="1100" b="1">
                           <a:solidFill>
                             <a:srgbClr val="1B3A6B"/>
                           </a:solidFill>
@@ -6808,7 +6784,7 @@
                     <a:lstStyle/>
                     <a:p>
                       <a:pPr>
-                        <a:defRPr sz="850" b="1">
+                        <a:defRPr sz="1100" b="1">
                           <a:solidFill>
                             <a:srgbClr val="1B3A6B"/>
                           </a:solidFill>
@@ -6831,7 +6807,7 @@
                     <a:lstStyle/>
                     <a:p>
                       <a:pPr>
-                        <a:defRPr sz="850" b="1">
+                        <a:defRPr sz="1100" b="1">
                           <a:solidFill>
                             <a:srgbClr val="1B3A6B"/>
                           </a:solidFill>
@@ -6849,14 +6825,14 @@
                   </a:tcPr>
                 </a:tc>
               </a:tr>
-              <a:tr h="216000">
-                <a:tc>
-                  <a:txBody>
-                    <a:bodyPr/>
-                    <a:lstStyle/>
-                    <a:p>
-                      <a:pPr>
-                        <a:defRPr sz="850" b="0"/>
+              <a:tr h="360000">
+                <a:tc>
+                  <a:txBody>
+                    <a:bodyPr/>
+                    <a:lstStyle/>
+                    <a:p>
+                      <a:pPr>
+                        <a:defRPr sz="1100" b="0"/>
                       </a:pPr>
                       <a:r>
                         <a:t>numerical</a:t>
@@ -6871,7 +6847,7 @@
                     <a:lstStyle/>
                     <a:p>
                       <a:pPr>
-                        <a:defRPr sz="850" b="0"/>
+                        <a:defRPr sz="1100" b="0"/>
                       </a:pPr>
                       <a:r>
                         <a:t>36.4</a:t>
@@ -6886,7 +6862,7 @@
                     <a:lstStyle/>
                     <a:p>
                       <a:pPr>
-                        <a:defRPr sz="850" b="0"/>
+                        <a:defRPr sz="1100" b="0"/>
                       </a:pPr>
                       <a:r>
                         <a:t>70.4</a:t>
@@ -6901,7 +6877,7 @@
                     <a:lstStyle/>
                     <a:p>
                       <a:pPr>
-                        <a:defRPr sz="850" b="0"/>
+                        <a:defRPr sz="1100" b="0"/>
                       </a:pPr>
                       <a:r>
                         <a:t>70.7</a:t>
@@ -6916,7 +6892,7 @@
                     <a:lstStyle/>
                     <a:p>
                       <a:pPr>
-                        <a:defRPr sz="850" b="1">
+                        <a:defRPr sz="1100" b="1">
                           <a:solidFill>
                             <a:srgbClr val="166534"/>
                           </a:solidFill>
@@ -6934,14 +6910,14 @@
                   </a:tcPr>
                 </a:tc>
               </a:tr>
-              <a:tr h="216000">
-                <a:tc>
-                  <a:txBody>
-                    <a:bodyPr/>
-                    <a:lstStyle/>
-                    <a:p>
-                      <a:pPr>
-                        <a:defRPr sz="850" b="0"/>
+              <a:tr h="360000">
+                <a:tc>
+                  <a:txBody>
+                    <a:bodyPr/>
+                    <a:lstStyle/>
+                    <a:p>
+                      <a:pPr>
+                        <a:defRPr sz="1100" b="0"/>
                       </a:pPr>
                       <a:r>
                         <a:t>extractive</a:t>
@@ -6956,7 +6932,7 @@
                     <a:lstStyle/>
                     <a:p>
                       <a:pPr>
-                        <a:defRPr sz="850" b="0"/>
+                        <a:defRPr sz="1100" b="0"/>
                       </a:pPr>
                       <a:r>
                         <a:t>54.3</a:t>
@@ -6971,7 +6947,7 @@
                     <a:lstStyle/>
                     <a:p>
                       <a:pPr>
-                        <a:defRPr sz="850" b="0"/>
+                        <a:defRPr sz="1100" b="0"/>
                       </a:pPr>
                       <a:r>
                         <a:t>77.4</a:t>
@@ -6986,7 +6962,7 @@
                     <a:lstStyle/>
                     <a:p>
                       <a:pPr>
-                        <a:defRPr sz="850" b="1">
+                        <a:defRPr sz="1100" b="1">
                           <a:solidFill>
                             <a:srgbClr val="166534"/>
                           </a:solidFill>
@@ -7009,7 +6985,7 @@
                     <a:lstStyle/>
                     <a:p>
                       <a:pPr>
-                        <a:defRPr sz="850" b="0"/>
+                        <a:defRPr sz="1100" b="0"/>
                       </a:pPr>
                       <a:r>
                         <a:t>82.6</a:t>
@@ -7019,14 +6995,14 @@
                   <a:tcPr/>
                 </a:tc>
               </a:tr>
-              <a:tr h="216000">
-                <a:tc>
-                  <a:txBody>
-                    <a:bodyPr/>
-                    <a:lstStyle/>
-                    <a:p>
-                      <a:pPr>
-                        <a:defRPr sz="850" b="0"/>
+              <a:tr h="360000">
+                <a:tc>
+                  <a:txBody>
+                    <a:bodyPr/>
+                    <a:lstStyle/>
+                    <a:p>
+                      <a:pPr>
+                        <a:defRPr sz="1100" b="0"/>
                       </a:pPr>
                       <a:r>
                         <a:t>multi-hop</a:t>
@@ -7041,7 +7017,7 @@
                     <a:lstStyle/>
                     <a:p>
                       <a:pPr>
-                        <a:defRPr sz="850" b="0"/>
+                        <a:defRPr sz="1100" b="0"/>
                       </a:pPr>
                       <a:r>
                         <a:t>68.6</a:t>
@@ -7056,7 +7032,7 @@
                     <a:lstStyle/>
                     <a:p>
                       <a:pPr>
-                        <a:defRPr sz="850" b="0"/>
+                        <a:defRPr sz="1100" b="0"/>
                       </a:pPr>
                       <a:r>
                         <a:t>84.7</a:t>
@@ -7071,7 +7047,7 @@
                     <a:lstStyle/>
                     <a:p>
                       <a:pPr>
-                        <a:defRPr sz="850" b="0"/>
+                        <a:defRPr sz="1100" b="0"/>
                       </a:pPr>
                       <a:r>
                         <a:t>84.7</a:t>
@@ -7086,7 +7062,7 @@
                     <a:lstStyle/>
                     <a:p>
                       <a:pPr>
-                        <a:defRPr sz="850" b="1">
+                        <a:defRPr sz="1100" b="1">
                           <a:solidFill>
                             <a:srgbClr val="166534"/>
                           </a:solidFill>
@@ -7104,14 +7080,14 @@
                   </a:tcPr>
                 </a:tc>
               </a:tr>
-              <a:tr h="216000">
-                <a:tc>
-                  <a:txBody>
-                    <a:bodyPr/>
-                    <a:lstStyle/>
-                    <a:p>
-                      <a:pPr>
-                        <a:defRPr sz="850" b="0"/>
+              <a:tr h="360000">
+                <a:tc>
+                  <a:txBody>
+                    <a:bodyPr/>
+                    <a:lstStyle/>
+                    <a:p>
+                      <a:pPr>
+                        <a:defRPr sz="1100" b="0"/>
                       </a:pPr>
                       <a:r>
                         <a:t>enumerative</a:t>
@@ -7126,7 +7102,7 @@
                     <a:lstStyle/>
                     <a:p>
                       <a:pPr>
-                        <a:defRPr sz="850" b="0"/>
+                        <a:defRPr sz="1100" b="0"/>
                       </a:pPr>
                       <a:r>
                         <a:t>60.3</a:t>
@@ -7141,7 +7117,7 @@
                     <a:lstStyle/>
                     <a:p>
                       <a:pPr>
-                        <a:defRPr sz="850" b="0"/>
+                        <a:defRPr sz="1100" b="0"/>
                       </a:pPr>
                       <a:r>
                         <a:t>75.8</a:t>
@@ -7156,7 +7132,7 @@
                     <a:lstStyle/>
                     <a:p>
                       <a:pPr>
-                        <a:defRPr sz="850" b="1">
+                        <a:defRPr sz="1100" b="1">
                           <a:solidFill>
                             <a:srgbClr val="166534"/>
                           </a:solidFill>
@@ -7179,7 +7155,7 @@
                     <a:lstStyle/>
                     <a:p>
                       <a:pPr>
-                        <a:defRPr sz="850" b="0"/>
+                        <a:defRPr sz="1100" b="0"/>
                       </a:pPr>
                       <a:r>
                         <a:t>80.9</a:t>
@@ -7189,14 +7165,14 @@
                   <a:tcPr/>
                 </a:tc>
               </a:tr>
-              <a:tr h="216000">
-                <a:tc>
-                  <a:txBody>
-                    <a:bodyPr/>
-                    <a:lstStyle/>
-                    <a:p>
-                      <a:pPr>
-                        <a:defRPr sz="850" b="0"/>
+              <a:tr h="360000">
+                <a:tc>
+                  <a:txBody>
+                    <a:bodyPr/>
+                    <a:lstStyle/>
+                    <a:p>
+                      <a:pPr>
+                        <a:defRPr sz="1100" b="0"/>
                       </a:pPr>
                       <a:r>
                         <a:t>boolean</a:t>
@@ -7211,7 +7187,7 @@
                     <a:lstStyle/>
                     <a:p>
                       <a:pPr>
-                        <a:defRPr sz="850" b="0"/>
+                        <a:defRPr sz="1100" b="0"/>
                       </a:pPr>
                       <a:r>
                         <a:t>72.1</a:t>
@@ -7226,7 +7202,7 @@
                     <a:lstStyle/>
                     <a:p>
                       <a:pPr>
-                        <a:defRPr sz="850" b="0"/>
+                        <a:defRPr sz="1100" b="0"/>
                       </a:pPr>
                       <a:r>
                         <a:t>85.0</a:t>
@@ -7241,7 +7217,7 @@
                     <a:lstStyle/>
                     <a:p>
                       <a:pPr>
-                        <a:defRPr sz="850" b="1">
+                        <a:defRPr sz="1100" b="1">
                           <a:solidFill>
                             <a:srgbClr val="166534"/>
                           </a:solidFill>
@@ -7264,7 +7240,7 @@
                     <a:lstStyle/>
                     <a:p>
                       <a:pPr>
-                        <a:defRPr sz="850" b="1">
+                        <a:defRPr sz="1100" b="1">
                           <a:solidFill>
                             <a:srgbClr val="991B1B"/>
                           </a:solidFill>
@@ -7282,14 +7258,14 @@
                   </a:tcPr>
                 </a:tc>
               </a:tr>
-              <a:tr h="216000">
-                <a:tc>
-                  <a:txBody>
-                    <a:bodyPr/>
-                    <a:lstStyle/>
-                    <a:p>
-                      <a:pPr>
-                        <a:defRPr sz="850" b="0"/>
+              <a:tr h="360000">
+                <a:tc>
+                  <a:txBody>
+                    <a:bodyPr/>
+                    <a:lstStyle/>
+                    <a:p>
+                      <a:pPr>
+                        <a:defRPr sz="1100" b="0"/>
                       </a:pPr>
                       <a:r>
                         <a:t>compare-contrast</a:t>
@@ -7304,7 +7280,7 @@
                     <a:lstStyle/>
                     <a:p>
                       <a:pPr>
-                        <a:defRPr sz="850" b="0"/>
+                        <a:defRPr sz="1100" b="0"/>
                       </a:pPr>
                       <a:r>
                         <a:t>71.9</a:t>
@@ -7319,7 +7295,7 @@
                     <a:lstStyle/>
                     <a:p>
                       <a:pPr>
-                        <a:defRPr sz="850" b="0"/>
+                        <a:defRPr sz="1100" b="0"/>
                       </a:pPr>
                       <a:r>
                         <a:t>80.8</a:t>
@@ -7334,7 +7310,7 @@
                     <a:lstStyle/>
                     <a:p>
                       <a:pPr>
-                        <a:defRPr sz="850" b="0"/>
+                        <a:defRPr sz="1100" b="0"/>
                       </a:pPr>
                       <a:r>
                         <a:t>84.6</a:t>
@@ -7349,7 +7325,7 @@
                     <a:lstStyle/>
                     <a:p>
                       <a:pPr>
-                        <a:defRPr sz="850" b="1">
+                        <a:defRPr sz="1100" b="1">
                           <a:solidFill>
                             <a:srgbClr val="166534"/>
                           </a:solidFill>
@@ -7367,14 +7343,14 @@
                   </a:tcPr>
                 </a:tc>
               </a:tr>
-              <a:tr h="216000">
-                <a:tc>
-                  <a:txBody>
-                    <a:bodyPr/>
-                    <a:lstStyle/>
-                    <a:p>
-                      <a:pPr>
-                        <a:defRPr sz="850" b="1"/>
+              <a:tr h="360000">
+                <a:tc>
+                  <a:txBody>
+                    <a:bodyPr/>
+                    <a:lstStyle/>
+                    <a:p>
+                      <a:pPr>
+                        <a:defRPr sz="1100" b="1"/>
                       </a:pPr>
                       <a:r>
                         <a:t>open-ended</a:t>
@@ -7389,7 +7365,7 @@
                     <a:lstStyle/>
                     <a:p>
                       <a:pPr>
-                        <a:defRPr sz="850" b="0"/>
+                        <a:defRPr sz="1100" b="0"/>
                       </a:pPr>
                       <a:r>
                         <a:t>82.8</a:t>
@@ -7404,7 +7380,7 @@
                     <a:lstStyle/>
                     <a:p>
                       <a:pPr>
-                        <a:defRPr sz="850" b="0"/>
+                        <a:defRPr sz="1100" b="0"/>
                       </a:pPr>
                       <a:r>
                         <a:t>82.6</a:t>
@@ -7419,7 +7395,7 @@
                     <a:lstStyle/>
                     <a:p>
                       <a:pPr>
-                        <a:defRPr sz="850" b="1">
+                        <a:defRPr sz="1100" b="1">
                           <a:solidFill>
                             <a:srgbClr val="166534"/>
                           </a:solidFill>
@@ -7442,7 +7418,7 @@
                     <a:lstStyle/>
                     <a:p>
                       <a:pPr>
-                        <a:defRPr sz="850" b="0"/>
+                        <a:defRPr sz="1100" b="0"/>
                       </a:pPr>
                       <a:r>
                         <a:t>91.5</a:t>
@@ -7458,14 +7434,14 @@
       </p:graphicFrame>
       <p:sp>
         <p:nvSpPr>
-          <p:cNvPr id="68" name="Rectangle 67"/>
+          <p:cNvPr id="67" name="Rectangle 66"/>
           <p:cNvSpPr/>
           <p:nvPr/>
         </p:nvSpPr>
         <p:spPr>
           <a:xfrm>
-            <a:off x="32085000" y="3168000"/>
-            <a:ext cx="9927000" cy="396000"/>
+            <a:off x="32085000" y="3276000"/>
+            <a:ext cx="9927000" cy="504000"/>
           </a:xfrm>
           <a:prstGeom prst="rect">
             <a:avLst/>
@@ -7499,14 +7475,14 @@
       </p:sp>
       <p:sp>
         <p:nvSpPr>
-          <p:cNvPr id="69" name="TextBox 68"/>
+          <p:cNvPr id="68" name="TextBox 67"/>
           <p:cNvSpPr txBox="1"/>
           <p:nvPr/>
         </p:nvSpPr>
         <p:spPr>
           <a:xfrm>
-            <a:off x="32193000" y="3204000"/>
-            <a:ext cx="9783000" cy="396000"/>
+            <a:off x="32193000" y="3330000"/>
+            <a:ext cx="9783000" cy="504000"/>
           </a:xfrm>
           <a:prstGeom prst="rect">
             <a:avLst/>
@@ -7520,26 +7496,26 @@
           <a:lstStyle/>
           <a:p>
             <a:r>
-              <a:rPr sz="1500" b="1" i="0">
+              <a:rPr sz="1900" b="1" i="0">
                 <a:solidFill>
                   <a:srgbClr val="FFFFFF"/>
                 </a:solidFill>
               </a:rPr>
-              <a:t>Does image retrieval help?</a:t>
-            </a:r>
-          </a:p>
-        </p:txBody>
-      </p:sp>
-      <p:sp>
-        <p:nvSpPr>
-          <p:cNvPr id="70" name="Rectangle 69"/>
+              <a:t>Takeaways</a:t>
+            </a:r>
+          </a:p>
+        </p:txBody>
+      </p:sp>
+      <p:sp>
+        <p:nvSpPr>
+          <p:cNvPr id="69" name="Rectangle 68"/>
           <p:cNvSpPr/>
           <p:nvPr/>
         </p:nvSpPr>
         <p:spPr>
           <a:xfrm>
-            <a:off x="32085000" y="3672000"/>
-            <a:ext cx="9927000" cy="360000"/>
+            <a:off x="32085000" y="3924000"/>
+            <a:ext cx="9927000" cy="864000"/>
           </a:xfrm>
           <a:prstGeom prst="rect">
             <a:avLst/>
@@ -7573,14 +7549,14 @@
       </p:sp>
       <p:sp>
         <p:nvSpPr>
-          <p:cNvPr id="71" name="Rectangle 70"/>
+          <p:cNvPr id="70" name="Rectangle 69"/>
           <p:cNvSpPr/>
           <p:nvPr/>
         </p:nvSpPr>
         <p:spPr>
           <a:xfrm>
-            <a:off x="32085000" y="3672000"/>
-            <a:ext cx="72000" cy="360000"/>
+            <a:off x="32085000" y="3924000"/>
+            <a:ext cx="90000" cy="864000"/>
           </a:xfrm>
           <a:prstGeom prst="rect">
             <a:avLst/>
@@ -7614,14 +7590,14 @@
       </p:sp>
       <p:sp>
         <p:nvSpPr>
-          <p:cNvPr id="72" name="TextBox 71"/>
+          <p:cNvPr id="71" name="TextBox 70"/>
           <p:cNvSpPr txBox="1"/>
           <p:nvPr/>
         </p:nvSpPr>
         <p:spPr>
           <a:xfrm>
-            <a:off x="32229000" y="3744000"/>
-            <a:ext cx="9711000" cy="216000"/>
+            <a:off x="32265000" y="4032000"/>
+            <a:ext cx="9675000" cy="684000"/>
           </a:xfrm>
           <a:prstGeom prst="rect">
             <a:avLst/>
@@ -7635,32 +7611,326 @@
           <a:lstStyle/>
           <a:p>
             <a:r>
-              <a:rPr sz="1000" b="0" i="0">
+              <a:rPr sz="1200" b="0" i="0">
                 <a:solidFill>
                   <a:srgbClr val="1D1D1D"/>
                 </a:solidFill>
               </a:rPr>
-              <a:t>Sometimes. It depends on the query.</a:t>
-            </a:r>
-          </a:p>
-        </p:txBody>
-      </p:sp>
-      <p:sp>
-        <p:nvSpPr>
-          <p:cNvPr id="73" name="Rectangle 72"/>
+              <a:t>Image retrieval is query-type conditional. Overall, hybrid and text-only are tied at 86.6% pass@1.</a:t>
+            </a:r>
+          </a:p>
+        </p:txBody>
+      </p:sp>
+      <p:sp>
+        <p:nvSpPr>
+          <p:cNvPr id="72" name="TextBox 71"/>
+          <p:cNvSpPr txBox="1"/>
+          <p:nvPr/>
+        </p:nvSpPr>
+        <p:spPr>
+          <a:xfrm>
+            <a:off x="32157000" y="4932000"/>
+            <a:ext cx="9855000" cy="491040"/>
+          </a:xfrm>
+          <a:prstGeom prst="rect">
+            <a:avLst/>
+          </a:prstGeom>
+          <a:noFill/>
+        </p:spPr>
+        <p:txBody>
+          <a:bodyPr wrap="square">
+            <a:spAutoFit/>
+          </a:bodyPr>
+          <a:lstStyle/>
+          <a:p>
+            <a:r>
+              <a:rPr sz="1200" b="0" i="0">
+                <a:solidFill>
+                  <a:srgbClr val="C97B2C"/>
+                </a:solidFill>
+              </a:rPr>
+              <a:t>• </a:t>
+            </a:r>
+            <a:r>
+              <a:rPr sz="1200" b="1" i="0">
+                <a:solidFill>
+                  <a:srgbClr val="1D1D1D"/>
+                </a:solidFill>
+              </a:rPr>
+              <a:t>Multi-hop: </a:t>
+            </a:r>
+            <a:r>
+              <a:rPr sz="1200" b="0" i="0">
+                <a:solidFill>
+                  <a:srgbClr val="1D1D1D"/>
+                </a:solidFill>
+              </a:rPr>
+              <a:t>+6.8 pts over text: two streams retrieve different pages, giving the generator broader coverage.</a:t>
+            </a:r>
+          </a:p>
+        </p:txBody>
+      </p:sp>
+      <p:sp>
+        <p:nvSpPr>
+          <p:cNvPr id="73" name="TextBox 72"/>
+          <p:cNvSpPr txBox="1"/>
+          <p:nvPr/>
+        </p:nvSpPr>
+        <p:spPr>
+          <a:xfrm>
+            <a:off x="32157000" y="5351040"/>
+            <a:ext cx="9855000" cy="491040"/>
+          </a:xfrm>
+          <a:prstGeom prst="rect">
+            <a:avLst/>
+          </a:prstGeom>
+          <a:noFill/>
+        </p:spPr>
+        <p:txBody>
+          <a:bodyPr wrap="square">
+            <a:spAutoFit/>
+          </a:bodyPr>
+          <a:lstStyle/>
+          <a:p>
+            <a:r>
+              <a:rPr sz="1200" b="0" i="0">
+                <a:solidFill>
+                  <a:srgbClr val="C97B2C"/>
+                </a:solidFill>
+              </a:rPr>
+              <a:t>• </a:t>
+            </a:r>
+            <a:r>
+              <a:rPr sz="1200" b="1" i="0">
+                <a:solidFill>
+                  <a:srgbClr val="1D1D1D"/>
+                </a:solidFill>
+              </a:rPr>
+              <a:t>Numerical: </a:t>
+            </a:r>
+            <a:r>
+              <a:rPr sz="1200" b="0" i="0">
+                <a:solidFill>
+                  <a:srgbClr val="1D1D1D"/>
+                </a:solidFill>
+              </a:rPr>
+              <a:t>+3.4 pts: visual table layout preserves row/column structure that OCR partly loses.</a:t>
+            </a:r>
+          </a:p>
+        </p:txBody>
+      </p:sp>
+      <p:sp>
+        <p:nvSpPr>
+          <p:cNvPr id="74" name="TextBox 73"/>
+          <p:cNvSpPr txBox="1"/>
+          <p:nvPr/>
+        </p:nvSpPr>
+        <p:spPr>
+          <a:xfrm>
+            <a:off x="32157000" y="5770080"/>
+            <a:ext cx="9855000" cy="491040"/>
+          </a:xfrm>
+          <a:prstGeom prst="rect">
+            <a:avLst/>
+          </a:prstGeom>
+          <a:noFill/>
+        </p:spPr>
+        <p:txBody>
+          <a:bodyPr wrap="square">
+            <a:spAutoFit/>
+          </a:bodyPr>
+          <a:lstStyle/>
+          <a:p>
+            <a:r>
+              <a:rPr sz="1200" b="0" i="0">
+                <a:solidFill>
+                  <a:srgbClr val="C97B2C"/>
+                </a:solidFill>
+              </a:rPr>
+              <a:t>• </a:t>
+            </a:r>
+            <a:r>
+              <a:rPr sz="1200" b="1" i="0">
+                <a:solidFill>
+                  <a:srgbClr val="1D1D1D"/>
+                </a:solidFill>
+              </a:rPr>
+              <a:t>Boolean: </a:t>
+            </a:r>
+            <a:r>
+              <a:rPr sz="1200" b="0" i="0">
+                <a:solidFill>
+                  <a:srgbClr val="1D1D1D"/>
+                </a:solidFill>
+              </a:rPr>
+              <a:t>-5.4 pts: text already retrieves the fact; extra image pages dilute the prompt.</a:t>
+            </a:r>
+          </a:p>
+        </p:txBody>
+      </p:sp>
+      <p:sp>
+        <p:nvSpPr>
+          <p:cNvPr id="75" name="TextBox 74"/>
+          <p:cNvSpPr txBox="1"/>
+          <p:nvPr/>
+        </p:nvSpPr>
+        <p:spPr>
+          <a:xfrm>
+            <a:off x="32157000" y="6189120"/>
+            <a:ext cx="9855000" cy="491040"/>
+          </a:xfrm>
+          <a:prstGeom prst="rect">
+            <a:avLst/>
+          </a:prstGeom>
+          <a:noFill/>
+        </p:spPr>
+        <p:txBody>
+          <a:bodyPr wrap="square">
+            <a:spAutoFit/>
+          </a:bodyPr>
+          <a:lstStyle/>
+          <a:p>
+            <a:r>
+              <a:rPr sz="1200" b="0" i="0">
+                <a:solidFill>
+                  <a:srgbClr val="C97B2C"/>
+                </a:solidFill>
+              </a:rPr>
+              <a:t>• </a:t>
+            </a:r>
+            <a:r>
+              <a:rPr sz="1200" b="1" i="0">
+                <a:solidFill>
+                  <a:srgbClr val="1D1D1D"/>
+                </a:solidFill>
+              </a:rPr>
+              <a:t>Strong text baseline: </a:t>
+            </a:r>
+            <a:r>
+              <a:rPr sz="1200" b="0" i="0">
+                <a:solidFill>
+                  <a:srgbClr val="1D1D1D"/>
+                </a:solidFill>
+              </a:rPr>
+              <a:t>DeepSeek + Jina + zerank-2 matches hybrid at half the retrieval cost (5 vs 10 pages).</a:t>
+            </a:r>
+          </a:p>
+        </p:txBody>
+      </p:sp>
+      <p:sp>
+        <p:nvSpPr>
+          <p:cNvPr id="76" name="TextBox 75"/>
+          <p:cNvSpPr txBox="1"/>
+          <p:nvPr/>
+        </p:nvSpPr>
+        <p:spPr>
+          <a:xfrm>
+            <a:off x="32157000" y="6608160"/>
+            <a:ext cx="9855000" cy="491040"/>
+          </a:xfrm>
+          <a:prstGeom prst="rect">
+            <a:avLst/>
+          </a:prstGeom>
+          <a:noFill/>
+        </p:spPr>
+        <p:txBody>
+          <a:bodyPr wrap="square">
+            <a:spAutoFit/>
+          </a:bodyPr>
+          <a:lstStyle/>
+          <a:p>
+            <a:r>
+              <a:rPr sz="1200" b="0" i="0">
+                <a:solidFill>
+                  <a:srgbClr val="C97B2C"/>
+                </a:solidFill>
+              </a:rPr>
+              <a:t>• </a:t>
+            </a:r>
+            <a:r>
+              <a:rPr sz="1200" b="1" i="0">
+                <a:solidFill>
+                  <a:srgbClr val="1D1D1D"/>
+                </a:solidFill>
+              </a:rPr>
+              <a:t>Retrieval value: </a:t>
+            </a:r>
+            <a:r>
+              <a:rPr sz="1200" b="0" i="0">
+                <a:solidFill>
+                  <a:srgbClr val="1D1D1D"/>
+                </a:solidFill>
+              </a:rPr>
+              <a:t>+37.7 pts on numerical, +28.3 on extractive, only +8.7 on open-ended over closed-book.</a:t>
+            </a:r>
+          </a:p>
+        </p:txBody>
+      </p:sp>
+      <p:sp>
+        <p:nvSpPr>
+          <p:cNvPr id="77" name="TextBox 76"/>
+          <p:cNvSpPr txBox="1"/>
+          <p:nvPr/>
+        </p:nvSpPr>
+        <p:spPr>
+          <a:xfrm>
+            <a:off x="32157000" y="7027200"/>
+            <a:ext cx="9855000" cy="491040"/>
+          </a:xfrm>
+          <a:prstGeom prst="rect">
+            <a:avLst/>
+          </a:prstGeom>
+          <a:noFill/>
+        </p:spPr>
+        <p:txBody>
+          <a:bodyPr wrap="square">
+            <a:spAutoFit/>
+          </a:bodyPr>
+          <a:lstStyle/>
+          <a:p>
+            <a:r>
+              <a:rPr sz="1200" b="0" i="0">
+                <a:solidFill>
+                  <a:srgbClr val="C97B2C"/>
+                </a:solidFill>
+              </a:rPr>
+              <a:t>• </a:t>
+            </a:r>
+            <a:r>
+              <a:rPr sz="1200" b="1" i="0">
+                <a:solidFill>
+                  <a:srgbClr val="1D1D1D"/>
+                </a:solidFill>
+              </a:rPr>
+              <a:t>Generator bottleneck: </a:t>
+            </a:r>
+            <a:r>
+              <a:rPr sz="1200" b="0" i="0">
+                <a:solidFill>
+                  <a:srgbClr val="1D1D1D"/>
+                </a:solidFill>
+              </a:rPr>
+              <a:t>ViDoRe v3 reports +2.6 pts with Gemini 3 Pro. Our null result is likely generator-limited.</a:t>
+            </a:r>
+          </a:p>
+        </p:txBody>
+      </p:sp>
+      <p:sp>
+        <p:nvSpPr>
+          <p:cNvPr id="78" name="Rectangle 77"/>
           <p:cNvSpPr/>
           <p:nvPr/>
         </p:nvSpPr>
         <p:spPr>
           <a:xfrm>
-            <a:off x="32085000" y="4176000"/>
-            <a:ext cx="54000" cy="252000"/>
+            <a:off x="32085000" y="7518240"/>
+            <a:ext cx="9927000" cy="504000"/>
           </a:xfrm>
           <a:prstGeom prst="rect">
             <a:avLst/>
           </a:prstGeom>
           <a:solidFill>
-            <a:srgbClr val="C97B2C"/>
+            <a:srgbClr val="1B3A6B"/>
           </a:solidFill>
           <a:ln/>
         </p:spPr>
@@ -7688,14 +7958,14 @@
       </p:sp>
       <p:sp>
         <p:nvSpPr>
-          <p:cNvPr id="74" name="TextBox 73"/>
+          <p:cNvPr id="79" name="TextBox 78"/>
           <p:cNvSpPr txBox="1"/>
           <p:nvPr/>
         </p:nvSpPr>
         <p:spPr>
           <a:xfrm>
-            <a:off x="32229000" y="4140000"/>
-            <a:ext cx="9783000" cy="324000"/>
+            <a:off x="32193000" y="7572240"/>
+            <a:ext cx="9783000" cy="504000"/>
           </a:xfrm>
           <a:prstGeom prst="rect">
             <a:avLst/>
@@ -7709,124 +7979,26 @@
           <a:lstStyle/>
           <a:p>
             <a:r>
-              <a:rPr sz="1200" b="1" i="0">
-                <a:solidFill>
-                  <a:srgbClr val="1B3A6B"/>
-                </a:solidFill>
-              </a:rPr>
-              <a:t>When images help</a:t>
-            </a:r>
-          </a:p>
-        </p:txBody>
-      </p:sp>
-      <p:sp>
-        <p:nvSpPr>
-          <p:cNvPr id="75" name="TextBox 74"/>
-          <p:cNvSpPr txBox="1"/>
-          <p:nvPr/>
-        </p:nvSpPr>
-        <p:spPr>
-          <a:xfrm>
-            <a:off x="32157000" y="4500000"/>
-            <a:ext cx="9855000" cy="342000"/>
-          </a:xfrm>
-          <a:prstGeom prst="rect">
-            <a:avLst/>
-          </a:prstGeom>
-          <a:noFill/>
-        </p:spPr>
-        <p:txBody>
-          <a:bodyPr wrap="square">
-            <a:spAutoFit/>
-          </a:bodyPr>
-          <a:lstStyle/>
-          <a:p>
-            <a:r>
-              <a:rPr sz="1000" b="0" i="0">
-                <a:solidFill>
-                  <a:srgbClr val="C97B2C"/>
-                </a:solidFill>
-              </a:rPr>
-              <a:t>• </a:t>
-            </a:r>
-            <a:r>
-              <a:rPr sz="1000" b="1" i="0">
-                <a:solidFill>
-                  <a:srgbClr val="1D1D1D"/>
-                </a:solidFill>
-              </a:rPr>
-              <a:t>Multi-hop: </a:t>
-            </a:r>
-            <a:r>
-              <a:rPr sz="1000" b="0" i="0">
-                <a:solidFill>
-                  <a:srgbClr val="1D1D1D"/>
-                </a:solidFill>
-              </a:rPr>
-              <a:t>+6.8 pts over text: two streams retrieve different pages, giving the generator broader coverage.</a:t>
-            </a:r>
-          </a:p>
-        </p:txBody>
-      </p:sp>
-      <p:sp>
-        <p:nvSpPr>
-          <p:cNvPr id="76" name="TextBox 75"/>
-          <p:cNvSpPr txBox="1"/>
-          <p:nvPr/>
-        </p:nvSpPr>
-        <p:spPr>
-          <a:xfrm>
-            <a:off x="32157000" y="4770000"/>
-            <a:ext cx="9855000" cy="342000"/>
-          </a:xfrm>
-          <a:prstGeom prst="rect">
-            <a:avLst/>
-          </a:prstGeom>
-          <a:noFill/>
-        </p:spPr>
-        <p:txBody>
-          <a:bodyPr wrap="square">
-            <a:spAutoFit/>
-          </a:bodyPr>
-          <a:lstStyle/>
-          <a:p>
-            <a:r>
-              <a:rPr sz="1000" b="0" i="0">
-                <a:solidFill>
-                  <a:srgbClr val="C97B2C"/>
-                </a:solidFill>
-              </a:rPr>
-              <a:t>• </a:t>
-            </a:r>
-            <a:r>
-              <a:rPr sz="1000" b="1" i="0">
-                <a:solidFill>
-                  <a:srgbClr val="1D1D1D"/>
-                </a:solidFill>
-              </a:rPr>
-              <a:t>Numerical: </a:t>
-            </a:r>
-            <a:r>
-              <a:rPr sz="1000" b="0" i="0">
-                <a:solidFill>
-                  <a:srgbClr val="1D1D1D"/>
-                </a:solidFill>
-              </a:rPr>
-              <a:t>+3.4 pts: visual table layout preserves row/column structure that OCR partly loses.</a:t>
-            </a:r>
-          </a:p>
-        </p:txBody>
-      </p:sp>
-      <p:sp>
-        <p:nvSpPr>
-          <p:cNvPr id="77" name="Rectangle 76"/>
+              <a:rPr sz="1900" b="1" i="0">
+                <a:solidFill>
+                  <a:srgbClr val="FFFFFF"/>
+                </a:solidFill>
+              </a:rPr>
+              <a:t>Limitations</a:t>
+            </a:r>
+          </a:p>
+        </p:txBody>
+      </p:sp>
+      <p:sp>
+        <p:nvSpPr>
+          <p:cNvPr id="80" name="Rectangle 79"/>
           <p:cNvSpPr/>
           <p:nvPr/>
         </p:nvSpPr>
         <p:spPr>
           <a:xfrm>
-            <a:off x="32085000" y="5112000"/>
-            <a:ext cx="54000" cy="252000"/>
+            <a:off x="32085000" y="8220240"/>
+            <a:ext cx="72000" cy="324000"/>
           </a:xfrm>
           <a:prstGeom prst="rect">
             <a:avLst/>
@@ -7860,14 +8032,14 @@
       </p:sp>
       <p:sp>
         <p:nvSpPr>
-          <p:cNvPr id="78" name="TextBox 77"/>
+          <p:cNvPr id="81" name="TextBox 80"/>
           <p:cNvSpPr txBox="1"/>
           <p:nvPr/>
         </p:nvSpPr>
         <p:spPr>
           <a:xfrm>
-            <a:off x="32229000" y="5076000"/>
-            <a:ext cx="9783000" cy="324000"/>
+            <a:off x="32265000" y="8166240"/>
+            <a:ext cx="9747000" cy="432000"/>
           </a:xfrm>
           <a:prstGeom prst="rect">
             <a:avLst/>
@@ -7881,26 +8053,26 @@
           <a:lstStyle/>
           <a:p>
             <a:r>
-              <a:rPr sz="1200" b="1" i="0">
+              <a:rPr sz="1500" b="1" i="0">
                 <a:solidFill>
                   <a:srgbClr val="1B3A6B"/>
                 </a:solidFill>
               </a:rPr>
-              <a:t>When images don't help (or hurt)</a:t>
-            </a:r>
-          </a:p>
-        </p:txBody>
-      </p:sp>
-      <p:sp>
-        <p:nvSpPr>
-          <p:cNvPr id="79" name="TextBox 78"/>
+              <a:t>LLM choices</a:t>
+            </a:r>
+          </a:p>
+        </p:txBody>
+      </p:sp>
+      <p:sp>
+        <p:nvSpPr>
+          <p:cNvPr id="82" name="TextBox 81"/>
           <p:cNvSpPr txBox="1"/>
           <p:nvPr/>
         </p:nvSpPr>
         <p:spPr>
           <a:xfrm>
-            <a:off x="32157000" y="5436000"/>
-            <a:ext cx="9855000" cy="342000"/>
+            <a:off x="32157000" y="8634240"/>
+            <a:ext cx="9855000" cy="491040"/>
           </a:xfrm>
           <a:prstGeom prst="rect">
             <a:avLst/>
@@ -7914,7 +8086,7 @@
           <a:lstStyle/>
           <a:p>
             <a:r>
-              <a:rPr sz="1000" b="0" i="0">
+              <a:rPr sz="1200" b="0" i="0">
                 <a:solidFill>
                   <a:srgbClr val="C97B2C"/>
                 </a:solidFill>
@@ -7922,34 +8094,34 @@
               <a:t>• </a:t>
             </a:r>
             <a:r>
-              <a:rPr sz="1000" b="1" i="0">
+              <a:rPr sz="1200" b="1" i="0">
                 <a:solidFill>
                   <a:srgbClr val="1D1D1D"/>
                 </a:solidFill>
               </a:rPr>
-              <a:t>Boolean: </a:t>
-            </a:r>
-            <a:r>
-              <a:rPr sz="1000" b="0" i="0">
+              <a:t>Generator qwen3.5:35b: </a:t>
+            </a:r>
+            <a:r>
+              <a:rPr sz="1200" b="0" i="0">
                 <a:solidFill>
                   <a:srgbClr val="1D1D1D"/>
                 </a:solidFill>
               </a:rPr>
-              <a:t>-5.4 pts: text already retrieves the fact; extra image pages dilute the prompt.</a:t>
-            </a:r>
-          </a:p>
-        </p:txBody>
-      </p:sp>
-      <p:sp>
-        <p:nvSpPr>
-          <p:cNvPr id="80" name="TextBox 79"/>
+              <a:t>vision stack weaker than frontier closed models (Gemini 3 Pro, GPT-5.2).</a:t>
+            </a:r>
+          </a:p>
+        </p:txBody>
+      </p:sp>
+      <p:sp>
+        <p:nvSpPr>
+          <p:cNvPr id="83" name="TextBox 82"/>
           <p:cNvSpPr txBox="1"/>
           <p:nvPr/>
         </p:nvSpPr>
         <p:spPr>
           <a:xfrm>
-            <a:off x="32157000" y="5706000"/>
-            <a:ext cx="9855000" cy="342000"/>
+            <a:off x="32157000" y="9053280"/>
+            <a:ext cx="9855000" cy="491040"/>
           </a:xfrm>
           <a:prstGeom prst="rect">
             <a:avLst/>
@@ -7963,7 +8135,7 @@
           <a:lstStyle/>
           <a:p>
             <a:r>
-              <a:rPr sz="1000" b="0" i="0">
+              <a:rPr sz="1200" b="0" i="0">
                 <a:solidFill>
                   <a:srgbClr val="C97B2C"/>
                 </a:solidFill>
@@ -7971,40 +8143,40 @@
               <a:t>• </a:t>
             </a:r>
             <a:r>
-              <a:rPr sz="1000" b="1" i="0">
+              <a:rPr sz="1200" b="1" i="0">
                 <a:solidFill>
                   <a:srgbClr val="1D1D1D"/>
                 </a:solidFill>
               </a:rPr>
-              <a:t>Extractive / open-ended: </a:t>
-            </a:r>
-            <a:r>
-              <a:rPr sz="1000" b="0" i="0">
+              <a:t>Judge llama3.1:8b: </a:t>
+            </a:r>
+            <a:r>
+              <a:rPr sz="1200" b="0" i="0">
                 <a:solidFill>
                   <a:srgbClr val="1D1D1D"/>
                 </a:solidFill>
               </a:rPr>
-              <a:t>flat (±1 pt). The answer lives in a text span the text retriever already finds.</a:t>
-            </a:r>
-          </a:p>
-        </p:txBody>
-      </p:sp>
-      <p:sp>
-        <p:nvSpPr>
-          <p:cNvPr id="81" name="Rectangle 80"/>
+              <a:t>verbosity bias: longer answers get rewarded. Hybrid answers tend to be longer.</a:t>
+            </a:r>
+          </a:p>
+        </p:txBody>
+      </p:sp>
+      <p:sp>
+        <p:nvSpPr>
+          <p:cNvPr id="84" name="Rectangle 83"/>
           <p:cNvSpPr/>
           <p:nvPr/>
         </p:nvSpPr>
         <p:spPr>
           <a:xfrm>
-            <a:off x="32085000" y="6012000"/>
-            <a:ext cx="9927000" cy="396000"/>
+            <a:off x="32085000" y="9598320"/>
+            <a:ext cx="72000" cy="324000"/>
           </a:xfrm>
           <a:prstGeom prst="rect">
             <a:avLst/>
           </a:prstGeom>
           <a:solidFill>
-            <a:srgbClr val="1B3A6B"/>
+            <a:srgbClr val="C97B2C"/>
           </a:solidFill>
           <a:ln/>
         </p:spPr>
@@ -8032,14 +8204,14 @@
       </p:sp>
       <p:sp>
         <p:nvSpPr>
-          <p:cNvPr id="82" name="TextBox 81"/>
+          <p:cNvPr id="85" name="TextBox 84"/>
           <p:cNvSpPr txBox="1"/>
           <p:nvPr/>
         </p:nvSpPr>
         <p:spPr>
           <a:xfrm>
-            <a:off x="32193000" y="6048000"/>
-            <a:ext cx="9783000" cy="396000"/>
+            <a:off x="32265000" y="9544320"/>
+            <a:ext cx="9747000" cy="432000"/>
           </a:xfrm>
           <a:prstGeom prst="rect">
             <a:avLst/>
@@ -8055,24 +8227,24 @@
             <a:r>
               <a:rPr sz="1500" b="1" i="0">
                 <a:solidFill>
-                  <a:srgbClr val="FFFFFF"/>
-                </a:solidFill>
-              </a:rPr>
-              <a:t>Takeaways</a:t>
-            </a:r>
-          </a:p>
-        </p:txBody>
-      </p:sp>
-      <p:sp>
-        <p:nvSpPr>
-          <p:cNvPr id="83" name="TextBox 82"/>
+                  <a:srgbClr val="1B3A6B"/>
+                </a:solidFill>
+              </a:rPr>
+              <a:t>Benchmark and evaluation design</a:t>
+            </a:r>
+          </a:p>
+        </p:txBody>
+      </p:sp>
+      <p:sp>
+        <p:nvSpPr>
+          <p:cNvPr id="86" name="TextBox 85"/>
           <p:cNvSpPr txBox="1"/>
           <p:nvPr/>
         </p:nvSpPr>
         <p:spPr>
           <a:xfrm>
-            <a:off x="32157000" y="6516000"/>
-            <a:ext cx="9855000" cy="342000"/>
+            <a:off x="32157000" y="10012320"/>
+            <a:ext cx="9855000" cy="491040"/>
           </a:xfrm>
           <a:prstGeom prst="rect">
             <a:avLst/>
@@ -8086,7 +8258,7 @@
           <a:lstStyle/>
           <a:p>
             <a:r>
-              <a:rPr sz="1000" b="0" i="0">
+              <a:rPr sz="1200" b="0" i="0">
                 <a:solidFill>
                   <a:srgbClr val="C97B2C"/>
                 </a:solidFill>
@@ -8094,34 +8266,34 @@
               <a:t>• </a:t>
             </a:r>
             <a:r>
-              <a:rPr sz="1000" b="1" i="0">
+              <a:rPr sz="1200" b="1" i="0">
                 <a:solidFill>
                   <a:srgbClr val="1D1D1D"/>
                 </a:solidFill>
               </a:rPr>
-              <a:t>86.6% tie hides variation: </a:t>
-            </a:r>
-            <a:r>
-              <a:rPr sz="1000" b="0" i="0">
+              <a:t>Binary pass@1: </a:t>
+            </a:r>
+            <a:r>
+              <a:rPr sz="1200" b="0" i="0">
                 <a:solidFill>
                   <a:srgbClr val="1D1D1D"/>
                 </a:solidFill>
               </a:rPr>
-              <a:t>Hybrid wins on multi-hop (+6.8) and numerical (+3.4); text wins on boolean (+5.4).</a:t>
-            </a:r>
-          </a:p>
-        </p:txBody>
-      </p:sp>
-      <p:sp>
-        <p:nvSpPr>
-          <p:cNvPr id="84" name="TextBox 83"/>
+              <a:t>near-miss and complete miss treated identically.</a:t>
+            </a:r>
+          </a:p>
+        </p:txBody>
+      </p:sp>
+      <p:sp>
+        <p:nvSpPr>
+          <p:cNvPr id="87" name="TextBox 86"/>
           <p:cNvSpPr txBox="1"/>
           <p:nvPr/>
         </p:nvSpPr>
         <p:spPr>
           <a:xfrm>
-            <a:off x="32157000" y="6786000"/>
-            <a:ext cx="9855000" cy="342000"/>
+            <a:off x="32157000" y="10431360"/>
+            <a:ext cx="9855000" cy="491040"/>
           </a:xfrm>
           <a:prstGeom prst="rect">
             <a:avLst/>
@@ -8135,7 +8307,7 @@
           <a:lstStyle/>
           <a:p>
             <a:r>
-              <a:rPr sz="1000" b="0" i="0">
+              <a:rPr sz="1200" b="0" i="0">
                 <a:solidFill>
                   <a:srgbClr val="C97B2C"/>
                 </a:solidFill>
@@ -8143,34 +8315,34 @@
               <a:t>• </a:t>
             </a:r>
             <a:r>
-              <a:rPr sz="1000" b="1" i="0">
+              <a:rPr sz="1200" b="1" i="0">
                 <a:solidFill>
                   <a:srgbClr val="1D1D1D"/>
                 </a:solidFill>
               </a:rPr>
-              <a:t>Strong text baseline: </a:t>
-            </a:r>
-            <a:r>
-              <a:rPr sz="1000" b="0" i="0">
+              <a:t>No human spot-check: </a:t>
+            </a:r>
+            <a:r>
+              <a:rPr sz="1200" b="0" i="0">
                 <a:solidFill>
                   <a:srgbClr val="1D1D1D"/>
                 </a:solidFill>
               </a:rPr>
-              <a:t>DeepSeek + Jina + zerank-2 matches hybrid at half the retrieval cost (5 vs 10 pages).</a:t>
-            </a:r>
-          </a:p>
-        </p:txBody>
-      </p:sp>
-      <p:sp>
-        <p:nvSpPr>
-          <p:cNvPr id="85" name="TextBox 84"/>
+              <a:t>all judgments from LLM judge, no human validation.</a:t>
+            </a:r>
+          </a:p>
+        </p:txBody>
+      </p:sp>
+      <p:sp>
+        <p:nvSpPr>
+          <p:cNvPr id="88" name="TextBox 87"/>
           <p:cNvSpPr txBox="1"/>
           <p:nvPr/>
         </p:nvSpPr>
         <p:spPr>
           <a:xfrm>
-            <a:off x="32157000" y="7056000"/>
-            <a:ext cx="9855000" cy="342000"/>
+            <a:off x="32157000" y="10850400"/>
+            <a:ext cx="9855000" cy="491040"/>
           </a:xfrm>
           <a:prstGeom prst="rect">
             <a:avLst/>
@@ -8184,7 +8356,7 @@
           <a:lstStyle/>
           <a:p>
             <a:r>
-              <a:rPr sz="1000" b="0" i="0">
+              <a:rPr sz="1200" b="0" i="0">
                 <a:solidFill>
                   <a:srgbClr val="C97B2C"/>
                 </a:solidFill>
@@ -8192,34 +8364,34 @@
               <a:t>• </a:t>
             </a:r>
             <a:r>
-              <a:rPr sz="1000" b="1" i="0">
+              <a:rPr sz="1200" b="1" i="0">
                 <a:solidFill>
                   <a:srgbClr val="1D1D1D"/>
                 </a:solidFill>
               </a:rPr>
-              <a:t>Retrieval value: </a:t>
-            </a:r>
-            <a:r>
-              <a:rPr sz="1000" b="0" i="0">
+              <a:t>Fixed fusion: </a:t>
+            </a:r>
+            <a:r>
+              <a:rPr sz="1200" b="0" i="0">
                 <a:solidFill>
                   <a:srgbClr val="1D1D1D"/>
                 </a:solidFill>
               </a:rPr>
-              <a:t>+37.7 pts on numerical, +28.3 on extractive, only +8.7 on open-ended over closed-book.</a:t>
-            </a:r>
-          </a:p>
-        </p:txBody>
-      </p:sp>
-      <p:sp>
-        <p:nvSpPr>
-          <p:cNvPr id="86" name="TextBox 85"/>
+              <a:t>always top-5+top-5, no deduplication; same page can appear twice.</a:t>
+            </a:r>
+          </a:p>
+        </p:txBody>
+      </p:sp>
+      <p:sp>
+        <p:nvSpPr>
+          <p:cNvPr id="89" name="TextBox 88"/>
           <p:cNvSpPr txBox="1"/>
           <p:nvPr/>
         </p:nvSpPr>
         <p:spPr>
           <a:xfrm>
-            <a:off x="32157000" y="7326000"/>
-            <a:ext cx="9855000" cy="342000"/>
+            <a:off x="32157000" y="11269440"/>
+            <a:ext cx="9855000" cy="491040"/>
           </a:xfrm>
           <a:prstGeom prst="rect">
             <a:avLst/>
@@ -8233,7 +8405,7 @@
           <a:lstStyle/>
           <a:p>
             <a:r>
-              <a:rPr sz="1000" b="0" i="0">
+              <a:rPr sz="1200" b="0" i="0">
                 <a:solidFill>
                   <a:srgbClr val="C97B2C"/>
                 </a:solidFill>
@@ -8241,34 +8413,34 @@
               <a:t>• </a:t>
             </a:r>
             <a:r>
-              <a:rPr sz="1000" b="1" i="0">
+              <a:rPr sz="1200" b="1" i="0">
                 <a:solidFill>
                   <a:srgbClr val="1D1D1D"/>
                 </a:solidFill>
               </a:rPr>
-              <a:t>Generator bottleneck: </a:t>
-            </a:r>
-            <a:r>
-              <a:rPr sz="1000" b="0" i="0">
+              <a:t>Domain-specific: </a:t>
+            </a:r>
+            <a:r>
+              <a:rPr sz="1200" b="0" i="0">
                 <a:solidFill>
                   <a:srgbClr val="1D1D1D"/>
                 </a:solidFill>
               </a:rPr>
-              <a:t>ViDoRe v3 reports +2.6 pts with Gemini 3 Pro. Our null result reflects a weaker vision stack.</a:t>
-            </a:r>
-          </a:p>
-        </p:txBody>
-      </p:sp>
-      <p:sp>
-        <p:nvSpPr>
-          <p:cNvPr id="87" name="Rectangle 86"/>
+              <a:t>CS, finance, pharma only. May not transfer to general-purpose RAG.</a:t>
+            </a:r>
+          </a:p>
+        </p:txBody>
+      </p:sp>
+      <p:sp>
+        <p:nvSpPr>
+          <p:cNvPr id="90" name="Rectangle 89"/>
           <p:cNvSpPr/>
           <p:nvPr/>
         </p:nvSpPr>
         <p:spPr>
           <a:xfrm>
-            <a:off x="32085000" y="7632000"/>
-            <a:ext cx="9927000" cy="396000"/>
+            <a:off x="32085000" y="11760480"/>
+            <a:ext cx="9927000" cy="504000"/>
           </a:xfrm>
           <a:prstGeom prst="rect">
             <a:avLst/>
@@ -8302,14 +8474,14 @@
       </p:sp>
       <p:sp>
         <p:nvSpPr>
-          <p:cNvPr id="88" name="TextBox 87"/>
+          <p:cNvPr id="91" name="TextBox 90"/>
           <p:cNvSpPr txBox="1"/>
           <p:nvPr/>
         </p:nvSpPr>
         <p:spPr>
           <a:xfrm>
-            <a:off x="32193000" y="7668000"/>
-            <a:ext cx="9783000" cy="396000"/>
+            <a:off x="32193000" y="11814480"/>
+            <a:ext cx="9783000" cy="504000"/>
           </a:xfrm>
           <a:prstGeom prst="rect">
             <a:avLst/>
@@ -8323,32 +8495,228 @@
           <a:lstStyle/>
           <a:p>
             <a:r>
-              <a:rPr sz="1500" b="1" i="0">
+              <a:rPr sz="1900" b="1" i="0">
                 <a:solidFill>
                   <a:srgbClr val="FFFFFF"/>
                 </a:solidFill>
               </a:rPr>
-              <a:t>Limitations</a:t>
-            </a:r>
-          </a:p>
-        </p:txBody>
-      </p:sp>
-      <p:sp>
-        <p:nvSpPr>
-          <p:cNvPr id="89" name="Rectangle 88"/>
+              <a:t>Future work</a:t>
+            </a:r>
+          </a:p>
+        </p:txBody>
+      </p:sp>
+      <p:sp>
+        <p:nvSpPr>
+          <p:cNvPr id="92" name="TextBox 91"/>
+          <p:cNvSpPr txBox="1"/>
+          <p:nvPr/>
+        </p:nvSpPr>
+        <p:spPr>
+          <a:xfrm>
+            <a:off x="32157000" y="12408480"/>
+            <a:ext cx="9855000" cy="491040"/>
+          </a:xfrm>
+          <a:prstGeom prst="rect">
+            <a:avLst/>
+          </a:prstGeom>
+          <a:noFill/>
+        </p:spPr>
+        <p:txBody>
+          <a:bodyPr wrap="square">
+            <a:spAutoFit/>
+          </a:bodyPr>
+          <a:lstStyle/>
+          <a:p>
+            <a:r>
+              <a:rPr sz="1200" b="0" i="0">
+                <a:solidFill>
+                  <a:srgbClr val="C97B2C"/>
+                </a:solidFill>
+              </a:rPr>
+              <a:t>• </a:t>
+            </a:r>
+            <a:r>
+              <a:rPr sz="1200" b="1" i="0">
+                <a:solidFill>
+                  <a:srgbClr val="1D1D1D"/>
+                </a:solidFill>
+              </a:rPr>
+              <a:t>Stronger generators: </a:t>
+            </a:r>
+            <a:r>
+              <a:rPr sz="1200" b="0" i="0">
+                <a:solidFill>
+                  <a:srgbClr val="1D1D1D"/>
+                </a:solidFill>
+              </a:rPr>
+              <a:t>Gemini 3 Pro, Qwen3-VL-235B to isolate the generator-capability effect.</a:t>
+            </a:r>
+          </a:p>
+        </p:txBody>
+      </p:sp>
+      <p:sp>
+        <p:nvSpPr>
+          <p:cNvPr id="93" name="TextBox 92"/>
+          <p:cNvSpPr txBox="1"/>
+          <p:nvPr/>
+        </p:nvSpPr>
+        <p:spPr>
+          <a:xfrm>
+            <a:off x="32157000" y="12827520"/>
+            <a:ext cx="9855000" cy="491040"/>
+          </a:xfrm>
+          <a:prstGeom prst="rect">
+            <a:avLst/>
+          </a:prstGeom>
+          <a:noFill/>
+        </p:spPr>
+        <p:txBody>
+          <a:bodyPr wrap="square">
+            <a:spAutoFit/>
+          </a:bodyPr>
+          <a:lstStyle/>
+          <a:p>
+            <a:r>
+              <a:rPr sz="1200" b="0" i="0">
+                <a:solidFill>
+                  <a:srgbClr val="C97B2C"/>
+                </a:solidFill>
+              </a:rPr>
+              <a:t>• </a:t>
+            </a:r>
+            <a:r>
+              <a:rPr sz="1200" b="1" i="0">
+                <a:solidFill>
+                  <a:srgbClr val="1D1D1D"/>
+                </a:solidFill>
+              </a:rPr>
+              <a:t>Verbosity control: </a:t>
+            </a:r>
+            <a:r>
+              <a:rPr sz="1200" b="0" i="0">
+                <a:solidFill>
+                  <a:srgbClr val="1D1D1D"/>
+                </a:solidFill>
+              </a:rPr>
+              <a:t>Controlled-verbosity prompt and judge swap to rule out verbosity bias.</a:t>
+            </a:r>
+          </a:p>
+        </p:txBody>
+      </p:sp>
+      <p:sp>
+        <p:nvSpPr>
+          <p:cNvPr id="94" name="TextBox 93"/>
+          <p:cNvSpPr txBox="1"/>
+          <p:nvPr/>
+        </p:nvSpPr>
+        <p:spPr>
+          <a:xfrm>
+            <a:off x="32157000" y="13246560"/>
+            <a:ext cx="9855000" cy="491040"/>
+          </a:xfrm>
+          <a:prstGeom prst="rect">
+            <a:avLst/>
+          </a:prstGeom>
+          <a:noFill/>
+        </p:spPr>
+        <p:txBody>
+          <a:bodyPr wrap="square">
+            <a:spAutoFit/>
+          </a:bodyPr>
+          <a:lstStyle/>
+          <a:p>
+            <a:r>
+              <a:rPr sz="1200" b="0" i="0">
+                <a:solidFill>
+                  <a:srgbClr val="C97B2C"/>
+                </a:solidFill>
+              </a:rPr>
+              <a:t>• </a:t>
+            </a:r>
+            <a:r>
+              <a:rPr sz="1200" b="1" i="0">
+                <a:solidFill>
+                  <a:srgbClr val="1D1D1D"/>
+                </a:solidFill>
+              </a:rPr>
+              <a:t>Adaptive fusion: </a:t>
+            </a:r>
+            <a:r>
+              <a:rPr sz="1200" b="0" i="0">
+                <a:solidFill>
+                  <a:srgbClr val="1D1D1D"/>
+                </a:solidFill>
+              </a:rPr>
+              <a:t>Weighted combination, deduplication, query-type routing.</a:t>
+            </a:r>
+          </a:p>
+        </p:txBody>
+      </p:sp>
+      <p:sp>
+        <p:nvSpPr>
+          <p:cNvPr id="95" name="TextBox 94"/>
+          <p:cNvSpPr txBox="1"/>
+          <p:nvPr/>
+        </p:nvSpPr>
+        <p:spPr>
+          <a:xfrm>
+            <a:off x="32157000" y="13665600"/>
+            <a:ext cx="9855000" cy="491040"/>
+          </a:xfrm>
+          <a:prstGeom prst="rect">
+            <a:avLst/>
+          </a:prstGeom>
+          <a:noFill/>
+        </p:spPr>
+        <p:txBody>
+          <a:bodyPr wrap="square">
+            <a:spAutoFit/>
+          </a:bodyPr>
+          <a:lstStyle/>
+          <a:p>
+            <a:r>
+              <a:rPr sz="1200" b="0" i="0">
+                <a:solidFill>
+                  <a:srgbClr val="C97B2C"/>
+                </a:solidFill>
+              </a:rPr>
+              <a:t>• </a:t>
+            </a:r>
+            <a:r>
+              <a:rPr sz="1200" b="1" i="0">
+                <a:solidFill>
+                  <a:srgbClr val="1D1D1D"/>
+                </a:solidFill>
+              </a:rPr>
+              <a:t>Figure captioning: </a:t>
+            </a:r>
+            <a:r>
+              <a:rPr sz="1200" b="0" i="0">
+                <a:solidFill>
+                  <a:srgbClr val="1D1D1D"/>
+                </a:solidFill>
+              </a:rPr>
+              <a:t>Close the figure-placeholder blind spot in the text stream.</a:t>
+            </a:r>
+          </a:p>
+        </p:txBody>
+      </p:sp>
+      <p:sp>
+        <p:nvSpPr>
+          <p:cNvPr id="96" name="Rectangle 95"/>
           <p:cNvSpPr/>
           <p:nvPr/>
         </p:nvSpPr>
         <p:spPr>
           <a:xfrm>
-            <a:off x="32085000" y="8172000"/>
-            <a:ext cx="54000" cy="252000"/>
+            <a:off x="792000" y="22716000"/>
+            <a:ext cx="41220000" cy="18000"/>
           </a:xfrm>
           <a:prstGeom prst="rect">
             <a:avLst/>
           </a:prstGeom>
           <a:solidFill>
-            <a:srgbClr val="C97B2C"/>
+            <a:srgbClr val="CCCCCC"/>
           </a:solidFill>
           <a:ln/>
         </p:spPr>
@@ -8376,14 +8744,14 @@
       </p:sp>
       <p:sp>
         <p:nvSpPr>
-          <p:cNvPr id="90" name="TextBox 89"/>
+          <p:cNvPr id="97" name="TextBox 96"/>
           <p:cNvSpPr txBox="1"/>
           <p:nvPr/>
         </p:nvSpPr>
         <p:spPr>
           <a:xfrm>
-            <a:off x="32229000" y="8136000"/>
-            <a:ext cx="9783000" cy="324000"/>
+            <a:off x="792000" y="22752000"/>
+            <a:ext cx="41220000" cy="288000"/>
           </a:xfrm>
           <a:prstGeom prst="rect">
             <a:avLst/>
@@ -8397,719 +8765,7 @@
           <a:lstStyle/>
           <a:p>
             <a:r>
-              <a:rPr sz="1200" b="1" i="0">
-                <a:solidFill>
-                  <a:srgbClr val="1B3A6B"/>
-                </a:solidFill>
-              </a:rPr>
-              <a:t>LLM choices</a:t>
-            </a:r>
-          </a:p>
-        </p:txBody>
-      </p:sp>
-      <p:sp>
-        <p:nvSpPr>
-          <p:cNvPr id="91" name="TextBox 90"/>
-          <p:cNvSpPr txBox="1"/>
-          <p:nvPr/>
-        </p:nvSpPr>
-        <p:spPr>
-          <a:xfrm>
-            <a:off x="32157000" y="8496000"/>
-            <a:ext cx="9855000" cy="342000"/>
-          </a:xfrm>
-          <a:prstGeom prst="rect">
-            <a:avLst/>
-          </a:prstGeom>
-          <a:noFill/>
-        </p:spPr>
-        <p:txBody>
-          <a:bodyPr wrap="square">
-            <a:spAutoFit/>
-          </a:bodyPr>
-          <a:lstStyle/>
-          <a:p>
-            <a:r>
-              <a:rPr sz="1000" b="0" i="0">
-                <a:solidFill>
-                  <a:srgbClr val="C97B2C"/>
-                </a:solidFill>
-              </a:rPr>
-              <a:t>• </a:t>
-            </a:r>
-            <a:r>
-              <a:rPr sz="1000" b="1" i="0">
-                <a:solidFill>
-                  <a:srgbClr val="1D1D1D"/>
-                </a:solidFill>
-              </a:rPr>
-              <a:t>Generator qwen3.5:35b: </a:t>
-            </a:r>
-            <a:r>
-              <a:rPr sz="1000" b="0" i="0">
-                <a:solidFill>
-                  <a:srgbClr val="1D1D1D"/>
-                </a:solidFill>
-              </a:rPr>
-              <a:t>vision stack weaker than frontier closed models (Gemini 3 Pro, GPT-5.2).</a:t>
-            </a:r>
-          </a:p>
-        </p:txBody>
-      </p:sp>
-      <p:sp>
-        <p:nvSpPr>
-          <p:cNvPr id="92" name="TextBox 91"/>
-          <p:cNvSpPr txBox="1"/>
-          <p:nvPr/>
-        </p:nvSpPr>
-        <p:spPr>
-          <a:xfrm>
-            <a:off x="32157000" y="8766000"/>
-            <a:ext cx="9855000" cy="342000"/>
-          </a:xfrm>
-          <a:prstGeom prst="rect">
-            <a:avLst/>
-          </a:prstGeom>
-          <a:noFill/>
-        </p:spPr>
-        <p:txBody>
-          <a:bodyPr wrap="square">
-            <a:spAutoFit/>
-          </a:bodyPr>
-          <a:lstStyle/>
-          <a:p>
-            <a:r>
-              <a:rPr sz="1000" b="0" i="0">
-                <a:solidFill>
-                  <a:srgbClr val="C97B2C"/>
-                </a:solidFill>
-              </a:rPr>
-              <a:t>• </a:t>
-            </a:r>
-            <a:r>
-              <a:rPr sz="1000" b="1" i="0">
-                <a:solidFill>
-                  <a:srgbClr val="1D1D1D"/>
-                </a:solidFill>
-              </a:rPr>
-              <a:t>Judge llama3.1:8b: </a:t>
-            </a:r>
-            <a:r>
-              <a:rPr sz="1000" b="0" i="0">
-                <a:solidFill>
-                  <a:srgbClr val="1D1D1D"/>
-                </a:solidFill>
-              </a:rPr>
-              <a:t>verbosity bias: longer answers rewarded. Hybrid answers tend to be longer.</a:t>
-            </a:r>
-          </a:p>
-        </p:txBody>
-      </p:sp>
-      <p:sp>
-        <p:nvSpPr>
-          <p:cNvPr id="93" name="Rectangle 92"/>
-          <p:cNvSpPr/>
-          <p:nvPr/>
-        </p:nvSpPr>
-        <p:spPr>
-          <a:xfrm>
-            <a:off x="32085000" y="9108000"/>
-            <a:ext cx="54000" cy="252000"/>
-          </a:xfrm>
-          <a:prstGeom prst="rect">
-            <a:avLst/>
-          </a:prstGeom>
-          <a:solidFill>
-            <a:srgbClr val="C97B2C"/>
-          </a:solidFill>
-          <a:ln/>
-        </p:spPr>
-        <p:style>
-          <a:lnRef idx="1">
-            <a:schemeClr val="accent1"/>
-          </a:lnRef>
-          <a:fillRef idx="3">
-            <a:schemeClr val="accent1"/>
-          </a:fillRef>
-          <a:effectRef idx="2">
-            <a:schemeClr val="accent1"/>
-          </a:effectRef>
-          <a:fontRef idx="minor">
-            <a:schemeClr val="lt1"/>
-          </a:fontRef>
-        </p:style>
-        <p:txBody>
-          <a:bodyPr rtlCol="0" anchor="ctr"/>
-          <a:lstStyle/>
-          <a:p>
-            <a:pPr algn="ctr"/>
-          </a:p>
-        </p:txBody>
-      </p:sp>
-      <p:sp>
-        <p:nvSpPr>
-          <p:cNvPr id="94" name="TextBox 93"/>
-          <p:cNvSpPr txBox="1"/>
-          <p:nvPr/>
-        </p:nvSpPr>
-        <p:spPr>
-          <a:xfrm>
-            <a:off x="32229000" y="9072000"/>
-            <a:ext cx="9783000" cy="324000"/>
-          </a:xfrm>
-          <a:prstGeom prst="rect">
-            <a:avLst/>
-          </a:prstGeom>
-          <a:noFill/>
-        </p:spPr>
-        <p:txBody>
-          <a:bodyPr wrap="square">
-            <a:spAutoFit/>
-          </a:bodyPr>
-          <a:lstStyle/>
-          <a:p>
-            <a:r>
-              <a:rPr sz="1200" b="1" i="0">
-                <a:solidFill>
-                  <a:srgbClr val="1B3A6B"/>
-                </a:solidFill>
-              </a:rPr>
-              <a:t>Benchmark and evaluation design</a:t>
-            </a:r>
-          </a:p>
-        </p:txBody>
-      </p:sp>
-      <p:sp>
-        <p:nvSpPr>
-          <p:cNvPr id="95" name="TextBox 94"/>
-          <p:cNvSpPr txBox="1"/>
-          <p:nvPr/>
-        </p:nvSpPr>
-        <p:spPr>
-          <a:xfrm>
-            <a:off x="32157000" y="9432000"/>
-            <a:ext cx="9855000" cy="342000"/>
-          </a:xfrm>
-          <a:prstGeom prst="rect">
-            <a:avLst/>
-          </a:prstGeom>
-          <a:noFill/>
-        </p:spPr>
-        <p:txBody>
-          <a:bodyPr wrap="square">
-            <a:spAutoFit/>
-          </a:bodyPr>
-          <a:lstStyle/>
-          <a:p>
-            <a:r>
-              <a:rPr sz="1000" b="0" i="0">
-                <a:solidFill>
-                  <a:srgbClr val="C97B2C"/>
-                </a:solidFill>
-              </a:rPr>
-              <a:t>• </a:t>
-            </a:r>
-            <a:r>
-              <a:rPr sz="1000" b="1" i="0">
-                <a:solidFill>
-                  <a:srgbClr val="1D1D1D"/>
-                </a:solidFill>
-              </a:rPr>
-              <a:t>Binary pass@1: </a:t>
-            </a:r>
-            <a:r>
-              <a:rPr sz="1000" b="0" i="0">
-                <a:solidFill>
-                  <a:srgbClr val="1D1D1D"/>
-                </a:solidFill>
-              </a:rPr>
-              <a:t>near-miss and complete miss treated identically. No partial credit.</a:t>
-            </a:r>
-          </a:p>
-        </p:txBody>
-      </p:sp>
-      <p:sp>
-        <p:nvSpPr>
-          <p:cNvPr id="96" name="TextBox 95"/>
-          <p:cNvSpPr txBox="1"/>
-          <p:nvPr/>
-        </p:nvSpPr>
-        <p:spPr>
-          <a:xfrm>
-            <a:off x="32157000" y="9702000"/>
-            <a:ext cx="9855000" cy="342000"/>
-          </a:xfrm>
-          <a:prstGeom prst="rect">
-            <a:avLst/>
-          </a:prstGeom>
-          <a:noFill/>
-        </p:spPr>
-        <p:txBody>
-          <a:bodyPr wrap="square">
-            <a:spAutoFit/>
-          </a:bodyPr>
-          <a:lstStyle/>
-          <a:p>
-            <a:r>
-              <a:rPr sz="1000" b="0" i="0">
-                <a:solidFill>
-                  <a:srgbClr val="C97B2C"/>
-                </a:solidFill>
-              </a:rPr>
-              <a:t>• </a:t>
-            </a:r>
-            <a:r>
-              <a:rPr sz="1000" b="1" i="0">
-                <a:solidFill>
-                  <a:srgbClr val="1D1D1D"/>
-                </a:solidFill>
-              </a:rPr>
-              <a:t>No human spot-check: </a:t>
-            </a:r>
-            <a:r>
-              <a:rPr sz="1000" b="0" i="0">
-                <a:solidFill>
-                  <a:srgbClr val="1D1D1D"/>
-                </a:solidFill>
-              </a:rPr>
-              <a:t>all judgments from LLM judge with no human validation.</a:t>
-            </a:r>
-          </a:p>
-        </p:txBody>
-      </p:sp>
-      <p:sp>
-        <p:nvSpPr>
-          <p:cNvPr id="97" name="TextBox 96"/>
-          <p:cNvSpPr txBox="1"/>
-          <p:nvPr/>
-        </p:nvSpPr>
-        <p:spPr>
-          <a:xfrm>
-            <a:off x="32157000" y="9972000"/>
-            <a:ext cx="9855000" cy="342000"/>
-          </a:xfrm>
-          <a:prstGeom prst="rect">
-            <a:avLst/>
-          </a:prstGeom>
-          <a:noFill/>
-        </p:spPr>
-        <p:txBody>
-          <a:bodyPr wrap="square">
-            <a:spAutoFit/>
-          </a:bodyPr>
-          <a:lstStyle/>
-          <a:p>
-            <a:r>
-              <a:rPr sz="1000" b="0" i="0">
-                <a:solidFill>
-                  <a:srgbClr val="C97B2C"/>
-                </a:solidFill>
-              </a:rPr>
-              <a:t>• </a:t>
-            </a:r>
-            <a:r>
-              <a:rPr sz="1000" b="1" i="0">
-                <a:solidFill>
-                  <a:srgbClr val="1D1D1D"/>
-                </a:solidFill>
-              </a:rPr>
-              <a:t>Fixed fusion: </a:t>
-            </a:r>
-            <a:r>
-              <a:rPr sz="1000" b="0" i="0">
-                <a:solidFill>
-                  <a:srgbClr val="1D1D1D"/>
-                </a:solidFill>
-              </a:rPr>
-              <a:t>always top-5+top-5, no deduplication; same page can appear twice.</a:t>
-            </a:r>
-          </a:p>
-        </p:txBody>
-      </p:sp>
-      <p:sp>
-        <p:nvSpPr>
-          <p:cNvPr id="98" name="TextBox 97"/>
-          <p:cNvSpPr txBox="1"/>
-          <p:nvPr/>
-        </p:nvSpPr>
-        <p:spPr>
-          <a:xfrm>
-            <a:off x="32157000" y="10242000"/>
-            <a:ext cx="9855000" cy="342000"/>
-          </a:xfrm>
-          <a:prstGeom prst="rect">
-            <a:avLst/>
-          </a:prstGeom>
-          <a:noFill/>
-        </p:spPr>
-        <p:txBody>
-          <a:bodyPr wrap="square">
-            <a:spAutoFit/>
-          </a:bodyPr>
-          <a:lstStyle/>
-          <a:p>
-            <a:r>
-              <a:rPr sz="1000" b="0" i="0">
-                <a:solidFill>
-                  <a:srgbClr val="C97B2C"/>
-                </a:solidFill>
-              </a:rPr>
-              <a:t>• </a:t>
-            </a:r>
-            <a:r>
-              <a:rPr sz="1000" b="1" i="0">
-                <a:solidFill>
-                  <a:srgbClr val="1D1D1D"/>
-                </a:solidFill>
-              </a:rPr>
-              <a:t>Domain-specific corpora: </a:t>
-            </a:r>
-            <a:r>
-              <a:rPr sz="1000" b="0" i="0">
-                <a:solidFill>
-                  <a:srgbClr val="1D1D1D"/>
-                </a:solidFill>
-              </a:rPr>
-              <a:t>CS, finance, pharma only. May not transfer to general-purpose RAG.</a:t>
-            </a:r>
-          </a:p>
-        </p:txBody>
-      </p:sp>
-      <p:sp>
-        <p:nvSpPr>
-          <p:cNvPr id="99" name="Rectangle 98"/>
-          <p:cNvSpPr/>
-          <p:nvPr/>
-        </p:nvSpPr>
-        <p:spPr>
-          <a:xfrm>
-            <a:off x="32085000" y="10548000"/>
-            <a:ext cx="9927000" cy="396000"/>
-          </a:xfrm>
-          <a:prstGeom prst="rect">
-            <a:avLst/>
-          </a:prstGeom>
-          <a:solidFill>
-            <a:srgbClr val="1B3A6B"/>
-          </a:solidFill>
-          <a:ln/>
-        </p:spPr>
-        <p:style>
-          <a:lnRef idx="1">
-            <a:schemeClr val="accent1"/>
-          </a:lnRef>
-          <a:fillRef idx="3">
-            <a:schemeClr val="accent1"/>
-          </a:fillRef>
-          <a:effectRef idx="2">
-            <a:schemeClr val="accent1"/>
-          </a:effectRef>
-          <a:fontRef idx="minor">
-            <a:schemeClr val="lt1"/>
-          </a:fontRef>
-        </p:style>
-        <p:txBody>
-          <a:bodyPr rtlCol="0" anchor="ctr"/>
-          <a:lstStyle/>
-          <a:p>
-            <a:pPr algn="ctr"/>
-          </a:p>
-        </p:txBody>
-      </p:sp>
-      <p:sp>
-        <p:nvSpPr>
-          <p:cNvPr id="100" name="TextBox 99"/>
-          <p:cNvSpPr txBox="1"/>
-          <p:nvPr/>
-        </p:nvSpPr>
-        <p:spPr>
-          <a:xfrm>
-            <a:off x="32193000" y="10584000"/>
-            <a:ext cx="9783000" cy="396000"/>
-          </a:xfrm>
-          <a:prstGeom prst="rect">
-            <a:avLst/>
-          </a:prstGeom>
-          <a:noFill/>
-        </p:spPr>
-        <p:txBody>
-          <a:bodyPr wrap="square">
-            <a:spAutoFit/>
-          </a:bodyPr>
-          <a:lstStyle/>
-          <a:p>
-            <a:r>
-              <a:rPr sz="1500" b="1" i="0">
-                <a:solidFill>
-                  <a:srgbClr val="FFFFFF"/>
-                </a:solidFill>
-              </a:rPr>
-              <a:t>Future work</a:t>
-            </a:r>
-          </a:p>
-        </p:txBody>
-      </p:sp>
-      <p:sp>
-        <p:nvSpPr>
-          <p:cNvPr id="101" name="TextBox 100"/>
-          <p:cNvSpPr txBox="1"/>
-          <p:nvPr/>
-        </p:nvSpPr>
-        <p:spPr>
-          <a:xfrm>
-            <a:off x="32157000" y="11052000"/>
-            <a:ext cx="9855000" cy="342000"/>
-          </a:xfrm>
-          <a:prstGeom prst="rect">
-            <a:avLst/>
-          </a:prstGeom>
-          <a:noFill/>
-        </p:spPr>
-        <p:txBody>
-          <a:bodyPr wrap="square">
-            <a:spAutoFit/>
-          </a:bodyPr>
-          <a:lstStyle/>
-          <a:p>
-            <a:r>
-              <a:rPr sz="1000" b="0" i="0">
-                <a:solidFill>
-                  <a:srgbClr val="C97B2C"/>
-                </a:solidFill>
-              </a:rPr>
-              <a:t>• </a:t>
-            </a:r>
-            <a:r>
-              <a:rPr sz="1000" b="1" i="0">
-                <a:solidFill>
-                  <a:srgbClr val="1D1D1D"/>
-                </a:solidFill>
-              </a:rPr>
-              <a:t>Stronger generators: </a:t>
-            </a:r>
-            <a:r>
-              <a:rPr sz="1000" b="0" i="0">
-                <a:solidFill>
-                  <a:srgbClr val="1D1D1D"/>
-                </a:solidFill>
-              </a:rPr>
-              <a:t>Gemini 3 Pro, Qwen3-VL-235B to isolate generator-capability effect.</a:t>
-            </a:r>
-          </a:p>
-        </p:txBody>
-      </p:sp>
-      <p:sp>
-        <p:nvSpPr>
-          <p:cNvPr id="102" name="TextBox 101"/>
-          <p:cNvSpPr txBox="1"/>
-          <p:nvPr/>
-        </p:nvSpPr>
-        <p:spPr>
-          <a:xfrm>
-            <a:off x="32157000" y="11322000"/>
-            <a:ext cx="9855000" cy="342000"/>
-          </a:xfrm>
-          <a:prstGeom prst="rect">
-            <a:avLst/>
-          </a:prstGeom>
-          <a:noFill/>
-        </p:spPr>
-        <p:txBody>
-          <a:bodyPr wrap="square">
-            <a:spAutoFit/>
-          </a:bodyPr>
-          <a:lstStyle/>
-          <a:p>
-            <a:r>
-              <a:rPr sz="1000" b="0" i="0">
-                <a:solidFill>
-                  <a:srgbClr val="C97B2C"/>
-                </a:solidFill>
-              </a:rPr>
-              <a:t>• </a:t>
-            </a:r>
-            <a:r>
-              <a:rPr sz="1000" b="1" i="0">
-                <a:solidFill>
-                  <a:srgbClr val="1D1D1D"/>
-                </a:solidFill>
-              </a:rPr>
-              <a:t>Verbosity control: </a:t>
-            </a:r>
-            <a:r>
-              <a:rPr sz="1000" b="0" i="0">
-                <a:solidFill>
-                  <a:srgbClr val="1D1D1D"/>
-                </a:solidFill>
-              </a:rPr>
-              <a:t>Controlled-verbosity prompt and judge swap to rule out bias.</a:t>
-            </a:r>
-          </a:p>
-        </p:txBody>
-      </p:sp>
-      <p:sp>
-        <p:nvSpPr>
-          <p:cNvPr id="103" name="TextBox 102"/>
-          <p:cNvSpPr txBox="1"/>
-          <p:nvPr/>
-        </p:nvSpPr>
-        <p:spPr>
-          <a:xfrm>
-            <a:off x="32157000" y="11592000"/>
-            <a:ext cx="9855000" cy="342000"/>
-          </a:xfrm>
-          <a:prstGeom prst="rect">
-            <a:avLst/>
-          </a:prstGeom>
-          <a:noFill/>
-        </p:spPr>
-        <p:txBody>
-          <a:bodyPr wrap="square">
-            <a:spAutoFit/>
-          </a:bodyPr>
-          <a:lstStyle/>
-          <a:p>
-            <a:r>
-              <a:rPr sz="1000" b="0" i="0">
-                <a:solidFill>
-                  <a:srgbClr val="C97B2C"/>
-                </a:solidFill>
-              </a:rPr>
-              <a:t>• </a:t>
-            </a:r>
-            <a:r>
-              <a:rPr sz="1000" b="1" i="0">
-                <a:solidFill>
-                  <a:srgbClr val="1D1D1D"/>
-                </a:solidFill>
-              </a:rPr>
-              <a:t>Adaptive fusion: </a:t>
-            </a:r>
-            <a:r>
-              <a:rPr sz="1000" b="0" i="0">
-                <a:solidFill>
-                  <a:srgbClr val="1D1D1D"/>
-                </a:solidFill>
-              </a:rPr>
-              <a:t>Weighted combination, deduplication, query-type routing.</a:t>
-            </a:r>
-          </a:p>
-        </p:txBody>
-      </p:sp>
-      <p:sp>
-        <p:nvSpPr>
-          <p:cNvPr id="104" name="TextBox 103"/>
-          <p:cNvSpPr txBox="1"/>
-          <p:nvPr/>
-        </p:nvSpPr>
-        <p:spPr>
-          <a:xfrm>
-            <a:off x="32157000" y="11862000"/>
-            <a:ext cx="9855000" cy="342000"/>
-          </a:xfrm>
-          <a:prstGeom prst="rect">
-            <a:avLst/>
-          </a:prstGeom>
-          <a:noFill/>
-        </p:spPr>
-        <p:txBody>
-          <a:bodyPr wrap="square">
-            <a:spAutoFit/>
-          </a:bodyPr>
-          <a:lstStyle/>
-          <a:p>
-            <a:r>
-              <a:rPr sz="1000" b="0" i="0">
-                <a:solidFill>
-                  <a:srgbClr val="C97B2C"/>
-                </a:solidFill>
-              </a:rPr>
-              <a:t>• </a:t>
-            </a:r>
-            <a:r>
-              <a:rPr sz="1000" b="1" i="0">
-                <a:solidFill>
-                  <a:srgbClr val="1D1D1D"/>
-                </a:solidFill>
-              </a:rPr>
-              <a:t>Figure captioning: </a:t>
-            </a:r>
-            <a:r>
-              <a:rPr sz="1000" b="0" i="0">
-                <a:solidFill>
-                  <a:srgbClr val="1D1D1D"/>
-                </a:solidFill>
-              </a:rPr>
-              <a:t>Close the figure-placeholder blind spot in the text stream.</a:t>
-            </a:r>
-          </a:p>
-        </p:txBody>
-      </p:sp>
-      <p:sp>
-        <p:nvSpPr>
-          <p:cNvPr id="105" name="Rectangle 104"/>
-          <p:cNvSpPr/>
-          <p:nvPr/>
-        </p:nvSpPr>
-        <p:spPr>
-          <a:xfrm>
-            <a:off x="792000" y="22716000"/>
-            <a:ext cx="41220000" cy="18000"/>
-          </a:xfrm>
-          <a:prstGeom prst="rect">
-            <a:avLst/>
-          </a:prstGeom>
-          <a:solidFill>
-            <a:srgbClr val="CCCCCC"/>
-          </a:solidFill>
-          <a:ln/>
-        </p:spPr>
-        <p:style>
-          <a:lnRef idx="1">
-            <a:schemeClr val="accent1"/>
-          </a:lnRef>
-          <a:fillRef idx="3">
-            <a:schemeClr val="accent1"/>
-          </a:fillRef>
-          <a:effectRef idx="2">
-            <a:schemeClr val="accent1"/>
-          </a:effectRef>
-          <a:fontRef idx="minor">
-            <a:schemeClr val="lt1"/>
-          </a:fontRef>
-        </p:style>
-        <p:txBody>
-          <a:bodyPr rtlCol="0" anchor="ctr"/>
-          <a:lstStyle/>
-          <a:p>
-            <a:pPr algn="ctr"/>
-          </a:p>
-        </p:txBody>
-      </p:sp>
-      <p:sp>
-        <p:nvSpPr>
-          <p:cNvPr id="106" name="TextBox 105"/>
-          <p:cNvSpPr txBox="1"/>
-          <p:nvPr/>
-        </p:nvSpPr>
-        <p:spPr>
-          <a:xfrm>
-            <a:off x="792000" y="22752000"/>
-            <a:ext cx="41220000" cy="288000"/>
-          </a:xfrm>
-          <a:prstGeom prst="rect">
-            <a:avLst/>
-          </a:prstGeom>
-          <a:noFill/>
-        </p:spPr>
-        <p:txBody>
-          <a:bodyPr wrap="square">
-            <a:spAutoFit/>
-          </a:bodyPr>
-          <a:lstStyle/>
-          <a:p>
-            <a:r>
-              <a:rPr sz="800" b="0" i="0">
+              <a:rPr sz="900" b="0" i="0">
                 <a:solidFill>
                   <a:srgbClr val="666666"/>
                 </a:solidFill>

--- a/poster/poster.pptx
+++ b/poster/poster.pptx
@@ -4503,169 +4503,26 @@
       </p:sp>
       <p:sp>
         <p:nvSpPr>
-          <p:cNvPr id="37" name="TextBox 36"/>
-          <p:cNvSpPr txBox="1"/>
-          <p:nvPr/>
-        </p:nvSpPr>
-        <p:spPr>
-          <a:xfrm>
-            <a:off x="11295000" y="5976000"/>
-            <a:ext cx="9855000" cy="491040"/>
-          </a:xfrm>
-          <a:prstGeom prst="rect">
-            <a:avLst/>
-          </a:prstGeom>
-          <a:noFill/>
-        </p:spPr>
-        <p:txBody>
-          <a:bodyPr wrap="square">
-            <a:spAutoFit/>
-          </a:bodyPr>
-          <a:lstStyle/>
-          <a:p>
-            <a:r>
-              <a:rPr sz="1200" b="0" i="0">
-                <a:solidFill>
-                  <a:srgbClr val="C97B2C"/>
-                </a:solidFill>
-              </a:rPr>
-              <a:t>• </a:t>
-            </a:r>
-            <a:r>
-              <a:rPr sz="1200" b="1" i="0">
-                <a:solidFill>
-                  <a:srgbClr val="1D1D1D"/>
-                </a:solidFill>
-              </a:rPr>
-              <a:t>Text stream: </a:t>
-            </a:r>
-            <a:r>
-              <a:rPr sz="1200" b="0" i="0">
-                <a:solidFill>
-                  <a:srgbClr val="1D1D1D"/>
-                </a:solidFill>
-              </a:rPr>
-              <a:t>PDF → DeepSeek-OCR-2 → markdown → Jina v4 (dense vectors) → zerank-2 (reranker) → Top-5 text pages</a:t>
-            </a:r>
-          </a:p>
-        </p:txBody>
-      </p:sp>
-      <p:sp>
-        <p:nvSpPr>
-          <p:cNvPr id="38" name="TextBox 37"/>
-          <p:cNvSpPr txBox="1"/>
-          <p:nvPr/>
-        </p:nvSpPr>
-        <p:spPr>
-          <a:xfrm>
-            <a:off x="11295000" y="6395040"/>
-            <a:ext cx="9855000" cy="491040"/>
-          </a:xfrm>
-          <a:prstGeom prst="rect">
-            <a:avLst/>
-          </a:prstGeom>
-          <a:noFill/>
-        </p:spPr>
-        <p:txBody>
-          <a:bodyPr wrap="square">
-            <a:spAutoFit/>
-          </a:bodyPr>
-          <a:lstStyle/>
-          <a:p>
-            <a:r>
-              <a:rPr sz="1200" b="0" i="0">
-                <a:solidFill>
-                  <a:srgbClr val="C97B2C"/>
-                </a:solidFill>
-              </a:rPr>
-              <a:t>• </a:t>
-            </a:r>
-            <a:r>
-              <a:rPr sz="1200" b="1" i="0">
-                <a:solidFill>
-                  <a:srgbClr val="1D1D1D"/>
-                </a:solidFill>
-              </a:rPr>
-              <a:t>Image stream: </a:t>
-            </a:r>
-            <a:r>
-              <a:rPr sz="1200" b="0" i="0">
-                <a:solidFill>
-                  <a:srgbClr val="1D1D1D"/>
-                </a:solidFill>
-              </a:rPr>
-              <a:t>PDF page images → ColEmbed (image encoder) → Top-5 image pages</a:t>
-            </a:r>
-          </a:p>
-        </p:txBody>
-      </p:sp>
-      <p:sp>
-        <p:nvSpPr>
-          <p:cNvPr id="39" name="TextBox 38"/>
-          <p:cNvSpPr txBox="1"/>
-          <p:nvPr/>
-        </p:nvSpPr>
-        <p:spPr>
-          <a:xfrm>
-            <a:off x="11295000" y="6814080"/>
-            <a:ext cx="9855000" cy="491040"/>
-          </a:xfrm>
-          <a:prstGeom prst="rect">
-            <a:avLst/>
-          </a:prstGeom>
-          <a:noFill/>
-        </p:spPr>
-        <p:txBody>
-          <a:bodyPr wrap="square">
-            <a:spAutoFit/>
-          </a:bodyPr>
-          <a:lstStyle/>
-          <a:p>
-            <a:r>
-              <a:rPr sz="1200" b="0" i="0">
-                <a:solidFill>
-                  <a:srgbClr val="C97B2C"/>
-                </a:solidFill>
-              </a:rPr>
-              <a:t>• </a:t>
-            </a:r>
-            <a:r>
-              <a:rPr sz="1200" b="1" i="0">
-                <a:solidFill>
-                  <a:srgbClr val="1D1D1D"/>
-                </a:solidFill>
-              </a:rPr>
-              <a:t>Fusion + eval: </a:t>
-            </a:r>
-            <a:r>
-              <a:rPr sz="1200" b="0" i="0">
-                <a:solidFill>
-                  <a:srgbClr val="1D1D1D"/>
-                </a:solidFill>
-              </a:rPr>
-              <a:t>Top-5 text + Top-5 image → qwen3.5:35b (generator) → Answer → llama3.1:8b (judge) → pass@1</a:t>
-            </a:r>
-          </a:p>
-        </p:txBody>
-      </p:sp>
-      <p:sp>
-        <p:nvSpPr>
-          <p:cNvPr id="40" name="Rectangle 39"/>
+          <p:cNvPr id="37" name="Rectangle 36"/>
           <p:cNvSpPr/>
           <p:nvPr/>
         </p:nvSpPr>
         <p:spPr>
           <a:xfrm>
-            <a:off x="11223000" y="7359120"/>
-            <a:ext cx="72000" cy="324000"/>
+            <a:off x="14886535" y="6212357"/>
+            <a:ext cx="2599928" cy="661799"/>
           </a:xfrm>
           <a:prstGeom prst="rect">
             <a:avLst/>
           </a:prstGeom>
           <a:solidFill>
-            <a:srgbClr val="C97B2C"/>
+            <a:srgbClr val="FFFFFF"/>
           </a:solidFill>
-          <a:ln/>
+          <a:ln w="15240">
+            <a:solidFill>
+              <a:srgbClr val="1B3A6B"/>
+            </a:solidFill>
+          </a:ln>
         </p:spPr>
         <p:style>
           <a:lnRef idx="1">
@@ -4682,244 +4539,43 @@
           </a:fontRef>
         </p:style>
         <p:txBody>
-          <a:bodyPr rtlCol="0" anchor="ctr"/>
+          <a:bodyPr rtlCol="0" anchor="ctr" wrap="square"/>
           <a:lstStyle/>
           <a:p>
             <a:pPr algn="ctr"/>
-          </a:p>
-        </p:txBody>
-      </p:sp>
-      <p:sp>
-        <p:nvSpPr>
-          <p:cNvPr id="41" name="TextBox 40"/>
-          <p:cNvSpPr txBox="1"/>
-          <p:nvPr/>
-        </p:nvSpPr>
-        <p:spPr>
-          <a:xfrm>
-            <a:off x="11403000" y="7305120"/>
-            <a:ext cx="9747000" cy="432000"/>
-          </a:xfrm>
-          <a:prstGeom prst="rect">
-            <a:avLst/>
-          </a:prstGeom>
-          <a:noFill/>
-        </p:spPr>
-        <p:txBody>
-          <a:bodyPr wrap="square">
-            <a:spAutoFit/>
-          </a:bodyPr>
-          <a:lstStyle/>
-          <a:p>
-            <a:r>
-              <a:rPr sz="1500" b="1" i="0">
-                <a:solidFill>
-                  <a:srgbClr val="1B3A6B"/>
-                </a:solidFill>
-              </a:rPr>
-              <a:t>Model choices</a:t>
-            </a:r>
-          </a:p>
-        </p:txBody>
-      </p:sp>
-      <p:sp>
-        <p:nvSpPr>
-          <p:cNvPr id="42" name="TextBox 41"/>
-          <p:cNvSpPr txBox="1"/>
-          <p:nvPr/>
-        </p:nvSpPr>
-        <p:spPr>
-          <a:xfrm>
-            <a:off x="11295000" y="7773120"/>
-            <a:ext cx="9855000" cy="491040"/>
-          </a:xfrm>
-          <a:prstGeom prst="rect">
-            <a:avLst/>
-          </a:prstGeom>
-          <a:noFill/>
-        </p:spPr>
-        <p:txBody>
-          <a:bodyPr wrap="square">
-            <a:spAutoFit/>
-          </a:bodyPr>
-          <a:lstStyle/>
-          <a:p>
-            <a:r>
-              <a:rPr sz="1200" b="0" i="0">
-                <a:solidFill>
-                  <a:srgbClr val="C97B2C"/>
-                </a:solidFill>
-              </a:rPr>
-              <a:t>• </a:t>
-            </a:r>
-            <a:r>
-              <a:rPr sz="1200" b="1" i="0">
+            <a:r>
+              <a:rPr sz="900" b="1" i="0">
                 <a:solidFill>
                   <a:srgbClr val="1D1D1D"/>
                 </a:solidFill>
               </a:rPr>
-              <a:t>DeepSeek-OCR-2: </a:t>
-            </a:r>
-            <a:r>
-              <a:rPr sz="1200" b="0" i="0">
-                <a:solidFill>
-                  <a:srgbClr val="1D1D1D"/>
-                </a:solidFill>
-              </a:rPr>
-              <a:t>open-weights document OCR with layout-preserving markdown (HTML tables, LaTeX)</a:t>
-            </a:r>
-          </a:p>
-        </p:txBody>
-      </p:sp>
-      <p:sp>
-        <p:nvSpPr>
-          <p:cNvPr id="43" name="TextBox 42"/>
-          <p:cNvSpPr txBox="1"/>
-          <p:nvPr/>
-        </p:nvSpPr>
-        <p:spPr>
-          <a:xfrm>
-            <a:off x="11295000" y="8192160"/>
-            <a:ext cx="9855000" cy="491040"/>
-          </a:xfrm>
-          <a:prstGeom prst="rect">
-            <a:avLst/>
-          </a:prstGeom>
-          <a:noFill/>
-        </p:spPr>
-        <p:txBody>
-          <a:bodyPr wrap="square">
-            <a:spAutoFit/>
-          </a:bodyPr>
-          <a:lstStyle/>
-          <a:p>
-            <a:r>
-              <a:rPr sz="1200" b="0" i="0">
-                <a:solidFill>
-                  <a:srgbClr val="C97B2C"/>
-                </a:solidFill>
-              </a:rPr>
-              <a:t>• </a:t>
-            </a:r>
-            <a:r>
-              <a:rPr sz="1200" b="1" i="0">
-                <a:solidFill>
-                  <a:srgbClr val="1D1D1D"/>
-                </a:solidFill>
-              </a:rPr>
-              <a:t>qwen3.5:35b: </a:t>
-            </a:r>
-            <a:r>
-              <a:rPr sz="1200" b="0" i="0">
-                <a:solidFill>
-                  <a:srgbClr val="1D1D1D"/>
-                </a:solidFill>
-              </a:rPr>
-              <a:t>multimodal generator, Q4-quantized MoE, fits on one 48 GB GPU, 262k context</a:t>
-            </a:r>
-          </a:p>
-        </p:txBody>
-      </p:sp>
-      <p:sp>
-        <p:nvSpPr>
-          <p:cNvPr id="44" name="TextBox 43"/>
-          <p:cNvSpPr txBox="1"/>
-          <p:nvPr/>
-        </p:nvSpPr>
-        <p:spPr>
-          <a:xfrm>
-            <a:off x="11295000" y="8611200"/>
-            <a:ext cx="9855000" cy="491040"/>
-          </a:xfrm>
-          <a:prstGeom prst="rect">
-            <a:avLst/>
-          </a:prstGeom>
-          <a:noFill/>
-        </p:spPr>
-        <p:txBody>
-          <a:bodyPr wrap="square">
-            <a:spAutoFit/>
-          </a:bodyPr>
-          <a:lstStyle/>
-          <a:p>
-            <a:r>
-              <a:rPr sz="1200" b="0" i="0">
-                <a:solidFill>
-                  <a:srgbClr val="C97B2C"/>
-                </a:solidFill>
-              </a:rPr>
-              <a:t>• </a:t>
-            </a:r>
-            <a:r>
-              <a:rPr sz="1200" b="1" i="0">
-                <a:solidFill>
-                  <a:srgbClr val="1D1D1D"/>
-                </a:solidFill>
-              </a:rPr>
-              <a:t>llama3.1:8b: </a:t>
-            </a:r>
-            <a:r>
-              <a:rPr sz="1200" b="0" i="0">
-                <a:solidFill>
-                  <a:srgbClr val="1D1D1D"/>
-                </a:solidFill>
-              </a:rPr>
-              <a:t>judge from a different model family (Meta vs Alibaba) to reduce self-preference bias</a:t>
-            </a:r>
-          </a:p>
-        </p:txBody>
-      </p:sp>
-      <p:sp>
-        <p:nvSpPr>
-          <p:cNvPr id="45" name="TextBox 44"/>
-          <p:cNvSpPr txBox="1"/>
-          <p:nvPr/>
-        </p:nvSpPr>
-        <p:spPr>
-          <a:xfrm>
-            <a:off x="11223000" y="9102240"/>
-            <a:ext cx="9927000" cy="432000"/>
-          </a:xfrm>
-          <a:prstGeom prst="rect">
-            <a:avLst/>
-          </a:prstGeom>
-          <a:noFill/>
-        </p:spPr>
-        <p:txBody>
-          <a:bodyPr wrap="square">
-            <a:spAutoFit/>
-          </a:bodyPr>
-          <a:lstStyle/>
-          <a:p>
-            <a:r>
-              <a:rPr sz="1100" b="0" i="0">
-                <a:solidFill>
-                  <a:srgbClr val="666666"/>
-                </a:solidFill>
-              </a:rPr>
-              <a:t>All components are open-weights and run on a single GPU.</a:t>
-            </a:r>
-          </a:p>
-        </p:txBody>
-      </p:sp>
-      <p:sp>
-        <p:nvSpPr>
-          <p:cNvPr id="46" name="Rectangle 45"/>
+              <a:t>PDF page image</a:t>
+            </a:r>
+          </a:p>
+        </p:txBody>
+      </p:sp>
+      <p:sp>
+        <p:nvSpPr>
+          <p:cNvPr id="38" name="Rectangle 37"/>
           <p:cNvSpPr/>
           <p:nvPr/>
         </p:nvSpPr>
         <p:spPr>
           <a:xfrm>
-            <a:off x="11223000" y="9660240"/>
-            <a:ext cx="72000" cy="324000"/>
+            <a:off x="11695714" y="7630499"/>
+            <a:ext cx="3545357" cy="803614"/>
           </a:xfrm>
           <a:prstGeom prst="rect">
             <a:avLst/>
           </a:prstGeom>
           <a:solidFill>
-            <a:srgbClr val="C97B2C"/>
+            <a:srgbClr val="FDF5E7"/>
           </a:solidFill>
-          <a:ln/>
+          <a:ln w="15240">
+            <a:solidFill>
+              <a:srgbClr val="C97B2C"/>
+            </a:solidFill>
+          </a:ln>
         </p:spPr>
         <p:style>
           <a:lnRef idx="1">
@@ -4936,6 +4592,915 @@
           </a:fontRef>
         </p:style>
         <p:txBody>
+          <a:bodyPr rtlCol="0" anchor="ctr" wrap="square"/>
+          <a:lstStyle/>
+          <a:p>
+            <a:pPr algn="ctr"/>
+            <a:r>
+              <a:rPr sz="900" b="1" i="0">
+                <a:solidFill>
+                  <a:srgbClr val="1D1D1D"/>
+                </a:solidFill>
+              </a:rPr>
+              <a:t>DeepSeek-OCR-2</a:t>
+            </a:r>
+          </a:p>
+          <a:p>
+            <a:pPr algn="ctr"/>
+            <a:r>
+              <a:rPr sz="700" b="0" i="0">
+                <a:solidFill>
+                  <a:srgbClr val="666666"/>
+                </a:solidFill>
+              </a:rPr>
+              <a:t>text extraction (fixed)</a:t>
+            </a:r>
+          </a:p>
+        </p:txBody>
+      </p:sp>
+      <p:sp>
+        <p:nvSpPr>
+          <p:cNvPr id="39" name="Rectangle 38"/>
+          <p:cNvSpPr/>
+          <p:nvPr/>
+        </p:nvSpPr>
+        <p:spPr>
+          <a:xfrm>
+            <a:off x="11695714" y="8812285"/>
+            <a:ext cx="3545357" cy="614528"/>
+          </a:xfrm>
+          <a:prstGeom prst="rect">
+            <a:avLst/>
+          </a:prstGeom>
+          <a:solidFill>
+            <a:srgbClr val="FFFFFF"/>
+          </a:solidFill>
+          <a:ln w="15240">
+            <a:solidFill>
+              <a:srgbClr val="1B3A6B"/>
+            </a:solidFill>
+          </a:ln>
+        </p:spPr>
+        <p:style>
+          <a:lnRef idx="1">
+            <a:schemeClr val="accent1"/>
+          </a:lnRef>
+          <a:fillRef idx="3">
+            <a:schemeClr val="accent1"/>
+          </a:fillRef>
+          <a:effectRef idx="2">
+            <a:schemeClr val="accent1"/>
+          </a:effectRef>
+          <a:fontRef idx="minor">
+            <a:schemeClr val="lt1"/>
+          </a:fontRef>
+        </p:style>
+        <p:txBody>
+          <a:bodyPr rtlCol="0" anchor="ctr" wrap="square"/>
+          <a:lstStyle/>
+          <a:p>
+            <a:pPr algn="ctr"/>
+            <a:r>
+              <a:rPr sz="900" b="1" i="0">
+                <a:solidFill>
+                  <a:srgbClr val="1D1D1D"/>
+                </a:solidFill>
+              </a:rPr>
+              <a:t>Jina v4</a:t>
+            </a:r>
+          </a:p>
+          <a:p>
+            <a:pPr algn="ctr"/>
+            <a:r>
+              <a:rPr sz="700" b="0" i="0">
+                <a:solidFill>
+                  <a:srgbClr val="666666"/>
+                </a:solidFill>
+              </a:rPr>
+              <a:t>text encoder</a:t>
+            </a:r>
+          </a:p>
+        </p:txBody>
+      </p:sp>
+      <p:sp>
+        <p:nvSpPr>
+          <p:cNvPr id="40" name="Rectangle 39"/>
+          <p:cNvSpPr/>
+          <p:nvPr/>
+        </p:nvSpPr>
+        <p:spPr>
+          <a:xfrm>
+            <a:off x="11695714" y="9757713"/>
+            <a:ext cx="3545357" cy="614528"/>
+          </a:xfrm>
+          <a:prstGeom prst="rect">
+            <a:avLst/>
+          </a:prstGeom>
+          <a:solidFill>
+            <a:srgbClr val="FFFFFF"/>
+          </a:solidFill>
+          <a:ln w="15240">
+            <a:solidFill>
+              <a:srgbClr val="1B3A6B"/>
+            </a:solidFill>
+          </a:ln>
+        </p:spPr>
+        <p:style>
+          <a:lnRef idx="1">
+            <a:schemeClr val="accent1"/>
+          </a:lnRef>
+          <a:fillRef idx="3">
+            <a:schemeClr val="accent1"/>
+          </a:fillRef>
+          <a:effectRef idx="2">
+            <a:schemeClr val="accent1"/>
+          </a:effectRef>
+          <a:fontRef idx="minor">
+            <a:schemeClr val="lt1"/>
+          </a:fontRef>
+        </p:style>
+        <p:txBody>
+          <a:bodyPr rtlCol="0" anchor="ctr" wrap="square"/>
+          <a:lstStyle/>
+          <a:p>
+            <a:pPr algn="ctr"/>
+            <a:r>
+              <a:rPr sz="900" b="1" i="0">
+                <a:solidFill>
+                  <a:srgbClr val="1D1D1D"/>
+                </a:solidFill>
+              </a:rPr>
+              <a:t>zerank-2</a:t>
+            </a:r>
+          </a:p>
+          <a:p>
+            <a:pPr algn="ctr"/>
+            <a:r>
+              <a:rPr sz="700" b="0" i="0">
+                <a:solidFill>
+                  <a:srgbClr val="666666"/>
+                </a:solidFill>
+              </a:rPr>
+              <a:t>cross-encoder reranker</a:t>
+            </a:r>
+          </a:p>
+        </p:txBody>
+      </p:sp>
+      <p:sp>
+        <p:nvSpPr>
+          <p:cNvPr id="41" name="Rectangle 40"/>
+          <p:cNvSpPr/>
+          <p:nvPr/>
+        </p:nvSpPr>
+        <p:spPr>
+          <a:xfrm>
+            <a:off x="11695714" y="10703142"/>
+            <a:ext cx="3545357" cy="614528"/>
+          </a:xfrm>
+          <a:prstGeom prst="rect">
+            <a:avLst/>
+          </a:prstGeom>
+          <a:solidFill>
+            <a:srgbClr val="FFFFFF"/>
+          </a:solidFill>
+          <a:ln w="15240">
+            <a:solidFill>
+              <a:srgbClr val="1B3A6B"/>
+            </a:solidFill>
+          </a:ln>
+        </p:spPr>
+        <p:style>
+          <a:lnRef idx="1">
+            <a:schemeClr val="accent1"/>
+          </a:lnRef>
+          <a:fillRef idx="3">
+            <a:schemeClr val="accent1"/>
+          </a:fillRef>
+          <a:effectRef idx="2">
+            <a:schemeClr val="accent1"/>
+          </a:effectRef>
+          <a:fontRef idx="minor">
+            <a:schemeClr val="lt1"/>
+          </a:fontRef>
+        </p:style>
+        <p:txBody>
+          <a:bodyPr rtlCol="0" anchor="ctr" wrap="square"/>
+          <a:lstStyle/>
+          <a:p>
+            <a:pPr algn="ctr"/>
+            <a:r>
+              <a:rPr sz="900" b="1" i="0">
+                <a:solidFill>
+                  <a:srgbClr val="1D1D1D"/>
+                </a:solidFill>
+              </a:rPr>
+              <a:t>Top-5 text docs</a:t>
+            </a:r>
+          </a:p>
+        </p:txBody>
+      </p:sp>
+      <p:sp>
+        <p:nvSpPr>
+          <p:cNvPr id="42" name="Rectangle 41"/>
+          <p:cNvSpPr/>
+          <p:nvPr/>
+        </p:nvSpPr>
+        <p:spPr>
+          <a:xfrm>
+            <a:off x="17131928" y="7630499"/>
+            <a:ext cx="3545357" cy="614528"/>
+          </a:xfrm>
+          <a:prstGeom prst="rect">
+            <a:avLst/>
+          </a:prstGeom>
+          <a:solidFill>
+            <a:srgbClr val="FFFFFF"/>
+          </a:solidFill>
+          <a:ln w="15240">
+            <a:solidFill>
+              <a:srgbClr val="1B3A6B"/>
+            </a:solidFill>
+          </a:ln>
+        </p:spPr>
+        <p:style>
+          <a:lnRef idx="1">
+            <a:schemeClr val="accent1"/>
+          </a:lnRef>
+          <a:fillRef idx="3">
+            <a:schemeClr val="accent1"/>
+          </a:fillRef>
+          <a:effectRef idx="2">
+            <a:schemeClr val="accent1"/>
+          </a:effectRef>
+          <a:fontRef idx="minor">
+            <a:schemeClr val="lt1"/>
+          </a:fontRef>
+        </p:style>
+        <p:txBody>
+          <a:bodyPr rtlCol="0" anchor="ctr" wrap="square"/>
+          <a:lstStyle/>
+          <a:p>
+            <a:pPr algn="ctr"/>
+            <a:r>
+              <a:rPr sz="900" b="1" i="0">
+                <a:solidFill>
+                  <a:srgbClr val="1D1D1D"/>
+                </a:solidFill>
+              </a:rPr>
+              <a:t>Page images</a:t>
+            </a:r>
+          </a:p>
+        </p:txBody>
+      </p:sp>
+      <p:sp>
+        <p:nvSpPr>
+          <p:cNvPr id="43" name="Rectangle 42"/>
+          <p:cNvSpPr/>
+          <p:nvPr/>
+        </p:nvSpPr>
+        <p:spPr>
+          <a:xfrm>
+            <a:off x="17131928" y="9757713"/>
+            <a:ext cx="3545357" cy="614528"/>
+          </a:xfrm>
+          <a:prstGeom prst="rect">
+            <a:avLst/>
+          </a:prstGeom>
+          <a:solidFill>
+            <a:srgbClr val="FFFFFF"/>
+          </a:solidFill>
+          <a:ln w="15240">
+            <a:solidFill>
+              <a:srgbClr val="1B3A6B"/>
+            </a:solidFill>
+          </a:ln>
+        </p:spPr>
+        <p:style>
+          <a:lnRef idx="1">
+            <a:schemeClr val="accent1"/>
+          </a:lnRef>
+          <a:fillRef idx="3">
+            <a:schemeClr val="accent1"/>
+          </a:fillRef>
+          <a:effectRef idx="2">
+            <a:schemeClr val="accent1"/>
+          </a:effectRef>
+          <a:fontRef idx="minor">
+            <a:schemeClr val="lt1"/>
+          </a:fontRef>
+        </p:style>
+        <p:txBody>
+          <a:bodyPr rtlCol="0" anchor="ctr" wrap="square"/>
+          <a:lstStyle/>
+          <a:p>
+            <a:pPr algn="ctr"/>
+            <a:r>
+              <a:rPr sz="900" b="1" i="0">
+                <a:solidFill>
+                  <a:srgbClr val="1D1D1D"/>
+                </a:solidFill>
+              </a:rPr>
+              <a:t>ColEmbed</a:t>
+            </a:r>
+          </a:p>
+          <a:p>
+            <a:pPr algn="ctr"/>
+            <a:r>
+              <a:rPr sz="700" b="0" i="0">
+                <a:solidFill>
+                  <a:srgbClr val="666666"/>
+                </a:solidFill>
+              </a:rPr>
+              <a:t>image encoder</a:t>
+            </a:r>
+          </a:p>
+        </p:txBody>
+      </p:sp>
+      <p:sp>
+        <p:nvSpPr>
+          <p:cNvPr id="44" name="Rectangle 43"/>
+          <p:cNvSpPr/>
+          <p:nvPr/>
+        </p:nvSpPr>
+        <p:spPr>
+          <a:xfrm>
+            <a:off x="17131928" y="10703142"/>
+            <a:ext cx="3545357" cy="614528"/>
+          </a:xfrm>
+          <a:prstGeom prst="rect">
+            <a:avLst/>
+          </a:prstGeom>
+          <a:solidFill>
+            <a:srgbClr val="FFFFFF"/>
+          </a:solidFill>
+          <a:ln w="15240">
+            <a:solidFill>
+              <a:srgbClr val="1B3A6B"/>
+            </a:solidFill>
+          </a:ln>
+        </p:spPr>
+        <p:style>
+          <a:lnRef idx="1">
+            <a:schemeClr val="accent1"/>
+          </a:lnRef>
+          <a:fillRef idx="3">
+            <a:schemeClr val="accent1"/>
+          </a:fillRef>
+          <a:effectRef idx="2">
+            <a:schemeClr val="accent1"/>
+          </a:effectRef>
+          <a:fontRef idx="minor">
+            <a:schemeClr val="lt1"/>
+          </a:fontRef>
+        </p:style>
+        <p:txBody>
+          <a:bodyPr rtlCol="0" anchor="ctr" wrap="square"/>
+          <a:lstStyle/>
+          <a:p>
+            <a:pPr algn="ctr"/>
+            <a:r>
+              <a:rPr sz="900" b="1" i="0">
+                <a:solidFill>
+                  <a:srgbClr val="1D1D1D"/>
+                </a:solidFill>
+              </a:rPr>
+              <a:t>Top-5 image pages</a:t>
+            </a:r>
+          </a:p>
+        </p:txBody>
+      </p:sp>
+      <p:sp>
+        <p:nvSpPr>
+          <p:cNvPr id="45" name="Rectangle 44"/>
+          <p:cNvSpPr/>
+          <p:nvPr/>
+        </p:nvSpPr>
+        <p:spPr>
+          <a:xfrm>
+            <a:off x="14413821" y="11955835"/>
+            <a:ext cx="3545357" cy="709071"/>
+          </a:xfrm>
+          <a:prstGeom prst="rect">
+            <a:avLst/>
+          </a:prstGeom>
+          <a:solidFill>
+            <a:srgbClr val="FDF5E7"/>
+          </a:solidFill>
+          <a:ln w="15240">
+            <a:solidFill>
+              <a:srgbClr val="C97B2C"/>
+            </a:solidFill>
+          </a:ln>
+        </p:spPr>
+        <p:style>
+          <a:lnRef idx="1">
+            <a:schemeClr val="accent1"/>
+          </a:lnRef>
+          <a:fillRef idx="3">
+            <a:schemeClr val="accent1"/>
+          </a:fillRef>
+          <a:effectRef idx="2">
+            <a:schemeClr val="accent1"/>
+          </a:effectRef>
+          <a:fontRef idx="minor">
+            <a:schemeClr val="lt1"/>
+          </a:fontRef>
+        </p:style>
+        <p:txBody>
+          <a:bodyPr rtlCol="0" anchor="ctr" wrap="square"/>
+          <a:lstStyle/>
+          <a:p>
+            <a:pPr algn="ctr"/>
+            <a:r>
+              <a:rPr sz="900" b="1" i="0">
+                <a:solidFill>
+                  <a:srgbClr val="1D1D1D"/>
+                </a:solidFill>
+              </a:rPr>
+              <a:t>qwen3.5:35b</a:t>
+            </a:r>
+          </a:p>
+          <a:p>
+            <a:pPr algn="ctr"/>
+            <a:r>
+              <a:rPr sz="700" b="0" i="0">
+                <a:solidFill>
+                  <a:srgbClr val="666666"/>
+                </a:solidFill>
+              </a:rPr>
+              <a:t>multimodal generator</a:t>
+            </a:r>
+          </a:p>
+        </p:txBody>
+      </p:sp>
+      <p:sp>
+        <p:nvSpPr>
+          <p:cNvPr id="46" name="Rectangle 45"/>
+          <p:cNvSpPr/>
+          <p:nvPr/>
+        </p:nvSpPr>
+        <p:spPr>
+          <a:xfrm>
+            <a:off x="14413821" y="13113984"/>
+            <a:ext cx="3545357" cy="614528"/>
+          </a:xfrm>
+          <a:prstGeom prst="rect">
+            <a:avLst/>
+          </a:prstGeom>
+          <a:solidFill>
+            <a:srgbClr val="FDF5E7"/>
+          </a:solidFill>
+          <a:ln w="15240">
+            <a:solidFill>
+              <a:srgbClr val="C97B2C"/>
+            </a:solidFill>
+          </a:ln>
+        </p:spPr>
+        <p:style>
+          <a:lnRef idx="1">
+            <a:schemeClr val="accent1"/>
+          </a:lnRef>
+          <a:fillRef idx="3">
+            <a:schemeClr val="accent1"/>
+          </a:fillRef>
+          <a:effectRef idx="2">
+            <a:schemeClr val="accent1"/>
+          </a:effectRef>
+          <a:fontRef idx="minor">
+            <a:schemeClr val="lt1"/>
+          </a:fontRef>
+        </p:style>
+        <p:txBody>
+          <a:bodyPr rtlCol="0" anchor="ctr" wrap="square"/>
+          <a:lstStyle/>
+          <a:p>
+            <a:pPr algn="ctr"/>
+            <a:r>
+              <a:rPr sz="900" b="1" i="0">
+                <a:solidFill>
+                  <a:srgbClr val="1D1D1D"/>
+                </a:solidFill>
+              </a:rPr>
+              <a:t>llama3.1:8b</a:t>
+            </a:r>
+          </a:p>
+          <a:p>
+            <a:pPr algn="ctr"/>
+            <a:r>
+              <a:rPr sz="700" b="0" i="0">
+                <a:solidFill>
+                  <a:srgbClr val="666666"/>
+                </a:solidFill>
+              </a:rPr>
+              <a:t>judge</a:t>
+            </a:r>
+          </a:p>
+        </p:txBody>
+      </p:sp>
+      <p:cxnSp>
+        <p:nvCxnSpPr>
+          <p:cNvPr id="47" name="Connector 46"/>
+          <p:cNvCxnSpPr/>
+          <p:nvPr/>
+        </p:nvCxnSpPr>
+        <p:spPr>
+          <a:xfrm flipH="1">
+            <a:off x="13468392" y="6874157"/>
+            <a:ext cx="2009036" cy="756342"/>
+          </a:xfrm>
+          <a:prstGeom prst="line">
+            <a:avLst/>
+          </a:prstGeom>
+          <a:ln w="15240">
+            <a:solidFill>
+              <a:srgbClr val="1b3a6b"/>
+            </a:solidFill>
+            <a:headEnd type="none"/>
+            <a:tailEnd type="arrow" w="med" len="med"/>
+          </a:ln>
+        </p:spPr>
+        <p:style>
+          <a:lnRef idx="2">
+            <a:schemeClr val="accent1"/>
+          </a:lnRef>
+          <a:fillRef idx="0">
+            <a:schemeClr val="accent1"/>
+          </a:fillRef>
+          <a:effectRef idx="1">
+            <a:schemeClr val="accent1"/>
+          </a:effectRef>
+          <a:fontRef idx="minor">
+            <a:schemeClr val="tx1"/>
+          </a:fontRef>
+        </p:style>
+      </p:cxnSp>
+      <p:cxnSp>
+        <p:nvCxnSpPr>
+          <p:cNvPr id="48" name="Connector 47"/>
+          <p:cNvCxnSpPr/>
+          <p:nvPr/>
+        </p:nvCxnSpPr>
+        <p:spPr>
+          <a:xfrm>
+            <a:off x="16895571" y="6874157"/>
+            <a:ext cx="2009036" cy="756342"/>
+          </a:xfrm>
+          <a:prstGeom prst="line">
+            <a:avLst/>
+          </a:prstGeom>
+          <a:ln w="15240">
+            <a:solidFill>
+              <a:srgbClr val="1b3a6b"/>
+            </a:solidFill>
+            <a:headEnd type="none"/>
+            <a:tailEnd type="arrow" w="med" len="med"/>
+          </a:ln>
+        </p:spPr>
+        <p:style>
+          <a:lnRef idx="2">
+            <a:schemeClr val="accent1"/>
+          </a:lnRef>
+          <a:fillRef idx="0">
+            <a:schemeClr val="accent1"/>
+          </a:fillRef>
+          <a:effectRef idx="1">
+            <a:schemeClr val="accent1"/>
+          </a:effectRef>
+          <a:fontRef idx="minor">
+            <a:schemeClr val="tx1"/>
+          </a:fontRef>
+        </p:style>
+      </p:cxnSp>
+      <p:cxnSp>
+        <p:nvCxnSpPr>
+          <p:cNvPr id="49" name="Connector 48"/>
+          <p:cNvCxnSpPr/>
+          <p:nvPr/>
+        </p:nvCxnSpPr>
+        <p:spPr>
+          <a:xfrm>
+            <a:off x="13468392" y="8434114"/>
+            <a:ext cx="0" cy="378171"/>
+          </a:xfrm>
+          <a:prstGeom prst="line">
+            <a:avLst/>
+          </a:prstGeom>
+          <a:ln w="15240">
+            <a:solidFill>
+              <a:srgbClr val="1b3a6b"/>
+            </a:solidFill>
+            <a:headEnd type="none"/>
+            <a:tailEnd type="arrow" w="med" len="med"/>
+          </a:ln>
+        </p:spPr>
+        <p:style>
+          <a:lnRef idx="2">
+            <a:schemeClr val="accent1"/>
+          </a:lnRef>
+          <a:fillRef idx="0">
+            <a:schemeClr val="accent1"/>
+          </a:fillRef>
+          <a:effectRef idx="1">
+            <a:schemeClr val="accent1"/>
+          </a:effectRef>
+          <a:fontRef idx="minor">
+            <a:schemeClr val="tx1"/>
+          </a:fontRef>
+        </p:style>
+      </p:cxnSp>
+      <p:cxnSp>
+        <p:nvCxnSpPr>
+          <p:cNvPr id="50" name="Connector 49"/>
+          <p:cNvCxnSpPr/>
+          <p:nvPr/>
+        </p:nvCxnSpPr>
+        <p:spPr>
+          <a:xfrm>
+            <a:off x="13468392" y="9426813"/>
+            <a:ext cx="0" cy="330900"/>
+          </a:xfrm>
+          <a:prstGeom prst="line">
+            <a:avLst/>
+          </a:prstGeom>
+          <a:ln w="15240">
+            <a:solidFill>
+              <a:srgbClr val="1b3a6b"/>
+            </a:solidFill>
+            <a:headEnd type="none"/>
+            <a:tailEnd type="arrow" w="med" len="med"/>
+          </a:ln>
+        </p:spPr>
+        <p:style>
+          <a:lnRef idx="2">
+            <a:schemeClr val="accent1"/>
+          </a:lnRef>
+          <a:fillRef idx="0">
+            <a:schemeClr val="accent1"/>
+          </a:fillRef>
+          <a:effectRef idx="1">
+            <a:schemeClr val="accent1"/>
+          </a:effectRef>
+          <a:fontRef idx="minor">
+            <a:schemeClr val="tx1"/>
+          </a:fontRef>
+        </p:style>
+      </p:cxnSp>
+      <p:cxnSp>
+        <p:nvCxnSpPr>
+          <p:cNvPr id="51" name="Connector 50"/>
+          <p:cNvCxnSpPr/>
+          <p:nvPr/>
+        </p:nvCxnSpPr>
+        <p:spPr>
+          <a:xfrm>
+            <a:off x="13468392" y="10372242"/>
+            <a:ext cx="0" cy="330900"/>
+          </a:xfrm>
+          <a:prstGeom prst="line">
+            <a:avLst/>
+          </a:prstGeom>
+          <a:ln w="15240">
+            <a:solidFill>
+              <a:srgbClr val="1b3a6b"/>
+            </a:solidFill>
+            <a:headEnd type="none"/>
+            <a:tailEnd type="arrow" w="med" len="med"/>
+          </a:ln>
+        </p:spPr>
+        <p:style>
+          <a:lnRef idx="2">
+            <a:schemeClr val="accent1"/>
+          </a:lnRef>
+          <a:fillRef idx="0">
+            <a:schemeClr val="accent1"/>
+          </a:fillRef>
+          <a:effectRef idx="1">
+            <a:schemeClr val="accent1"/>
+          </a:effectRef>
+          <a:fontRef idx="minor">
+            <a:schemeClr val="tx1"/>
+          </a:fontRef>
+        </p:style>
+      </p:cxnSp>
+      <p:cxnSp>
+        <p:nvCxnSpPr>
+          <p:cNvPr id="52" name="Connector 51"/>
+          <p:cNvCxnSpPr/>
+          <p:nvPr/>
+        </p:nvCxnSpPr>
+        <p:spPr>
+          <a:xfrm>
+            <a:off x="18904607" y="8245028"/>
+            <a:ext cx="0" cy="1512685"/>
+          </a:xfrm>
+          <a:prstGeom prst="line">
+            <a:avLst/>
+          </a:prstGeom>
+          <a:ln w="15240">
+            <a:solidFill>
+              <a:srgbClr val="1b3a6b"/>
+            </a:solidFill>
+            <a:headEnd type="none"/>
+            <a:tailEnd type="arrow" w="med" len="med"/>
+          </a:ln>
+        </p:spPr>
+        <p:style>
+          <a:lnRef idx="2">
+            <a:schemeClr val="accent1"/>
+          </a:lnRef>
+          <a:fillRef idx="0">
+            <a:schemeClr val="accent1"/>
+          </a:fillRef>
+          <a:effectRef idx="1">
+            <a:schemeClr val="accent1"/>
+          </a:effectRef>
+          <a:fontRef idx="minor">
+            <a:schemeClr val="tx1"/>
+          </a:fontRef>
+        </p:style>
+      </p:cxnSp>
+      <p:cxnSp>
+        <p:nvCxnSpPr>
+          <p:cNvPr id="53" name="Connector 52"/>
+          <p:cNvCxnSpPr/>
+          <p:nvPr/>
+        </p:nvCxnSpPr>
+        <p:spPr>
+          <a:xfrm>
+            <a:off x="18904607" y="10372242"/>
+            <a:ext cx="0" cy="330900"/>
+          </a:xfrm>
+          <a:prstGeom prst="line">
+            <a:avLst/>
+          </a:prstGeom>
+          <a:ln w="15240">
+            <a:solidFill>
+              <a:srgbClr val="1b3a6b"/>
+            </a:solidFill>
+            <a:headEnd type="none"/>
+            <a:tailEnd type="arrow" w="med" len="med"/>
+          </a:ln>
+        </p:spPr>
+        <p:style>
+          <a:lnRef idx="2">
+            <a:schemeClr val="accent1"/>
+          </a:lnRef>
+          <a:fillRef idx="0">
+            <a:schemeClr val="accent1"/>
+          </a:fillRef>
+          <a:effectRef idx="1">
+            <a:schemeClr val="accent1"/>
+          </a:effectRef>
+          <a:fontRef idx="minor">
+            <a:schemeClr val="tx1"/>
+          </a:fontRef>
+        </p:style>
+      </p:cxnSp>
+      <p:cxnSp>
+        <p:nvCxnSpPr>
+          <p:cNvPr id="54" name="Connector 53"/>
+          <p:cNvCxnSpPr/>
+          <p:nvPr/>
+        </p:nvCxnSpPr>
+        <p:spPr>
+          <a:xfrm>
+            <a:off x="14295642" y="11317670"/>
+            <a:ext cx="1181786" cy="567257"/>
+          </a:xfrm>
+          <a:prstGeom prst="line">
+            <a:avLst/>
+          </a:prstGeom>
+          <a:ln w="15240">
+            <a:solidFill>
+              <a:srgbClr val="1b3a6b"/>
+            </a:solidFill>
+            <a:headEnd type="none"/>
+            <a:tailEnd type="arrow" w="med" len="med"/>
+          </a:ln>
+        </p:spPr>
+        <p:style>
+          <a:lnRef idx="2">
+            <a:schemeClr val="accent1"/>
+          </a:lnRef>
+          <a:fillRef idx="0">
+            <a:schemeClr val="accent1"/>
+          </a:fillRef>
+          <a:effectRef idx="1">
+            <a:schemeClr val="accent1"/>
+          </a:effectRef>
+          <a:fontRef idx="minor">
+            <a:schemeClr val="tx1"/>
+          </a:fontRef>
+        </p:style>
+      </p:cxnSp>
+      <p:cxnSp>
+        <p:nvCxnSpPr>
+          <p:cNvPr id="55" name="Connector 54"/>
+          <p:cNvCxnSpPr/>
+          <p:nvPr/>
+        </p:nvCxnSpPr>
+        <p:spPr>
+          <a:xfrm flipH="1">
+            <a:off x="16895571" y="11317670"/>
+            <a:ext cx="1181786" cy="567257"/>
+          </a:xfrm>
+          <a:prstGeom prst="line">
+            <a:avLst/>
+          </a:prstGeom>
+          <a:ln w="15240">
+            <a:solidFill>
+              <a:srgbClr val="1b3a6b"/>
+            </a:solidFill>
+            <a:headEnd type="none"/>
+            <a:tailEnd type="arrow" w="med" len="med"/>
+          </a:ln>
+        </p:spPr>
+        <p:style>
+          <a:lnRef idx="2">
+            <a:schemeClr val="accent1"/>
+          </a:lnRef>
+          <a:fillRef idx="0">
+            <a:schemeClr val="accent1"/>
+          </a:fillRef>
+          <a:effectRef idx="1">
+            <a:schemeClr val="accent1"/>
+          </a:effectRef>
+          <a:fontRef idx="minor">
+            <a:schemeClr val="tx1"/>
+          </a:fontRef>
+        </p:style>
+      </p:cxnSp>
+      <p:cxnSp>
+        <p:nvCxnSpPr>
+          <p:cNvPr id="56" name="Connector 55"/>
+          <p:cNvCxnSpPr/>
+          <p:nvPr/>
+        </p:nvCxnSpPr>
+        <p:spPr>
+          <a:xfrm>
+            <a:off x="16186500" y="12664906"/>
+            <a:ext cx="0" cy="449078"/>
+          </a:xfrm>
+          <a:prstGeom prst="line">
+            <a:avLst/>
+          </a:prstGeom>
+          <a:ln w="15240">
+            <a:solidFill>
+              <a:srgbClr val="1b3a6b"/>
+            </a:solidFill>
+            <a:headEnd type="none"/>
+            <a:tailEnd type="arrow" w="med" len="med"/>
+          </a:ln>
+        </p:spPr>
+        <p:style>
+          <a:lnRef idx="2">
+            <a:schemeClr val="accent1"/>
+          </a:lnRef>
+          <a:fillRef idx="0">
+            <a:schemeClr val="accent1"/>
+          </a:fillRef>
+          <a:effectRef idx="1">
+            <a:schemeClr val="accent1"/>
+          </a:effectRef>
+          <a:fontRef idx="minor">
+            <a:schemeClr val="tx1"/>
+          </a:fontRef>
+        </p:style>
+      </p:cxnSp>
+      <p:sp>
+        <p:nvSpPr>
+          <p:cNvPr id="57" name="Rectangle 56"/>
+          <p:cNvSpPr/>
+          <p:nvPr/>
+        </p:nvSpPr>
+        <p:spPr>
+          <a:xfrm>
+            <a:off x="11223000" y="14210142"/>
+            <a:ext cx="72000" cy="324000"/>
+          </a:xfrm>
+          <a:prstGeom prst="rect">
+            <a:avLst/>
+          </a:prstGeom>
+          <a:solidFill>
+            <a:srgbClr val="C97B2C"/>
+          </a:solidFill>
+          <a:ln/>
+        </p:spPr>
+        <p:style>
+          <a:lnRef idx="1">
+            <a:schemeClr val="accent1"/>
+          </a:lnRef>
+          <a:fillRef idx="3">
+            <a:schemeClr val="accent1"/>
+          </a:fillRef>
+          <a:effectRef idx="2">
+            <a:schemeClr val="accent1"/>
+          </a:effectRef>
+          <a:fontRef idx="minor">
+            <a:schemeClr val="lt1"/>
+          </a:fontRef>
+        </p:style>
+        <p:txBody>
           <a:bodyPr rtlCol="0" anchor="ctr"/>
           <a:lstStyle/>
           <a:p>
@@ -4945,13 +5510,13 @@
       </p:sp>
       <p:sp>
         <p:nvSpPr>
-          <p:cNvPr id="47" name="TextBox 46"/>
+          <p:cNvPr id="58" name="TextBox 57"/>
           <p:cNvSpPr txBox="1"/>
           <p:nvPr/>
         </p:nvSpPr>
         <p:spPr>
           <a:xfrm>
-            <a:off x="11403000" y="9606240"/>
+            <a:off x="11403000" y="14156142"/>
             <a:ext cx="9747000" cy="432000"/>
           </a:xfrm>
           <a:prstGeom prst="rect">
@@ -4971,21 +5536,21 @@
                   <a:srgbClr val="1B3A6B"/>
                 </a:solidFill>
               </a:rPr>
-              <a:t>DeepSeek-OCR-2</a:t>
-            </a:r>
-          </a:p>
-        </p:txBody>
-      </p:sp>
-      <p:sp>
-        <p:nvSpPr>
-          <p:cNvPr id="48" name="TextBox 47"/>
+              <a:t>Model choices</a:t>
+            </a:r>
+          </a:p>
+        </p:txBody>
+      </p:sp>
+      <p:sp>
+        <p:nvSpPr>
+          <p:cNvPr id="59" name="TextBox 58"/>
           <p:cNvSpPr txBox="1"/>
           <p:nvPr/>
         </p:nvSpPr>
         <p:spPr>
           <a:xfrm>
-            <a:off x="11223000" y="10074240"/>
-            <a:ext cx="9927000" cy="936000"/>
+            <a:off x="11295000" y="14624142"/>
+            <a:ext cx="9855000" cy="491040"/>
           </a:xfrm>
           <a:prstGeom prst="rect">
             <a:avLst/>
@@ -4999,6 +5564,260 @@
           <a:lstStyle/>
           <a:p>
             <a:r>
+              <a:rPr sz="1200" b="0" i="0">
+                <a:solidFill>
+                  <a:srgbClr val="C97B2C"/>
+                </a:solidFill>
+              </a:rPr>
+              <a:t>• </a:t>
+            </a:r>
+            <a:r>
+              <a:rPr sz="1200" b="1" i="0">
+                <a:solidFill>
+                  <a:srgbClr val="1D1D1D"/>
+                </a:solidFill>
+              </a:rPr>
+              <a:t>DeepSeek-OCR-2: </a:t>
+            </a:r>
+            <a:r>
+              <a:rPr sz="1200" b="0" i="0">
+                <a:solidFill>
+                  <a:srgbClr val="1D1D1D"/>
+                </a:solidFill>
+              </a:rPr>
+              <a:t>open-weights document OCR with layout-preserving markdown (HTML tables, LaTeX)</a:t>
+            </a:r>
+          </a:p>
+        </p:txBody>
+      </p:sp>
+      <p:sp>
+        <p:nvSpPr>
+          <p:cNvPr id="60" name="TextBox 59"/>
+          <p:cNvSpPr txBox="1"/>
+          <p:nvPr/>
+        </p:nvSpPr>
+        <p:spPr>
+          <a:xfrm>
+            <a:off x="11295000" y="15043182"/>
+            <a:ext cx="9855000" cy="491040"/>
+          </a:xfrm>
+          <a:prstGeom prst="rect">
+            <a:avLst/>
+          </a:prstGeom>
+          <a:noFill/>
+        </p:spPr>
+        <p:txBody>
+          <a:bodyPr wrap="square">
+            <a:spAutoFit/>
+          </a:bodyPr>
+          <a:lstStyle/>
+          <a:p>
+            <a:r>
+              <a:rPr sz="1200" b="0" i="0">
+                <a:solidFill>
+                  <a:srgbClr val="C97B2C"/>
+                </a:solidFill>
+              </a:rPr>
+              <a:t>• </a:t>
+            </a:r>
+            <a:r>
+              <a:rPr sz="1200" b="1" i="0">
+                <a:solidFill>
+                  <a:srgbClr val="1D1D1D"/>
+                </a:solidFill>
+              </a:rPr>
+              <a:t>qwen3.5:35b: </a:t>
+            </a:r>
+            <a:r>
+              <a:rPr sz="1200" b="0" i="0">
+                <a:solidFill>
+                  <a:srgbClr val="1D1D1D"/>
+                </a:solidFill>
+              </a:rPr>
+              <a:t>multimodal generator, Q4-quantized MoE, fits on one 48 GB GPU, 262k context</a:t>
+            </a:r>
+          </a:p>
+        </p:txBody>
+      </p:sp>
+      <p:sp>
+        <p:nvSpPr>
+          <p:cNvPr id="61" name="TextBox 60"/>
+          <p:cNvSpPr txBox="1"/>
+          <p:nvPr/>
+        </p:nvSpPr>
+        <p:spPr>
+          <a:xfrm>
+            <a:off x="11295000" y="15462222"/>
+            <a:ext cx="9855000" cy="491040"/>
+          </a:xfrm>
+          <a:prstGeom prst="rect">
+            <a:avLst/>
+          </a:prstGeom>
+          <a:noFill/>
+        </p:spPr>
+        <p:txBody>
+          <a:bodyPr wrap="square">
+            <a:spAutoFit/>
+          </a:bodyPr>
+          <a:lstStyle/>
+          <a:p>
+            <a:r>
+              <a:rPr sz="1200" b="0" i="0">
+                <a:solidFill>
+                  <a:srgbClr val="C97B2C"/>
+                </a:solidFill>
+              </a:rPr>
+              <a:t>• </a:t>
+            </a:r>
+            <a:r>
+              <a:rPr sz="1200" b="1" i="0">
+                <a:solidFill>
+                  <a:srgbClr val="1D1D1D"/>
+                </a:solidFill>
+              </a:rPr>
+              <a:t>llama3.1:8b: </a:t>
+            </a:r>
+            <a:r>
+              <a:rPr sz="1200" b="0" i="0">
+                <a:solidFill>
+                  <a:srgbClr val="1D1D1D"/>
+                </a:solidFill>
+              </a:rPr>
+              <a:t>judge from a different model family (Meta vs Alibaba) to reduce self-preference bias</a:t>
+            </a:r>
+          </a:p>
+        </p:txBody>
+      </p:sp>
+      <p:sp>
+        <p:nvSpPr>
+          <p:cNvPr id="62" name="TextBox 61"/>
+          <p:cNvSpPr txBox="1"/>
+          <p:nvPr/>
+        </p:nvSpPr>
+        <p:spPr>
+          <a:xfrm>
+            <a:off x="11223000" y="15953262"/>
+            <a:ext cx="9927000" cy="432000"/>
+          </a:xfrm>
+          <a:prstGeom prst="rect">
+            <a:avLst/>
+          </a:prstGeom>
+          <a:noFill/>
+        </p:spPr>
+        <p:txBody>
+          <a:bodyPr wrap="square">
+            <a:spAutoFit/>
+          </a:bodyPr>
+          <a:lstStyle/>
+          <a:p>
+            <a:r>
+              <a:rPr sz="1100" b="0" i="0">
+                <a:solidFill>
+                  <a:srgbClr val="666666"/>
+                </a:solidFill>
+              </a:rPr>
+              <a:t>All components are open-weights and run on a single GPU.</a:t>
+            </a:r>
+          </a:p>
+        </p:txBody>
+      </p:sp>
+      <p:sp>
+        <p:nvSpPr>
+          <p:cNvPr id="63" name="Rectangle 62"/>
+          <p:cNvSpPr/>
+          <p:nvPr/>
+        </p:nvSpPr>
+        <p:spPr>
+          <a:xfrm>
+            <a:off x="11223000" y="16511262"/>
+            <a:ext cx="72000" cy="324000"/>
+          </a:xfrm>
+          <a:prstGeom prst="rect">
+            <a:avLst/>
+          </a:prstGeom>
+          <a:solidFill>
+            <a:srgbClr val="C97B2C"/>
+          </a:solidFill>
+          <a:ln/>
+        </p:spPr>
+        <p:style>
+          <a:lnRef idx="1">
+            <a:schemeClr val="accent1"/>
+          </a:lnRef>
+          <a:fillRef idx="3">
+            <a:schemeClr val="accent1"/>
+          </a:fillRef>
+          <a:effectRef idx="2">
+            <a:schemeClr val="accent1"/>
+          </a:effectRef>
+          <a:fontRef idx="minor">
+            <a:schemeClr val="lt1"/>
+          </a:fontRef>
+        </p:style>
+        <p:txBody>
+          <a:bodyPr rtlCol="0" anchor="ctr"/>
+          <a:lstStyle/>
+          <a:p>
+            <a:pPr algn="ctr"/>
+          </a:p>
+        </p:txBody>
+      </p:sp>
+      <p:sp>
+        <p:nvSpPr>
+          <p:cNvPr id="64" name="TextBox 63"/>
+          <p:cNvSpPr txBox="1"/>
+          <p:nvPr/>
+        </p:nvSpPr>
+        <p:spPr>
+          <a:xfrm>
+            <a:off x="11403000" y="16457262"/>
+            <a:ext cx="9747000" cy="432000"/>
+          </a:xfrm>
+          <a:prstGeom prst="rect">
+            <a:avLst/>
+          </a:prstGeom>
+          <a:noFill/>
+        </p:spPr>
+        <p:txBody>
+          <a:bodyPr wrap="square">
+            <a:spAutoFit/>
+          </a:bodyPr>
+          <a:lstStyle/>
+          <a:p>
+            <a:r>
+              <a:rPr sz="1500" b="1" i="0">
+                <a:solidFill>
+                  <a:srgbClr val="1B3A6B"/>
+                </a:solidFill>
+              </a:rPr>
+              <a:t>DeepSeek-OCR-2</a:t>
+            </a:r>
+          </a:p>
+        </p:txBody>
+      </p:sp>
+      <p:sp>
+        <p:nvSpPr>
+          <p:cNvPr id="65" name="TextBox 64"/>
+          <p:cNvSpPr txBox="1"/>
+          <p:nvPr/>
+        </p:nvSpPr>
+        <p:spPr>
+          <a:xfrm>
+            <a:off x="11223000" y="16925262"/>
+            <a:ext cx="9927000" cy="936000"/>
+          </a:xfrm>
+          <a:prstGeom prst="rect">
+            <a:avLst/>
+          </a:prstGeom>
+          <a:noFill/>
+        </p:spPr>
+        <p:txBody>
+          <a:bodyPr wrap="square">
+            <a:spAutoFit/>
+          </a:bodyPr>
+          <a:lstStyle/>
+          <a:p>
+            <a:r>
               <a:rPr sz="1300" b="0" i="0">
                 <a:solidFill>
                   <a:srgbClr val="1D1D1D"/>
@@ -5011,7 +5830,7 @@
       </p:sp>
       <p:pic>
         <p:nvPicPr>
-          <p:cNvPr id="49" name="Picture 48" descr="deepseek_ocr2_fig3.jpg"/>
+          <p:cNvPr id="66" name="Picture 65" descr="deepseek_ocr2_fig3.jpg"/>
           <p:cNvPicPr>
             <a:picLocks noChangeAspect="1"/>
           </p:cNvPicPr>
@@ -5025,7 +5844,7 @@
         </p:blipFill>
         <p:spPr>
           <a:xfrm>
-            <a:off x="11223000" y="11082240"/>
+            <a:off x="11223000" y="17933262"/>
             <a:ext cx="9927000" cy="3209730"/>
           </a:xfrm>
           <a:prstGeom prst="rect">
@@ -5035,13 +5854,13 @@
       </p:pic>
       <p:sp>
         <p:nvSpPr>
-          <p:cNvPr id="50" name="Rectangle 49"/>
+          <p:cNvPr id="67" name="Rectangle 66"/>
           <p:cNvSpPr/>
           <p:nvPr/>
         </p:nvSpPr>
         <p:spPr>
           <a:xfrm>
-            <a:off x="11223000" y="14525970"/>
+            <a:off x="11223000" y="21376992"/>
             <a:ext cx="72000" cy="324000"/>
           </a:xfrm>
           <a:prstGeom prst="rect">
@@ -5076,13 +5895,13 @@
       </p:sp>
       <p:sp>
         <p:nvSpPr>
-          <p:cNvPr id="51" name="TextBox 50"/>
+          <p:cNvPr id="68" name="TextBox 67"/>
           <p:cNvSpPr txBox="1"/>
           <p:nvPr/>
         </p:nvSpPr>
         <p:spPr>
           <a:xfrm>
-            <a:off x="11403000" y="14471970"/>
+            <a:off x="11403000" y="21322992"/>
             <a:ext cx="9747000" cy="432000"/>
           </a:xfrm>
           <a:prstGeom prst="rect">
@@ -5109,13 +5928,13 @@
       </p:sp>
       <p:sp>
         <p:nvSpPr>
-          <p:cNvPr id="52" name="TextBox 51"/>
+          <p:cNvPr id="69" name="TextBox 68"/>
           <p:cNvSpPr txBox="1"/>
           <p:nvPr/>
         </p:nvSpPr>
         <p:spPr>
           <a:xfrm>
-            <a:off x="11295000" y="14939970"/>
+            <a:off x="11295000" y="21790992"/>
             <a:ext cx="9855000" cy="491040"/>
           </a:xfrm>
           <a:prstGeom prst="rect">
@@ -5158,13 +5977,13 @@
       </p:sp>
       <p:sp>
         <p:nvSpPr>
-          <p:cNvPr id="53" name="TextBox 52"/>
+          <p:cNvPr id="70" name="TextBox 69"/>
           <p:cNvSpPr txBox="1"/>
           <p:nvPr/>
         </p:nvSpPr>
         <p:spPr>
           <a:xfrm>
-            <a:off x="11295000" y="15359010"/>
+            <a:off x="11295000" y="22210032"/>
             <a:ext cx="9855000" cy="491040"/>
           </a:xfrm>
           <a:prstGeom prst="rect">
@@ -5207,13 +6026,13 @@
       </p:sp>
       <p:sp>
         <p:nvSpPr>
-          <p:cNvPr id="54" name="TextBox 53"/>
+          <p:cNvPr id="71" name="TextBox 70"/>
           <p:cNvSpPr txBox="1"/>
           <p:nvPr/>
         </p:nvSpPr>
         <p:spPr>
           <a:xfrm>
-            <a:off x="11295000" y="15778050"/>
+            <a:off x="11295000" y="22629072"/>
             <a:ext cx="9855000" cy="491040"/>
           </a:xfrm>
           <a:prstGeom prst="rect">
@@ -5256,13 +6075,13 @@
       </p:sp>
       <p:sp>
         <p:nvSpPr>
-          <p:cNvPr id="55" name="TextBox 54"/>
+          <p:cNvPr id="72" name="TextBox 71"/>
           <p:cNvSpPr txBox="1"/>
           <p:nvPr/>
         </p:nvSpPr>
         <p:spPr>
           <a:xfrm>
-            <a:off x="11295000" y="16197090"/>
+            <a:off x="11295000" y="23048112"/>
             <a:ext cx="9855000" cy="491040"/>
           </a:xfrm>
           <a:prstGeom prst="rect">
@@ -5305,7 +6124,7 @@
       </p:sp>
       <p:sp>
         <p:nvSpPr>
-          <p:cNvPr id="56" name="Rectangle 55"/>
+          <p:cNvPr id="73" name="Rectangle 72"/>
           <p:cNvSpPr/>
           <p:nvPr/>
         </p:nvSpPr>
@@ -5346,7 +6165,7 @@
       </p:sp>
       <p:sp>
         <p:nvSpPr>
-          <p:cNvPr id="57" name="TextBox 56"/>
+          <p:cNvPr id="74" name="TextBox 73"/>
           <p:cNvSpPr txBox="1"/>
           <p:nvPr/>
         </p:nvSpPr>
@@ -5379,7 +6198,7 @@
       </p:sp>
       <p:sp>
         <p:nvSpPr>
-          <p:cNvPr id="58" name="Rectangle 57"/>
+          <p:cNvPr id="75" name="Rectangle 74"/>
           <p:cNvSpPr/>
           <p:nvPr/>
         </p:nvSpPr>
@@ -5420,7 +6239,7 @@
       </p:sp>
       <p:sp>
         <p:nvSpPr>
-          <p:cNvPr id="59" name="TextBox 58"/>
+          <p:cNvPr id="76" name="TextBox 75"/>
           <p:cNvSpPr txBox="1"/>
           <p:nvPr/>
         </p:nvSpPr>
@@ -5453,7 +6272,7 @@
       </p:sp>
       <p:graphicFrame>
         <p:nvGraphicFramePr>
-          <p:cNvPr id="60" name="Table 59"/>
+          <p:cNvPr id="77" name="Table 76"/>
           <p:cNvGraphicFramePr>
             <a:graphicFrameLocks noGrp="1"/>
           </p:cNvGraphicFramePr>
@@ -5873,7 +6692,7 @@
       </p:graphicFrame>
       <p:sp>
         <p:nvSpPr>
-          <p:cNvPr id="61" name="Rectangle 60"/>
+          <p:cNvPr id="78" name="Rectangle 77"/>
           <p:cNvSpPr/>
           <p:nvPr/>
         </p:nvSpPr>
@@ -5914,7 +6733,7 @@
       </p:sp>
       <p:sp>
         <p:nvSpPr>
-          <p:cNvPr id="62" name="TextBox 61"/>
+          <p:cNvPr id="79" name="TextBox 78"/>
           <p:cNvSpPr txBox="1"/>
           <p:nvPr/>
         </p:nvSpPr>
@@ -5947,7 +6766,7 @@
       </p:sp>
       <p:graphicFrame>
         <p:nvGraphicFramePr>
-          <p:cNvPr id="63" name="Table 62"/>
+          <p:cNvPr id="80" name="Table 79"/>
           <p:cNvGraphicFramePr>
             <a:graphicFrameLocks noGrp="1"/>
           </p:cNvGraphicFramePr>
@@ -6611,7 +7430,7 @@
       </p:graphicFrame>
       <p:sp>
         <p:nvSpPr>
-          <p:cNvPr id="64" name="Rectangle 63"/>
+          <p:cNvPr id="81" name="Rectangle 80"/>
           <p:cNvSpPr/>
           <p:nvPr/>
         </p:nvSpPr>
@@ -6652,7 +7471,7 @@
       </p:sp>
       <p:sp>
         <p:nvSpPr>
-          <p:cNvPr id="65" name="TextBox 64"/>
+          <p:cNvPr id="82" name="TextBox 81"/>
           <p:cNvSpPr txBox="1"/>
           <p:nvPr/>
         </p:nvSpPr>
@@ -6685,7 +7504,7 @@
       </p:sp>
       <p:graphicFrame>
         <p:nvGraphicFramePr>
-          <p:cNvPr id="66" name="Table 65"/>
+          <p:cNvPr id="83" name="Table 82"/>
           <p:cNvGraphicFramePr>
             <a:graphicFrameLocks noGrp="1"/>
           </p:cNvGraphicFramePr>
@@ -7434,7 +8253,7 @@
       </p:graphicFrame>
       <p:sp>
         <p:nvSpPr>
-          <p:cNvPr id="67" name="Rectangle 66"/>
+          <p:cNvPr id="84" name="Rectangle 83"/>
           <p:cNvSpPr/>
           <p:nvPr/>
         </p:nvSpPr>
@@ -7475,7 +8294,7 @@
       </p:sp>
       <p:sp>
         <p:nvSpPr>
-          <p:cNvPr id="68" name="TextBox 67"/>
+          <p:cNvPr id="85" name="TextBox 84"/>
           <p:cNvSpPr txBox="1"/>
           <p:nvPr/>
         </p:nvSpPr>
@@ -7508,7 +8327,7 @@
       </p:sp>
       <p:sp>
         <p:nvSpPr>
-          <p:cNvPr id="69" name="Rectangle 68"/>
+          <p:cNvPr id="86" name="Rectangle 85"/>
           <p:cNvSpPr/>
           <p:nvPr/>
         </p:nvSpPr>
@@ -7549,7 +8368,7 @@
       </p:sp>
       <p:sp>
         <p:nvSpPr>
-          <p:cNvPr id="70" name="Rectangle 69"/>
+          <p:cNvPr id="87" name="Rectangle 86"/>
           <p:cNvSpPr/>
           <p:nvPr/>
         </p:nvSpPr>
@@ -7590,7 +8409,7 @@
       </p:sp>
       <p:sp>
         <p:nvSpPr>
-          <p:cNvPr id="71" name="TextBox 70"/>
+          <p:cNvPr id="88" name="TextBox 87"/>
           <p:cNvSpPr txBox="1"/>
           <p:nvPr/>
         </p:nvSpPr>
@@ -7623,7 +8442,7 @@
       </p:sp>
       <p:sp>
         <p:nvSpPr>
-          <p:cNvPr id="72" name="TextBox 71"/>
+          <p:cNvPr id="89" name="TextBox 88"/>
           <p:cNvSpPr txBox="1"/>
           <p:nvPr/>
         </p:nvSpPr>
@@ -7672,7 +8491,7 @@
       </p:sp>
       <p:sp>
         <p:nvSpPr>
-          <p:cNvPr id="73" name="TextBox 72"/>
+          <p:cNvPr id="90" name="TextBox 89"/>
           <p:cNvSpPr txBox="1"/>
           <p:nvPr/>
         </p:nvSpPr>
@@ -7721,7 +8540,7 @@
       </p:sp>
       <p:sp>
         <p:nvSpPr>
-          <p:cNvPr id="74" name="TextBox 73"/>
+          <p:cNvPr id="91" name="TextBox 90"/>
           <p:cNvSpPr txBox="1"/>
           <p:nvPr/>
         </p:nvSpPr>
@@ -7770,7 +8589,7 @@
       </p:sp>
       <p:sp>
         <p:nvSpPr>
-          <p:cNvPr id="75" name="TextBox 74"/>
+          <p:cNvPr id="92" name="TextBox 91"/>
           <p:cNvSpPr txBox="1"/>
           <p:nvPr/>
         </p:nvSpPr>
@@ -7819,7 +8638,7 @@
       </p:sp>
       <p:sp>
         <p:nvSpPr>
-          <p:cNvPr id="76" name="TextBox 75"/>
+          <p:cNvPr id="93" name="TextBox 92"/>
           <p:cNvSpPr txBox="1"/>
           <p:nvPr/>
         </p:nvSpPr>
@@ -7868,7 +8687,7 @@
       </p:sp>
       <p:sp>
         <p:nvSpPr>
-          <p:cNvPr id="77" name="TextBox 76"/>
+          <p:cNvPr id="94" name="TextBox 93"/>
           <p:cNvSpPr txBox="1"/>
           <p:nvPr/>
         </p:nvSpPr>
@@ -7917,7 +8736,7 @@
       </p:sp>
       <p:sp>
         <p:nvSpPr>
-          <p:cNvPr id="78" name="Rectangle 77"/>
+          <p:cNvPr id="95" name="Rectangle 94"/>
           <p:cNvSpPr/>
           <p:nvPr/>
         </p:nvSpPr>
@@ -7958,7 +8777,7 @@
       </p:sp>
       <p:sp>
         <p:nvSpPr>
-          <p:cNvPr id="79" name="TextBox 78"/>
+          <p:cNvPr id="96" name="TextBox 95"/>
           <p:cNvSpPr txBox="1"/>
           <p:nvPr/>
         </p:nvSpPr>
@@ -7991,7 +8810,7 @@
       </p:sp>
       <p:sp>
         <p:nvSpPr>
-          <p:cNvPr id="80" name="Rectangle 79"/>
+          <p:cNvPr id="97" name="Rectangle 96"/>
           <p:cNvSpPr/>
           <p:nvPr/>
         </p:nvSpPr>
@@ -8032,7 +8851,7 @@
       </p:sp>
       <p:sp>
         <p:nvSpPr>
-          <p:cNvPr id="81" name="TextBox 80"/>
+          <p:cNvPr id="98" name="TextBox 97"/>
           <p:cNvSpPr txBox="1"/>
           <p:nvPr/>
         </p:nvSpPr>
@@ -8065,7 +8884,7 @@
       </p:sp>
       <p:sp>
         <p:nvSpPr>
-          <p:cNvPr id="82" name="TextBox 81"/>
+          <p:cNvPr id="99" name="TextBox 98"/>
           <p:cNvSpPr txBox="1"/>
           <p:nvPr/>
         </p:nvSpPr>
@@ -8114,7 +8933,7 @@
       </p:sp>
       <p:sp>
         <p:nvSpPr>
-          <p:cNvPr id="83" name="TextBox 82"/>
+          <p:cNvPr id="100" name="TextBox 99"/>
           <p:cNvSpPr txBox="1"/>
           <p:nvPr/>
         </p:nvSpPr>
@@ -8163,7 +8982,7 @@
       </p:sp>
       <p:sp>
         <p:nvSpPr>
-          <p:cNvPr id="84" name="Rectangle 83"/>
+          <p:cNvPr id="101" name="Rectangle 100"/>
           <p:cNvSpPr/>
           <p:nvPr/>
         </p:nvSpPr>
@@ -8204,7 +9023,7 @@
       </p:sp>
       <p:sp>
         <p:nvSpPr>
-          <p:cNvPr id="85" name="TextBox 84"/>
+          <p:cNvPr id="102" name="TextBox 101"/>
           <p:cNvSpPr txBox="1"/>
           <p:nvPr/>
         </p:nvSpPr>
@@ -8237,7 +9056,7 @@
       </p:sp>
       <p:sp>
         <p:nvSpPr>
-          <p:cNvPr id="86" name="TextBox 85"/>
+          <p:cNvPr id="103" name="TextBox 102"/>
           <p:cNvSpPr txBox="1"/>
           <p:nvPr/>
         </p:nvSpPr>
@@ -8286,7 +9105,7 @@
       </p:sp>
       <p:sp>
         <p:nvSpPr>
-          <p:cNvPr id="87" name="TextBox 86"/>
+          <p:cNvPr id="104" name="TextBox 103"/>
           <p:cNvSpPr txBox="1"/>
           <p:nvPr/>
         </p:nvSpPr>
@@ -8335,7 +9154,7 @@
       </p:sp>
       <p:sp>
         <p:nvSpPr>
-          <p:cNvPr id="88" name="TextBox 87"/>
+          <p:cNvPr id="105" name="TextBox 104"/>
           <p:cNvSpPr txBox="1"/>
           <p:nvPr/>
         </p:nvSpPr>
@@ -8384,7 +9203,7 @@
       </p:sp>
       <p:sp>
         <p:nvSpPr>
-          <p:cNvPr id="89" name="TextBox 88"/>
+          <p:cNvPr id="106" name="TextBox 105"/>
           <p:cNvSpPr txBox="1"/>
           <p:nvPr/>
         </p:nvSpPr>
@@ -8433,7 +9252,7 @@
       </p:sp>
       <p:sp>
         <p:nvSpPr>
-          <p:cNvPr id="90" name="Rectangle 89"/>
+          <p:cNvPr id="107" name="Rectangle 106"/>
           <p:cNvSpPr/>
           <p:nvPr/>
         </p:nvSpPr>
@@ -8474,7 +9293,7 @@
       </p:sp>
       <p:sp>
         <p:nvSpPr>
-          <p:cNvPr id="91" name="TextBox 90"/>
+          <p:cNvPr id="108" name="TextBox 107"/>
           <p:cNvSpPr txBox="1"/>
           <p:nvPr/>
         </p:nvSpPr>
@@ -8507,7 +9326,7 @@
       </p:sp>
       <p:sp>
         <p:nvSpPr>
-          <p:cNvPr id="92" name="TextBox 91"/>
+          <p:cNvPr id="109" name="TextBox 108"/>
           <p:cNvSpPr txBox="1"/>
           <p:nvPr/>
         </p:nvSpPr>
@@ -8556,7 +9375,7 @@
       </p:sp>
       <p:sp>
         <p:nvSpPr>
-          <p:cNvPr id="93" name="TextBox 92"/>
+          <p:cNvPr id="110" name="TextBox 109"/>
           <p:cNvSpPr txBox="1"/>
           <p:nvPr/>
         </p:nvSpPr>
@@ -8605,7 +9424,7 @@
       </p:sp>
       <p:sp>
         <p:nvSpPr>
-          <p:cNvPr id="94" name="TextBox 93"/>
+          <p:cNvPr id="111" name="TextBox 110"/>
           <p:cNvSpPr txBox="1"/>
           <p:nvPr/>
         </p:nvSpPr>
@@ -8654,7 +9473,7 @@
       </p:sp>
       <p:sp>
         <p:nvSpPr>
-          <p:cNvPr id="95" name="TextBox 94"/>
+          <p:cNvPr id="112" name="TextBox 111"/>
           <p:cNvSpPr txBox="1"/>
           <p:nvPr/>
         </p:nvSpPr>
@@ -8703,7 +9522,7 @@
       </p:sp>
       <p:sp>
         <p:nvSpPr>
-          <p:cNvPr id="96" name="Rectangle 95"/>
+          <p:cNvPr id="113" name="Rectangle 112"/>
           <p:cNvSpPr/>
           <p:nvPr/>
         </p:nvSpPr>
@@ -8744,7 +9563,7 @@
       </p:sp>
       <p:sp>
         <p:nvSpPr>
-          <p:cNvPr id="97" name="TextBox 96"/>
+          <p:cNvPr id="114" name="TextBox 113"/>
           <p:cNvSpPr txBox="1"/>
           <p:nvPr/>
         </p:nvSpPr>
